--- a/mon/sinh_hoc/de_cuong/lop10/DeCuong_SINH10_GK1.pptx
+++ b/mon/sinh_hoc/de_cuong/lop10/DeCuong_SINH10_GK1.pptx
@@ -58,6 +58,7 @@
     <p:sldId id="306" r:id="rId57"/>
     <p:sldId id="307" r:id="rId58"/>
     <p:sldId id="308" r:id="rId59"/>
+    <p:sldId id="309" r:id="rId60"/>
   </p:sldIdLst>
   <p:sldSz cx="12191695" cy="6858000" type="screen4x3"/>
   <p:notesSz cx="6858000" cy="9144000"/>
@@ -3297,14 +3298,14 @@
         </p:nvSpPr>
         <p:spPr>
           <a:xfrm>
-            <a:off x="10701223" y="457200"/>
-            <a:ext cx="941832" cy="457200"/>
+            <a:off x="10463479" y="457200"/>
+            <a:ext cx="1179576" cy="457200"/>
           </a:xfrm>
           <a:prstGeom prst="roundRect">
             <a:avLst/>
           </a:prstGeom>
           <a:solidFill>
-            <a:srgbClr val="1E40AF"/>
+            <a:srgbClr val="991B1B"/>
           </a:solidFill>
           <a:ln>
             <a:noFill/>
@@ -3337,7 +3338,7 @@
                 </a:solidFill>
                 <a:latin typeface="Arial"/>
               </a:rPr>
-              <a:t>ĐỀ BÀI</a:t>
+              <a:t>LỜI GIẢI</a:t>
             </a:r>
           </a:p>
         </p:txBody>
@@ -3351,7 +3352,7 @@
         <p:spPr>
           <a:xfrm>
             <a:off x="731520" y="274320"/>
-            <a:ext cx="10030968" cy="868680"/>
+            <a:ext cx="9793224" cy="868680"/>
           </a:xfrm>
           <a:prstGeom prst="rect">
             <a:avLst/>
@@ -3371,7 +3372,7 @@
                 </a:solidFill>
                 <a:latin typeface="Arial"/>
               </a:rPr>
-              <a:t>ĐỀ MINH HỌA · PHẦN I · CÂU 2</a:t>
+              <a:t>ĐỀ MINH HỌA · PHẦN I · CÂU 1</a:t>
             </a:r>
           </a:p>
         </p:txBody>
@@ -3477,83 +3478,45 @@
           </a:bodyPr>
           <a:lstStyle/>
           <a:p>
-            <a:pPr algn="l">
+            <a:pPr algn="l" marL="365760" indent="-365760">
               <a:spcAft>
                 <a:spcPts val="800"/>
               </a:spcAft>
+              <a:buClr>
+                <a:srgbClr val="1E40AF"/>
+              </a:buClr>
+              <a:buFont typeface="Arial"/>
+              <a:buChar char="•"/>
             </a:pPr>
             <a:r>
-              <a:rPr sz="2000" b="1">
+              <a:rPr sz="2000">
                 <a:solidFill>
                   <a:srgbClr val="1E293B"/>
                 </a:solidFill>
                 <a:latin typeface="Calibri"/>
               </a:rPr>
-              <a:t>Phương pháp chủ động tác động, kiểm soát điều kiện để kiểm tra giả thuyết là phương pháp</a:t>
-            </a:r>
-          </a:p>
-          <a:p>
-            <a:pPr algn="l">
+              <a:t>Đáp án A.</a:t>
+            </a:r>
+          </a:p>
+          <a:p>
+            <a:pPr algn="l" marL="365760" indent="-365760">
               <a:spcAft>
                 <a:spcPts val="800"/>
               </a:spcAft>
+              <a:buClr>
+                <a:srgbClr val="1E40AF"/>
+              </a:buClr>
+              <a:buFont typeface="Arial"/>
+              <a:buChar char="•"/>
             </a:pPr>
             <a:r>
-              <a:rPr sz="2000" b="1">
+              <a:rPr sz="2000">
                 <a:solidFill>
                   <a:srgbClr val="1E293B"/>
                 </a:solidFill>
                 <a:latin typeface="Calibri"/>
               </a:rPr>
-              <a:t>A. tra cứu tài liệu</a:t>
-            </a:r>
-          </a:p>
-          <a:p>
-            <a:pPr algn="l">
-              <a:spcAft>
-                <a:spcPts val="800"/>
-              </a:spcAft>
-            </a:pPr>
-            <a:r>
-              <a:rPr sz="2000" b="1">
-                <a:solidFill>
-                  <a:srgbClr val="1E293B"/>
-                </a:solidFill>
-                <a:latin typeface="Calibri"/>
-              </a:rPr>
-              <a:t>B. quan sát</a:t>
-            </a:r>
-          </a:p>
-          <a:p>
-            <a:pPr algn="l">
-              <a:spcAft>
-                <a:spcPts val="800"/>
-              </a:spcAft>
-            </a:pPr>
-            <a:r>
-              <a:rPr sz="2000" b="1">
-                <a:solidFill>
-                  <a:srgbClr val="1E293B"/>
-                </a:solidFill>
-                <a:latin typeface="Calibri"/>
-              </a:rPr>
-              <a:t>C. điều tra xã hội học</a:t>
-            </a:r>
-          </a:p>
-          <a:p>
-            <a:pPr algn="l">
-              <a:spcAft>
-                <a:spcPts val="800"/>
-              </a:spcAft>
-            </a:pPr>
-            <a:r>
-              <a:rPr sz="2000" b="1">
-                <a:solidFill>
-                  <a:srgbClr val="1E293B"/>
-                </a:solidFill>
-                <a:latin typeface="Calibri"/>
-              </a:rPr>
-              <a:t>D. thực nghiệm khoa học</a:t>
+              <a:t>SGK tr.8: Deinococcus radiodurans chịu phóng xạ tốt nhất; Shewanella oneidensis sinh năng lượng điện; Chlorobium tepidum sinh năng lượng từ ánh sáng.</a:t>
             </a:r>
           </a:p>
         </p:txBody>
@@ -3636,14 +3599,14 @@
         </p:nvSpPr>
         <p:spPr>
           <a:xfrm>
-            <a:off x="10463479" y="457200"/>
-            <a:ext cx="1179576" cy="457200"/>
+            <a:off x="10701223" y="457200"/>
+            <a:ext cx="941832" cy="457200"/>
           </a:xfrm>
           <a:prstGeom prst="roundRect">
             <a:avLst/>
           </a:prstGeom>
           <a:solidFill>
-            <a:srgbClr val="991B1B"/>
+            <a:srgbClr val="1E40AF"/>
           </a:solidFill>
           <a:ln>
             <a:noFill/>
@@ -3676,7 +3639,7 @@
                 </a:solidFill>
                 <a:latin typeface="Arial"/>
               </a:rPr>
-              <a:t>LỜI GIẢI</a:t>
+              <a:t>ĐỀ BÀI</a:t>
             </a:r>
           </a:p>
         </p:txBody>
@@ -3690,7 +3653,7 @@
         <p:spPr>
           <a:xfrm>
             <a:off x="731520" y="274320"/>
-            <a:ext cx="9793224" cy="868680"/>
+            <a:ext cx="10030968" cy="868680"/>
           </a:xfrm>
           <a:prstGeom prst="rect">
             <a:avLst/>
@@ -3816,45 +3779,83 @@
           </a:bodyPr>
           <a:lstStyle/>
           <a:p>
-            <a:pPr algn="l" marL="365760" indent="-365760">
+            <a:pPr algn="l">
               <a:spcAft>
                 <a:spcPts val="800"/>
               </a:spcAft>
-              <a:buClr>
-                <a:srgbClr val="1E40AF"/>
-              </a:buClr>
-              <a:buFont typeface="Arial"/>
-              <a:buChar char="•"/>
             </a:pPr>
             <a:r>
-              <a:rPr sz="2000">
+              <a:rPr sz="2000" b="1">
                 <a:solidFill>
                   <a:srgbClr val="1E293B"/>
                 </a:solidFill>
                 <a:latin typeface="Calibri"/>
               </a:rPr>
-              <a:t>Đáp án D.</a:t>
-            </a:r>
-          </a:p>
-          <a:p>
-            <a:pPr algn="l" marL="365760" indent="-365760">
+              <a:t>Phương pháp chủ động tác động, kiểm soát điều kiện để kiểm tra giả thuyết là phương pháp</a:t>
+            </a:r>
+          </a:p>
+          <a:p>
+            <a:pPr algn="l">
               <a:spcAft>
                 <a:spcPts val="800"/>
               </a:spcAft>
-              <a:buClr>
-                <a:srgbClr val="1E40AF"/>
-              </a:buClr>
-              <a:buFont typeface="Arial"/>
-              <a:buChar char="•"/>
             </a:pPr>
             <a:r>
-              <a:rPr sz="2000">
+              <a:rPr sz="2000" b="1">
                 <a:solidFill>
                   <a:srgbClr val="1E293B"/>
                 </a:solidFill>
                 <a:latin typeface="Calibri"/>
               </a:rPr>
-              <a:t>SGK mục I.3.</a:t>
+              <a:t>A. tra cứu tài liệu</a:t>
+            </a:r>
+          </a:p>
+          <a:p>
+            <a:pPr algn="l">
+              <a:spcAft>
+                <a:spcPts val="800"/>
+              </a:spcAft>
+            </a:pPr>
+            <a:r>
+              <a:rPr sz="2000" b="1">
+                <a:solidFill>
+                  <a:srgbClr val="1E293B"/>
+                </a:solidFill>
+                <a:latin typeface="Calibri"/>
+              </a:rPr>
+              <a:t>B. quan sát</a:t>
+            </a:r>
+          </a:p>
+          <a:p>
+            <a:pPr algn="l">
+              <a:spcAft>
+                <a:spcPts val="800"/>
+              </a:spcAft>
+            </a:pPr>
+            <a:r>
+              <a:rPr sz="2000" b="1">
+                <a:solidFill>
+                  <a:srgbClr val="1E293B"/>
+                </a:solidFill>
+                <a:latin typeface="Calibri"/>
+              </a:rPr>
+              <a:t>C. điều tra xã hội học</a:t>
+            </a:r>
+          </a:p>
+          <a:p>
+            <a:pPr algn="l">
+              <a:spcAft>
+                <a:spcPts val="800"/>
+              </a:spcAft>
+            </a:pPr>
+            <a:r>
+              <a:rPr sz="2000" b="1">
+                <a:solidFill>
+                  <a:srgbClr val="1E293B"/>
+                </a:solidFill>
+                <a:latin typeface="Calibri"/>
+              </a:rPr>
+              <a:t>D. thực nghiệm khoa học</a:t>
             </a:r>
           </a:p>
         </p:txBody>
@@ -3937,14 +3938,14 @@
         </p:nvSpPr>
         <p:spPr>
           <a:xfrm>
-            <a:off x="10701223" y="457200"/>
-            <a:ext cx="941832" cy="457200"/>
+            <a:off x="10463479" y="457200"/>
+            <a:ext cx="1179576" cy="457200"/>
           </a:xfrm>
           <a:prstGeom prst="roundRect">
             <a:avLst/>
           </a:prstGeom>
           <a:solidFill>
-            <a:srgbClr val="1E40AF"/>
+            <a:srgbClr val="991B1B"/>
           </a:solidFill>
           <a:ln>
             <a:noFill/>
@@ -3977,7 +3978,7 @@
                 </a:solidFill>
                 <a:latin typeface="Arial"/>
               </a:rPr>
-              <a:t>ĐỀ BÀI</a:t>
+              <a:t>LỜI GIẢI</a:t>
             </a:r>
           </a:p>
         </p:txBody>
@@ -3991,7 +3992,7 @@
         <p:spPr>
           <a:xfrm>
             <a:off x="731520" y="274320"/>
-            <a:ext cx="10030968" cy="868680"/>
+            <a:ext cx="9793224" cy="868680"/>
           </a:xfrm>
           <a:prstGeom prst="rect">
             <a:avLst/>
@@ -4011,7 +4012,7 @@
                 </a:solidFill>
                 <a:latin typeface="Arial"/>
               </a:rPr>
-              <a:t>ĐỀ MINH HỌA · PHẦN I · CÂU 3</a:t>
+              <a:t>ĐỀ MINH HỌA · PHẦN I · CÂU 2</a:t>
             </a:r>
           </a:p>
         </p:txBody>
@@ -4117,83 +4118,45 @@
           </a:bodyPr>
           <a:lstStyle/>
           <a:p>
-            <a:pPr algn="l">
+            <a:pPr algn="l" marL="365760" indent="-365760">
               <a:spcAft>
                 <a:spcPts val="800"/>
               </a:spcAft>
+              <a:buClr>
+                <a:srgbClr val="1E40AF"/>
+              </a:buClr>
+              <a:buFont typeface="Arial"/>
+              <a:buChar char="•"/>
             </a:pPr>
             <a:r>
-              <a:rPr sz="2000" b="1">
+              <a:rPr sz="2000">
                 <a:solidFill>
                   <a:srgbClr val="1E293B"/>
                 </a:solidFill>
                 <a:latin typeface="Calibri"/>
               </a:rPr>
-              <a:t>Một con robot có thể di chuyển, trả lời câu hỏi. Đặc điểm nào cho thấy robot không phải vật sống?</a:t>
-            </a:r>
-          </a:p>
-          <a:p>
-            <a:pPr algn="l">
+              <a:t>Đáp án D.</a:t>
+            </a:r>
+          </a:p>
+          <a:p>
+            <a:pPr algn="l" marL="365760" indent="-365760">
               <a:spcAft>
                 <a:spcPts val="800"/>
               </a:spcAft>
+              <a:buClr>
+                <a:srgbClr val="1E40AF"/>
+              </a:buClr>
+              <a:buFont typeface="Arial"/>
+              <a:buChar char="•"/>
             </a:pPr>
             <a:r>
-              <a:rPr sz="2000" b="1">
+              <a:rPr sz="2000">
                 <a:solidFill>
                   <a:srgbClr val="1E293B"/>
                 </a:solidFill>
                 <a:latin typeface="Calibri"/>
               </a:rPr>
-              <a:t>A. Robot tương tác với môi trường</a:t>
-            </a:r>
-          </a:p>
-          <a:p>
-            <a:pPr algn="l">
-              <a:spcAft>
-                <a:spcPts val="800"/>
-              </a:spcAft>
-            </a:pPr>
-            <a:r>
-              <a:rPr sz="2000" b="1">
-                <a:solidFill>
-                  <a:srgbClr val="1E293B"/>
-                </a:solidFill>
-                <a:latin typeface="Calibri"/>
-              </a:rPr>
-              <a:t>B. Robot có thể di chuyển</a:t>
-            </a:r>
-          </a:p>
-          <a:p>
-            <a:pPr algn="l">
-              <a:spcAft>
-                <a:spcPts val="800"/>
-              </a:spcAft>
-            </a:pPr>
-            <a:r>
-              <a:rPr sz="2000" b="1">
-                <a:solidFill>
-                  <a:srgbClr val="1E293B"/>
-                </a:solidFill>
-                <a:latin typeface="Calibri"/>
-              </a:rPr>
-              <a:t>C. Robot tiêu thụ năng lượng</a:t>
-            </a:r>
-          </a:p>
-          <a:p>
-            <a:pPr algn="l">
-              <a:spcAft>
-                <a:spcPts val="800"/>
-              </a:spcAft>
-            </a:pPr>
-            <a:r>
-              <a:rPr sz="2000" b="1">
-                <a:solidFill>
-                  <a:srgbClr val="1E293B"/>
-                </a:solidFill>
-                <a:latin typeface="Calibri"/>
-              </a:rPr>
-              <a:t>D. Robot không tự sinh trưởng, sinh sản và không cấu tạo từ tế bào</a:t>
+              <a:t>SGK mục I.3.</a:t>
             </a:r>
           </a:p>
         </p:txBody>
@@ -4276,14 +4239,14 @@
         </p:nvSpPr>
         <p:spPr>
           <a:xfrm>
-            <a:off x="10463479" y="457200"/>
-            <a:ext cx="1179576" cy="457200"/>
+            <a:off x="10701223" y="457200"/>
+            <a:ext cx="941832" cy="457200"/>
           </a:xfrm>
           <a:prstGeom prst="roundRect">
             <a:avLst/>
           </a:prstGeom>
           <a:solidFill>
-            <a:srgbClr val="991B1B"/>
+            <a:srgbClr val="1E40AF"/>
           </a:solidFill>
           <a:ln>
             <a:noFill/>
@@ -4316,7 +4279,7 @@
                 </a:solidFill>
                 <a:latin typeface="Arial"/>
               </a:rPr>
-              <a:t>LỜI GIẢI</a:t>
+              <a:t>ĐỀ BÀI</a:t>
             </a:r>
           </a:p>
         </p:txBody>
@@ -4330,7 +4293,7 @@
         <p:spPr>
           <a:xfrm>
             <a:off x="731520" y="274320"/>
-            <a:ext cx="9793224" cy="868680"/>
+            <a:ext cx="10030968" cy="868680"/>
           </a:xfrm>
           <a:prstGeom prst="rect">
             <a:avLst/>
@@ -4456,45 +4419,83 @@
           </a:bodyPr>
           <a:lstStyle/>
           <a:p>
-            <a:pPr algn="l" marL="365760" indent="-365760">
+            <a:pPr algn="l">
               <a:spcAft>
                 <a:spcPts val="800"/>
               </a:spcAft>
-              <a:buClr>
-                <a:srgbClr val="1E40AF"/>
-              </a:buClr>
-              <a:buFont typeface="Arial"/>
-              <a:buChar char="•"/>
             </a:pPr>
             <a:r>
-              <a:rPr sz="2000">
+              <a:rPr sz="2000" b="1">
                 <a:solidFill>
                   <a:srgbClr val="1E293B"/>
                 </a:solidFill>
                 <a:latin typeface="Calibri"/>
               </a:rPr>
-              <a:t>Đáp án D.</a:t>
-            </a:r>
-          </a:p>
-          <a:p>
-            <a:pPr algn="l" marL="365760" indent="-365760">
+              <a:t>Một con robot có thể di chuyển, trả lời câu hỏi. Đặc điểm nào cho thấy robot không phải vật sống?</a:t>
+            </a:r>
+          </a:p>
+          <a:p>
+            <a:pPr algn="l">
               <a:spcAft>
                 <a:spcPts val="800"/>
               </a:spcAft>
-              <a:buClr>
-                <a:srgbClr val="1E40AF"/>
-              </a:buClr>
-              <a:buFont typeface="Arial"/>
-              <a:buChar char="•"/>
             </a:pPr>
             <a:r>
-              <a:rPr sz="2000">
+              <a:rPr sz="2000" b="1">
                 <a:solidFill>
                   <a:srgbClr val="1E293B"/>
                 </a:solidFill>
                 <a:latin typeface="Calibri"/>
               </a:rPr>
-              <a:t>Luyện tập và vận dụng câu 2.</a:t>
+              <a:t>A. Robot tương tác với môi trường</a:t>
+            </a:r>
+          </a:p>
+          <a:p>
+            <a:pPr algn="l">
+              <a:spcAft>
+                <a:spcPts val="800"/>
+              </a:spcAft>
+            </a:pPr>
+            <a:r>
+              <a:rPr sz="2000" b="1">
+                <a:solidFill>
+                  <a:srgbClr val="1E293B"/>
+                </a:solidFill>
+                <a:latin typeface="Calibri"/>
+              </a:rPr>
+              <a:t>B. Robot có thể di chuyển</a:t>
+            </a:r>
+          </a:p>
+          <a:p>
+            <a:pPr algn="l">
+              <a:spcAft>
+                <a:spcPts val="800"/>
+              </a:spcAft>
+            </a:pPr>
+            <a:r>
+              <a:rPr sz="2000" b="1">
+                <a:solidFill>
+                  <a:srgbClr val="1E293B"/>
+                </a:solidFill>
+                <a:latin typeface="Calibri"/>
+              </a:rPr>
+              <a:t>C. Robot tiêu thụ năng lượng</a:t>
+            </a:r>
+          </a:p>
+          <a:p>
+            <a:pPr algn="l">
+              <a:spcAft>
+                <a:spcPts val="800"/>
+              </a:spcAft>
+            </a:pPr>
+            <a:r>
+              <a:rPr sz="2000" b="1">
+                <a:solidFill>
+                  <a:srgbClr val="1E293B"/>
+                </a:solidFill>
+                <a:latin typeface="Calibri"/>
+              </a:rPr>
+              <a:t>D. Robot không tự sinh trưởng, sinh sản và không cấu tạo từ tế bào</a:t>
             </a:r>
           </a:p>
         </p:txBody>
@@ -4577,14 +4578,14 @@
         </p:nvSpPr>
         <p:spPr>
           <a:xfrm>
-            <a:off x="10701223" y="457200"/>
-            <a:ext cx="941832" cy="457200"/>
+            <a:off x="10463479" y="457200"/>
+            <a:ext cx="1179576" cy="457200"/>
           </a:xfrm>
           <a:prstGeom prst="roundRect">
             <a:avLst/>
           </a:prstGeom>
           <a:solidFill>
-            <a:srgbClr val="1E40AF"/>
+            <a:srgbClr val="991B1B"/>
           </a:solidFill>
           <a:ln>
             <a:noFill/>
@@ -4617,7 +4618,7 @@
                 </a:solidFill>
                 <a:latin typeface="Arial"/>
               </a:rPr>
-              <a:t>ĐỀ BÀI</a:t>
+              <a:t>LỜI GIẢI</a:t>
             </a:r>
           </a:p>
         </p:txBody>
@@ -4631,7 +4632,7 @@
         <p:spPr>
           <a:xfrm>
             <a:off x="731520" y="274320"/>
-            <a:ext cx="10030968" cy="868680"/>
+            <a:ext cx="9793224" cy="868680"/>
           </a:xfrm>
           <a:prstGeom prst="rect">
             <a:avLst/>
@@ -4651,7 +4652,7 @@
                 </a:solidFill>
                 <a:latin typeface="Arial"/>
               </a:rPr>
-              <a:t>ĐỀ MINH HỌA · PHẦN I · CÂU 4</a:t>
+              <a:t>ĐỀ MINH HỌA · PHẦN I · CÂU 3</a:t>
             </a:r>
           </a:p>
         </p:txBody>
@@ -4757,83 +4758,45 @@
           </a:bodyPr>
           <a:lstStyle/>
           <a:p>
-            <a:pPr algn="l">
+            <a:pPr algn="l" marL="365760" indent="-365760">
               <a:spcAft>
                 <a:spcPts val="800"/>
               </a:spcAft>
+              <a:buClr>
+                <a:srgbClr val="1E40AF"/>
+              </a:buClr>
+              <a:buFont typeface="Arial"/>
+              <a:buChar char="•"/>
             </a:pPr>
             <a:r>
-              <a:rPr sz="2000" b="1">
+              <a:rPr sz="2000">
                 <a:solidFill>
                   <a:srgbClr val="1E293B"/>
                 </a:solidFill>
                 <a:latin typeface="Calibri"/>
               </a:rPr>
-              <a:t>Nguyên tố nào sau đây là nguyên tố vi lượng?</a:t>
-            </a:r>
-          </a:p>
-          <a:p>
-            <a:pPr algn="l">
+              <a:t>Đáp án D.</a:t>
+            </a:r>
+          </a:p>
+          <a:p>
+            <a:pPr algn="l" marL="365760" indent="-365760">
               <a:spcAft>
                 <a:spcPts val="800"/>
               </a:spcAft>
+              <a:buClr>
+                <a:srgbClr val="1E40AF"/>
+              </a:buClr>
+              <a:buFont typeface="Arial"/>
+              <a:buChar char="•"/>
             </a:pPr>
             <a:r>
-              <a:rPr sz="2000" b="1">
+              <a:rPr sz="2000">
                 <a:solidFill>
                   <a:srgbClr val="1E293B"/>
                 </a:solidFill>
                 <a:latin typeface="Calibri"/>
               </a:rPr>
-              <a:t>A. Iodine (I)</a:t>
-            </a:r>
-          </a:p>
-          <a:p>
-            <a:pPr algn="l">
-              <a:spcAft>
-                <a:spcPts val="800"/>
-              </a:spcAft>
-            </a:pPr>
-            <a:r>
-              <a:rPr sz="2000" b="1">
-                <a:solidFill>
-                  <a:srgbClr val="1E293B"/>
-                </a:solidFill>
-                <a:latin typeface="Calibri"/>
-              </a:rPr>
-              <a:t>B. Carbon (C)</a:t>
-            </a:r>
-          </a:p>
-          <a:p>
-            <a:pPr algn="l">
-              <a:spcAft>
-                <a:spcPts val="800"/>
-              </a:spcAft>
-            </a:pPr>
-            <a:r>
-              <a:rPr sz="2000" b="1">
-                <a:solidFill>
-                  <a:srgbClr val="1E293B"/>
-                </a:solidFill>
-                <a:latin typeface="Calibri"/>
-              </a:rPr>
-              <a:t>C. Oxygen (O)</a:t>
-            </a:r>
-          </a:p>
-          <a:p>
-            <a:pPr algn="l">
-              <a:spcAft>
-                <a:spcPts val="800"/>
-              </a:spcAft>
-            </a:pPr>
-            <a:r>
-              <a:rPr sz="2000" b="1">
-                <a:solidFill>
-                  <a:srgbClr val="1E293B"/>
-                </a:solidFill>
-                <a:latin typeface="Calibri"/>
-              </a:rPr>
-              <a:t>D. Nitrogen (N)</a:t>
+              <a:t>Luyện tập và vận dụng câu 2.</a:t>
             </a:r>
           </a:p>
         </p:txBody>
@@ -4916,14 +4879,14 @@
         </p:nvSpPr>
         <p:spPr>
           <a:xfrm>
-            <a:off x="10463479" y="457200"/>
-            <a:ext cx="1179576" cy="457200"/>
+            <a:off x="10701223" y="457200"/>
+            <a:ext cx="941832" cy="457200"/>
           </a:xfrm>
           <a:prstGeom prst="roundRect">
             <a:avLst/>
           </a:prstGeom>
           <a:solidFill>
-            <a:srgbClr val="991B1B"/>
+            <a:srgbClr val="1E40AF"/>
           </a:solidFill>
           <a:ln>
             <a:noFill/>
@@ -4956,7 +4919,7 @@
                 </a:solidFill>
                 <a:latin typeface="Arial"/>
               </a:rPr>
-              <a:t>LỜI GIẢI</a:t>
+              <a:t>ĐỀ BÀI</a:t>
             </a:r>
           </a:p>
         </p:txBody>
@@ -4970,7 +4933,7 @@
         <p:spPr>
           <a:xfrm>
             <a:off x="731520" y="274320"/>
-            <a:ext cx="9793224" cy="868680"/>
+            <a:ext cx="10030968" cy="868680"/>
           </a:xfrm>
           <a:prstGeom prst="rect">
             <a:avLst/>
@@ -5096,45 +5059,83 @@
           </a:bodyPr>
           <a:lstStyle/>
           <a:p>
-            <a:pPr algn="l" marL="365760" indent="-365760">
+            <a:pPr algn="l">
               <a:spcAft>
                 <a:spcPts val="800"/>
               </a:spcAft>
-              <a:buClr>
-                <a:srgbClr val="1E40AF"/>
-              </a:buClr>
-              <a:buFont typeface="Arial"/>
-              <a:buChar char="•"/>
             </a:pPr>
             <a:r>
-              <a:rPr sz="2000">
+              <a:rPr sz="2000" b="1">
                 <a:solidFill>
                   <a:srgbClr val="1E293B"/>
                 </a:solidFill>
                 <a:latin typeface="Calibri"/>
               </a:rPr>
-              <a:t>Đáp án A.</a:t>
-            </a:r>
-          </a:p>
-          <a:p>
-            <a:pPr algn="l" marL="365760" indent="-365760">
+              <a:t>Nguyên tố nào sau đây là nguyên tố vi lượng?</a:t>
+            </a:r>
+          </a:p>
+          <a:p>
+            <a:pPr algn="l">
               <a:spcAft>
                 <a:spcPts val="800"/>
               </a:spcAft>
-              <a:buClr>
-                <a:srgbClr val="1E40AF"/>
-              </a:buClr>
-              <a:buFont typeface="Arial"/>
-              <a:buChar char="•"/>
             </a:pPr>
             <a:r>
-              <a:rPr sz="2000">
+              <a:rPr sz="2000" b="1">
                 <a:solidFill>
                   <a:srgbClr val="1E293B"/>
                 </a:solidFill>
                 <a:latin typeface="Calibri"/>
               </a:rPr>
-              <a:t>Vi lượng chỉ cần một lượng rất nhỏ.</a:t>
+              <a:t>A. Iodine (I)</a:t>
+            </a:r>
+          </a:p>
+          <a:p>
+            <a:pPr algn="l">
+              <a:spcAft>
+                <a:spcPts val="800"/>
+              </a:spcAft>
+            </a:pPr>
+            <a:r>
+              <a:rPr sz="2000" b="1">
+                <a:solidFill>
+                  <a:srgbClr val="1E293B"/>
+                </a:solidFill>
+                <a:latin typeface="Calibri"/>
+              </a:rPr>
+              <a:t>B. Carbon (C)</a:t>
+            </a:r>
+          </a:p>
+          <a:p>
+            <a:pPr algn="l">
+              <a:spcAft>
+                <a:spcPts val="800"/>
+              </a:spcAft>
+            </a:pPr>
+            <a:r>
+              <a:rPr sz="2000" b="1">
+                <a:solidFill>
+                  <a:srgbClr val="1E293B"/>
+                </a:solidFill>
+                <a:latin typeface="Calibri"/>
+              </a:rPr>
+              <a:t>C. Oxygen (O)</a:t>
+            </a:r>
+          </a:p>
+          <a:p>
+            <a:pPr algn="l">
+              <a:spcAft>
+                <a:spcPts val="800"/>
+              </a:spcAft>
+            </a:pPr>
+            <a:r>
+              <a:rPr sz="2000" b="1">
+                <a:solidFill>
+                  <a:srgbClr val="1E293B"/>
+                </a:solidFill>
+                <a:latin typeface="Calibri"/>
+              </a:rPr>
+              <a:t>D. Nitrogen (N)</a:t>
             </a:r>
           </a:p>
         </p:txBody>
@@ -5217,14 +5218,14 @@
         </p:nvSpPr>
         <p:spPr>
           <a:xfrm>
-            <a:off x="10701223" y="457200"/>
-            <a:ext cx="941832" cy="457200"/>
+            <a:off x="10463479" y="457200"/>
+            <a:ext cx="1179576" cy="457200"/>
           </a:xfrm>
           <a:prstGeom prst="roundRect">
             <a:avLst/>
           </a:prstGeom>
           <a:solidFill>
-            <a:srgbClr val="1E40AF"/>
+            <a:srgbClr val="991B1B"/>
           </a:solidFill>
           <a:ln>
             <a:noFill/>
@@ -5257,7 +5258,7 @@
                 </a:solidFill>
                 <a:latin typeface="Arial"/>
               </a:rPr>
-              <a:t>ĐỀ BÀI</a:t>
+              <a:t>LỜI GIẢI</a:t>
             </a:r>
           </a:p>
         </p:txBody>
@@ -5271,7 +5272,7 @@
         <p:spPr>
           <a:xfrm>
             <a:off x="731520" y="274320"/>
-            <a:ext cx="10030968" cy="868680"/>
+            <a:ext cx="9793224" cy="868680"/>
           </a:xfrm>
           <a:prstGeom prst="rect">
             <a:avLst/>
@@ -5291,7 +5292,7 @@
                 </a:solidFill>
                 <a:latin typeface="Arial"/>
               </a:rPr>
-              <a:t>ĐỀ MINH HỌA · PHẦN I · CÂU 5</a:t>
+              <a:t>ĐỀ MINH HỌA · PHẦN I · CÂU 4</a:t>
             </a:r>
           </a:p>
         </p:txBody>
@@ -5397,83 +5398,45 @@
           </a:bodyPr>
           <a:lstStyle/>
           <a:p>
-            <a:pPr algn="l">
+            <a:pPr algn="l" marL="365760" indent="-365760">
               <a:spcAft>
                 <a:spcPts val="800"/>
               </a:spcAft>
+              <a:buClr>
+                <a:srgbClr val="1E40AF"/>
+              </a:buClr>
+              <a:buFont typeface="Arial"/>
+              <a:buChar char="•"/>
             </a:pPr>
             <a:r>
-              <a:rPr sz="2000" b="1">
+              <a:rPr sz="2000">
                 <a:solidFill>
                   <a:srgbClr val="1E293B"/>
                 </a:solidFill>
                 <a:latin typeface="Calibri"/>
               </a:rPr>
-              <a:t>Cấu trúc bậc 1 của protein là</a:t>
-            </a:r>
-          </a:p>
-          <a:p>
-            <a:pPr algn="l">
+              <a:t>Đáp án A.</a:t>
+            </a:r>
+          </a:p>
+          <a:p>
+            <a:pPr algn="l" marL="365760" indent="-365760">
               <a:spcAft>
                 <a:spcPts val="800"/>
               </a:spcAft>
+              <a:buClr>
+                <a:srgbClr val="1E40AF"/>
+              </a:buClr>
+              <a:buFont typeface="Arial"/>
+              <a:buChar char="•"/>
             </a:pPr>
             <a:r>
-              <a:rPr sz="2000" b="1">
+              <a:rPr sz="2000">
                 <a:solidFill>
                   <a:srgbClr val="1E293B"/>
                 </a:solidFill>
                 <a:latin typeface="Calibri"/>
               </a:rPr>
-              <a:t>A. chuỗi polypeptide cuộn xoắn α hoặc gấp nếp β</a:t>
-            </a:r>
-          </a:p>
-          <a:p>
-            <a:pPr algn="l">
-              <a:spcAft>
-                <a:spcPts val="800"/>
-              </a:spcAft>
-            </a:pPr>
-            <a:r>
-              <a:rPr sz="2000" b="1">
-                <a:solidFill>
-                  <a:srgbClr val="1E293B"/>
-                </a:solidFill>
-                <a:latin typeface="Calibri"/>
-              </a:rPr>
-              <a:t>B. trình tự sắp xếp các amino acid trong chuỗi polypeptide</a:t>
-            </a:r>
-          </a:p>
-          <a:p>
-            <a:pPr algn="l">
-              <a:spcAft>
-                <a:spcPts val="800"/>
-              </a:spcAft>
-            </a:pPr>
-            <a:r>
-              <a:rPr sz="2000" b="1">
-                <a:solidFill>
-                  <a:srgbClr val="1E293B"/>
-                </a:solidFill>
-                <a:latin typeface="Calibri"/>
-              </a:rPr>
-              <a:t>C. cấu trúc không gian ba chiều đặc trưng</a:t>
-            </a:r>
-          </a:p>
-          <a:p>
-            <a:pPr algn="l">
-              <a:spcAft>
-                <a:spcPts val="800"/>
-              </a:spcAft>
-            </a:pPr>
-            <a:r>
-              <a:rPr sz="2000" b="1">
-                <a:solidFill>
-                  <a:srgbClr val="1E293B"/>
-                </a:solidFill>
-                <a:latin typeface="Calibri"/>
-              </a:rPr>
-              <a:t>D. nhiều chuỗi polypeptide liên kết với nhau</a:t>
+              <a:t>Vi lượng chỉ cần một lượng rất nhỏ.</a:t>
             </a:r>
           </a:p>
         </p:txBody>
@@ -5556,14 +5519,14 @@
         </p:nvSpPr>
         <p:spPr>
           <a:xfrm>
-            <a:off x="10463479" y="457200"/>
-            <a:ext cx="1179576" cy="457200"/>
+            <a:off x="10701223" y="457200"/>
+            <a:ext cx="941832" cy="457200"/>
           </a:xfrm>
           <a:prstGeom prst="roundRect">
             <a:avLst/>
           </a:prstGeom>
           <a:solidFill>
-            <a:srgbClr val="991B1B"/>
+            <a:srgbClr val="1E40AF"/>
           </a:solidFill>
           <a:ln>
             <a:noFill/>
@@ -5596,7 +5559,7 @@
                 </a:solidFill>
                 <a:latin typeface="Arial"/>
               </a:rPr>
-              <a:t>LỜI GIẢI</a:t>
+              <a:t>ĐỀ BÀI</a:t>
             </a:r>
           </a:p>
         </p:txBody>
@@ -5610,7 +5573,7 @@
         <p:spPr>
           <a:xfrm>
             <a:off x="731520" y="274320"/>
-            <a:ext cx="9793224" cy="868680"/>
+            <a:ext cx="10030968" cy="868680"/>
           </a:xfrm>
           <a:prstGeom prst="rect">
             <a:avLst/>
@@ -5736,45 +5699,83 @@
           </a:bodyPr>
           <a:lstStyle/>
           <a:p>
-            <a:pPr algn="l" marL="365760" indent="-365760">
+            <a:pPr algn="l">
               <a:spcAft>
                 <a:spcPts val="800"/>
               </a:spcAft>
-              <a:buClr>
-                <a:srgbClr val="1E40AF"/>
-              </a:buClr>
-              <a:buFont typeface="Arial"/>
-              <a:buChar char="•"/>
             </a:pPr>
             <a:r>
-              <a:rPr sz="2000">
+              <a:rPr sz="2000" b="1">
                 <a:solidFill>
                   <a:srgbClr val="1E293B"/>
                 </a:solidFill>
                 <a:latin typeface="Calibri"/>
               </a:rPr>
-              <a:t>Đáp án B.</a:t>
-            </a:r>
-          </a:p>
-          <a:p>
-            <a:pPr algn="l" marL="365760" indent="-365760">
+              <a:t>Cấu trúc bậc 1 của protein là</a:t>
+            </a:r>
+          </a:p>
+          <a:p>
+            <a:pPr algn="l">
               <a:spcAft>
                 <a:spcPts val="800"/>
               </a:spcAft>
-              <a:buClr>
-                <a:srgbClr val="1E40AF"/>
-              </a:buClr>
-              <a:buFont typeface="Arial"/>
-              <a:buChar char="•"/>
             </a:pPr>
             <a:r>
-              <a:rPr sz="2000">
+              <a:rPr sz="2000" b="1">
                 <a:solidFill>
                   <a:srgbClr val="1E293B"/>
                 </a:solidFill>
                 <a:latin typeface="Calibri"/>
               </a:rPr>
-              <a:t>SGK tr.35: bậc 1 là trình tự amino acid; bậc 2 xoắn/gấp nếp; bậc 3 không gian ba chiều; bậc 4 nhiều chuỗi.</a:t>
+              <a:t>A. chuỗi polypeptide cuộn xoắn α hoặc gấp nếp β</a:t>
+            </a:r>
+          </a:p>
+          <a:p>
+            <a:pPr algn="l">
+              <a:spcAft>
+                <a:spcPts val="800"/>
+              </a:spcAft>
+            </a:pPr>
+            <a:r>
+              <a:rPr sz="2000" b="1">
+                <a:solidFill>
+                  <a:srgbClr val="1E293B"/>
+                </a:solidFill>
+                <a:latin typeface="Calibri"/>
+              </a:rPr>
+              <a:t>B. trình tự sắp xếp các amino acid trong chuỗi polypeptide</a:t>
+            </a:r>
+          </a:p>
+          <a:p>
+            <a:pPr algn="l">
+              <a:spcAft>
+                <a:spcPts val="800"/>
+              </a:spcAft>
+            </a:pPr>
+            <a:r>
+              <a:rPr sz="2000" b="1">
+                <a:solidFill>
+                  <a:srgbClr val="1E293B"/>
+                </a:solidFill>
+                <a:latin typeface="Calibri"/>
+              </a:rPr>
+              <a:t>C. cấu trúc không gian ba chiều đặc trưng</a:t>
+            </a:r>
+          </a:p>
+          <a:p>
+            <a:pPr algn="l">
+              <a:spcAft>
+                <a:spcPts val="800"/>
+              </a:spcAft>
+            </a:pPr>
+            <a:r>
+              <a:rPr sz="2000" b="1">
+                <a:solidFill>
+                  <a:srgbClr val="1E293B"/>
+                </a:solidFill>
+                <a:latin typeface="Calibri"/>
+              </a:rPr>
+              <a:t>D. nhiều chuỗi polypeptide liên kết với nhau</a:t>
             </a:r>
           </a:p>
         </p:txBody>
@@ -5857,14 +5858,14 @@
         </p:nvSpPr>
         <p:spPr>
           <a:xfrm>
-            <a:off x="10701223" y="457200"/>
-            <a:ext cx="941832" cy="457200"/>
+            <a:off x="10463479" y="457200"/>
+            <a:ext cx="1179576" cy="457200"/>
           </a:xfrm>
           <a:prstGeom prst="roundRect">
             <a:avLst/>
           </a:prstGeom>
           <a:solidFill>
-            <a:srgbClr val="1E40AF"/>
+            <a:srgbClr val="991B1B"/>
           </a:solidFill>
           <a:ln>
             <a:noFill/>
@@ -5897,7 +5898,7 @@
                 </a:solidFill>
                 <a:latin typeface="Arial"/>
               </a:rPr>
-              <a:t>ĐỀ BÀI</a:t>
+              <a:t>LỜI GIẢI</a:t>
             </a:r>
           </a:p>
         </p:txBody>
@@ -5911,7 +5912,7 @@
         <p:spPr>
           <a:xfrm>
             <a:off x="731520" y="274320"/>
-            <a:ext cx="10030968" cy="868680"/>
+            <a:ext cx="9793224" cy="868680"/>
           </a:xfrm>
           <a:prstGeom prst="rect">
             <a:avLst/>
@@ -5931,7 +5932,7 @@
                 </a:solidFill>
                 <a:latin typeface="Arial"/>
               </a:rPr>
-              <a:t>ĐỀ MINH HỌA · PHẦN I · CÂU 6</a:t>
+              <a:t>ĐỀ MINH HỌA · PHẦN I · CÂU 5</a:t>
             </a:r>
           </a:p>
         </p:txBody>
@@ -6037,83 +6038,45 @@
           </a:bodyPr>
           <a:lstStyle/>
           <a:p>
-            <a:pPr algn="l">
+            <a:pPr algn="l" marL="365760" indent="-365760">
               <a:spcAft>
                 <a:spcPts val="800"/>
               </a:spcAft>
+              <a:buClr>
+                <a:srgbClr val="1E40AF"/>
+              </a:buClr>
+              <a:buFont typeface="Arial"/>
+              <a:buChar char="•"/>
             </a:pPr>
             <a:r>
-              <a:rPr sz="2000" b="1">
+              <a:rPr sz="2000">
                 <a:solidFill>
                   <a:srgbClr val="1E293B"/>
                 </a:solidFill>
                 <a:latin typeface="Calibri"/>
               </a:rPr>
-              <a:t>Theo Chương trình Giáo dục phổ thông, ở lớp 10 học sinh tìm hiểu</a:t>
-            </a:r>
-          </a:p>
-          <a:p>
-            <a:pPr algn="l">
+              <a:t>Đáp án B.</a:t>
+            </a:r>
+          </a:p>
+          <a:p>
+            <a:pPr algn="l" marL="365760" indent="-365760">
               <a:spcAft>
                 <a:spcPts val="800"/>
               </a:spcAft>
+              <a:buClr>
+                <a:srgbClr val="1E40AF"/>
+              </a:buClr>
+              <a:buFont typeface="Arial"/>
+              <a:buChar char="•"/>
             </a:pPr>
             <a:r>
-              <a:rPr sz="2000" b="1">
+              <a:rPr sz="2000">
                 <a:solidFill>
                   <a:srgbClr val="1E293B"/>
                 </a:solidFill>
                 <a:latin typeface="Calibri"/>
               </a:rPr>
-              <a:t>A. sinh học tế bào và thế giới vi sinh vật</a:t>
-            </a:r>
-          </a:p>
-          <a:p>
-            <a:pPr algn="l">
-              <a:spcAft>
-                <a:spcPts val="800"/>
-              </a:spcAft>
-            </a:pPr>
-            <a:r>
-              <a:rPr sz="2000" b="1">
-                <a:solidFill>
-                  <a:srgbClr val="1E293B"/>
-                </a:solidFill>
-                <a:latin typeface="Calibri"/>
-              </a:rPr>
-              <a:t>B. sinh học cơ thể</a:t>
-            </a:r>
-          </a:p>
-          <a:p>
-            <a:pPr algn="l">
-              <a:spcAft>
-                <a:spcPts val="800"/>
-              </a:spcAft>
-            </a:pPr>
-            <a:r>
-              <a:rPr sz="2000" b="1">
-                <a:solidFill>
-                  <a:srgbClr val="1E293B"/>
-                </a:solidFill>
-                <a:latin typeface="Calibri"/>
-              </a:rPr>
-              <a:t>C. di truyền học, tiến hoá và sinh thái học</a:t>
-            </a:r>
-          </a:p>
-          <a:p>
-            <a:pPr algn="l">
-              <a:spcAft>
-                <a:spcPts val="800"/>
-              </a:spcAft>
-            </a:pPr>
-            <a:r>
-              <a:rPr sz="2000" b="1">
-                <a:solidFill>
-                  <a:srgbClr val="1E293B"/>
-                </a:solidFill>
-                <a:latin typeface="Calibri"/>
-              </a:rPr>
-              <a:t>D. giải phẫu người</a:t>
+              <a:t>SGK tr.35: bậc 1 là trình tự amino acid; bậc 2 xoắn/gấp nếp; bậc 3 không gian ba chiều; bậc 4 nhiều chuỗi.</a:t>
             </a:r>
           </a:p>
         </p:txBody>
@@ -6196,14 +6159,14 @@
         </p:nvSpPr>
         <p:spPr>
           <a:xfrm>
-            <a:off x="10463479" y="457200"/>
-            <a:ext cx="1179576" cy="457200"/>
+            <a:off x="10701223" y="457200"/>
+            <a:ext cx="941832" cy="457200"/>
           </a:xfrm>
           <a:prstGeom prst="roundRect">
             <a:avLst/>
           </a:prstGeom>
           <a:solidFill>
-            <a:srgbClr val="991B1B"/>
+            <a:srgbClr val="1E40AF"/>
           </a:solidFill>
           <a:ln>
             <a:noFill/>
@@ -6236,7 +6199,7 @@
                 </a:solidFill>
                 <a:latin typeface="Arial"/>
               </a:rPr>
-              <a:t>LỜI GIẢI</a:t>
+              <a:t>ĐỀ BÀI</a:t>
             </a:r>
           </a:p>
         </p:txBody>
@@ -6250,7 +6213,7 @@
         <p:spPr>
           <a:xfrm>
             <a:off x="731520" y="274320"/>
-            <a:ext cx="9793224" cy="868680"/>
+            <a:ext cx="10030968" cy="868680"/>
           </a:xfrm>
           <a:prstGeom prst="rect">
             <a:avLst/>
@@ -6376,45 +6339,83 @@
           </a:bodyPr>
           <a:lstStyle/>
           <a:p>
-            <a:pPr algn="l" marL="365760" indent="-365760">
+            <a:pPr algn="l">
               <a:spcAft>
                 <a:spcPts val="800"/>
               </a:spcAft>
-              <a:buClr>
-                <a:srgbClr val="1E40AF"/>
-              </a:buClr>
-              <a:buFont typeface="Arial"/>
-              <a:buChar char="•"/>
             </a:pPr>
             <a:r>
-              <a:rPr sz="2000">
+              <a:rPr sz="2000" b="1">
                 <a:solidFill>
                   <a:srgbClr val="1E293B"/>
                 </a:solidFill>
                 <a:latin typeface="Calibri"/>
               </a:rPr>
-              <a:t>Đáp án A.</a:t>
-            </a:r>
-          </a:p>
-          <a:p>
-            <a:pPr algn="l" marL="365760" indent="-365760">
+              <a:t>Thử dung dịch đường mía (sucrose) bằng thuốc thử Benedict thấy không có kết tủa đỏ gạch vì</a:t>
+            </a:r>
+          </a:p>
+          <a:p>
+            <a:pPr algn="l">
               <a:spcAft>
                 <a:spcPts val="800"/>
               </a:spcAft>
-              <a:buClr>
-                <a:srgbClr val="1E40AF"/>
-              </a:buClr>
-              <a:buFont typeface="Arial"/>
-              <a:buChar char="•"/>
             </a:pPr>
             <a:r>
-              <a:rPr sz="2000">
+              <a:rPr sz="2000" b="1">
                 <a:solidFill>
                   <a:srgbClr val="1E293B"/>
                 </a:solidFill>
                 <a:latin typeface="Calibri"/>
               </a:rPr>
-              <a:t>SGK: lớp 10 – sinh học tế bào và thế giới vi sinh vật; lớp 11 – sinh học cơ thể; lớp 12 – di truyền học, tiến hoá và sinh thái học.</a:t>
+              <a:t>A. sucrose làm Cu²⁺ bay hơi</a:t>
+            </a:r>
+          </a:p>
+          <a:p>
+            <a:pPr algn="l">
+              <a:spcAft>
+                <a:spcPts val="800"/>
+              </a:spcAft>
+            </a:pPr>
+            <a:r>
+              <a:rPr sz="2000" b="1">
+                <a:solidFill>
+                  <a:srgbClr val="1E293B"/>
+                </a:solidFill>
+                <a:latin typeface="Calibri"/>
+              </a:rPr>
+              <a:t>B. sucrose không tan trong nước</a:t>
+            </a:r>
+          </a:p>
+          <a:p>
+            <a:pPr algn="l">
+              <a:spcAft>
+                <a:spcPts val="800"/>
+              </a:spcAft>
+            </a:pPr>
+            <a:r>
+              <a:rPr sz="2000" b="1">
+                <a:solidFill>
+                  <a:srgbClr val="1E293B"/>
+                </a:solidFill>
+                <a:latin typeface="Calibri"/>
+              </a:rPr>
+              <a:t>C. sucrose là một loại protein</a:t>
+            </a:r>
+          </a:p>
+          <a:p>
+            <a:pPr algn="l">
+              <a:spcAft>
+                <a:spcPts val="800"/>
+              </a:spcAft>
+            </a:pPr>
+            <a:r>
+              <a:rPr sz="2000" b="1">
+                <a:solidFill>
+                  <a:srgbClr val="1E293B"/>
+                </a:solidFill>
+                <a:latin typeface="Calibri"/>
+              </a:rPr>
+              <a:t>D. sucrose không có tính khử</a:t>
             </a:r>
           </a:p>
         </p:txBody>
@@ -6694,7 +6695,7 @@
                 </a:solidFill>
                 <a:latin typeface="Calibri"/>
               </a:rPr>
-              <a:t>Phần 1. Tóm tắt lý thuyết – Bài 1: Giới thiệu khái quát môn Sinh học, Bài 2: Phương pháp nghiên cứu và học tập môn Sinh học, Bài 3: Các cấp độ tổ chức của thế giới sống, Bài 4: Các nguyên tố hoá học và nước, Bài 5: Các phân tử sinh học</a:t>
+              <a:t>Phần 1. Tóm tắt lý thuyết – Bài 1: Giới thiệu khái quát môn Sinh học, Bài 2: Phương pháp nghiên cứu và học tập môn Sinh học, Bài 3: Các cấp độ tổ chức của thế giới sống, Bài 4: Các nguyên tố hoá học và nước, Bài 5: Các phân tử sinh học, Bài 6: Thực hành nhận biết một số phân tử sinh học</a:t>
             </a:r>
           </a:p>
           <a:p>
@@ -6819,14 +6820,14 @@
         </p:nvSpPr>
         <p:spPr>
           <a:xfrm>
-            <a:off x="10701223" y="457200"/>
-            <a:ext cx="941832" cy="457200"/>
+            <a:off x="10463479" y="457200"/>
+            <a:ext cx="1179576" cy="457200"/>
           </a:xfrm>
           <a:prstGeom prst="roundRect">
             <a:avLst/>
           </a:prstGeom>
           <a:solidFill>
-            <a:srgbClr val="1E40AF"/>
+            <a:srgbClr val="991B1B"/>
           </a:solidFill>
           <a:ln>
             <a:noFill/>
@@ -6859,7 +6860,7 @@
                 </a:solidFill>
                 <a:latin typeface="Arial"/>
               </a:rPr>
-              <a:t>ĐỀ BÀI</a:t>
+              <a:t>LỜI GIẢI</a:t>
             </a:r>
           </a:p>
         </p:txBody>
@@ -6873,7 +6874,7 @@
         <p:spPr>
           <a:xfrm>
             <a:off x="731520" y="274320"/>
-            <a:ext cx="10030968" cy="868680"/>
+            <a:ext cx="9793224" cy="868680"/>
           </a:xfrm>
           <a:prstGeom prst="rect">
             <a:avLst/>
@@ -6893,7 +6894,7 @@
                 </a:solidFill>
                 <a:latin typeface="Arial"/>
               </a:rPr>
-              <a:t>ĐỀ MINH HỌA · PHẦN I · CÂU 7</a:t>
+              <a:t>ĐỀ MINH HỌA · PHẦN I · CÂU 6</a:t>
             </a:r>
           </a:p>
         </p:txBody>
@@ -6999,83 +7000,45 @@
           </a:bodyPr>
           <a:lstStyle/>
           <a:p>
-            <a:pPr algn="l">
+            <a:pPr algn="l" marL="365760" indent="-365760">
               <a:spcAft>
                 <a:spcPts val="800"/>
               </a:spcAft>
+              <a:buClr>
+                <a:srgbClr val="1E40AF"/>
+              </a:buClr>
+              <a:buFont typeface="Arial"/>
+              <a:buChar char="•"/>
             </a:pPr>
             <a:r>
-              <a:rPr sz="2000" b="1">
+              <a:rPr sz="2000">
                 <a:solidFill>
                   <a:srgbClr val="1E293B"/>
                 </a:solidFill>
                 <a:latin typeface="Calibri"/>
               </a:rPr>
-              <a:t>Khi làm việc trong phòng thí nghiệm, việc làm nào sau đây không đảm bảo an toàn?</a:t>
-            </a:r>
-          </a:p>
-          <a:p>
-            <a:pPr algn="l">
+              <a:t>Đáp án D.</a:t>
+            </a:r>
+          </a:p>
+          <a:p>
+            <a:pPr algn="l" marL="365760" indent="-365760">
               <a:spcAft>
                 <a:spcPts val="800"/>
               </a:spcAft>
+              <a:buClr>
+                <a:srgbClr val="1E40AF"/>
+              </a:buClr>
+              <a:buFont typeface="Arial"/>
+              <a:buChar char="•"/>
             </a:pPr>
             <a:r>
-              <a:rPr sz="2000" b="1">
+              <a:rPr sz="2000">
                 <a:solidFill>
                   <a:srgbClr val="1E293B"/>
                 </a:solidFill>
                 <a:latin typeface="Calibri"/>
               </a:rPr>
-              <a:t>A. Ngửi trực tiếp, nếm thử hoá chất để nhận biết</a:t>
-            </a:r>
-          </a:p>
-          <a:p>
-            <a:pPr algn="l">
-              <a:spcAft>
-                <a:spcPts val="800"/>
-              </a:spcAft>
-            </a:pPr>
-            <a:r>
-              <a:rPr sz="2000" b="1">
-                <a:solidFill>
-                  <a:srgbClr val="1E293B"/>
-                </a:solidFill>
-                <a:latin typeface="Calibri"/>
-              </a:rPr>
-              <a:t>B. Đeo găng tay, kính bảo hộ</a:t>
-            </a:r>
-          </a:p>
-          <a:p>
-            <a:pPr algn="l">
-              <a:spcAft>
-                <a:spcPts val="800"/>
-              </a:spcAft>
-            </a:pPr>
-            <a:r>
-              <a:rPr sz="2000" b="1">
-                <a:solidFill>
-                  <a:srgbClr val="1E293B"/>
-                </a:solidFill>
-                <a:latin typeface="Calibri"/>
-              </a:rPr>
-              <a:t>C. Đọc kĩ quy trình trước khi làm</a:t>
-            </a:r>
-          </a:p>
-          <a:p>
-            <a:pPr algn="l">
-              <a:spcAft>
-                <a:spcPts val="800"/>
-              </a:spcAft>
-            </a:pPr>
-            <a:r>
-              <a:rPr sz="2000" b="1">
-                <a:solidFill>
-                  <a:srgbClr val="1E293B"/>
-                </a:solidFill>
-                <a:latin typeface="Calibri"/>
-              </a:rPr>
-              <a:t>D. Vệ sinh dụng cụ sau khi làm</a:t>
+              <a:t>Sucrose là đường đôi không có tính khử nên không khử được Cu²⁺; cần thuỷ phân thành glucose và fructose rồi mới thử.</a:t>
             </a:r>
           </a:p>
         </p:txBody>
@@ -7158,14 +7121,14 @@
         </p:nvSpPr>
         <p:spPr>
           <a:xfrm>
-            <a:off x="10463479" y="457200"/>
-            <a:ext cx="1179576" cy="457200"/>
+            <a:off x="10701223" y="457200"/>
+            <a:ext cx="941832" cy="457200"/>
           </a:xfrm>
           <a:prstGeom prst="roundRect">
             <a:avLst/>
           </a:prstGeom>
           <a:solidFill>
-            <a:srgbClr val="991B1B"/>
+            <a:srgbClr val="1E40AF"/>
           </a:solidFill>
           <a:ln>
             <a:noFill/>
@@ -7198,7 +7161,7 @@
                 </a:solidFill>
                 <a:latin typeface="Arial"/>
               </a:rPr>
-              <a:t>LỜI GIẢI</a:t>
+              <a:t>ĐỀ BÀI</a:t>
             </a:r>
           </a:p>
         </p:txBody>
@@ -7212,7 +7175,7 @@
         <p:spPr>
           <a:xfrm>
             <a:off x="731520" y="274320"/>
-            <a:ext cx="9793224" cy="868680"/>
+            <a:ext cx="10030968" cy="868680"/>
           </a:xfrm>
           <a:prstGeom prst="rect">
             <a:avLst/>
@@ -7338,45 +7301,83 @@
           </a:bodyPr>
           <a:lstStyle/>
           <a:p>
-            <a:pPr algn="l" marL="365760" indent="-365760">
+            <a:pPr algn="l">
               <a:spcAft>
                 <a:spcPts val="800"/>
               </a:spcAft>
-              <a:buClr>
-                <a:srgbClr val="1E40AF"/>
-              </a:buClr>
-              <a:buFont typeface="Arial"/>
-              <a:buChar char="•"/>
             </a:pPr>
             <a:r>
-              <a:rPr sz="2000">
+              <a:rPr sz="2000" b="1">
                 <a:solidFill>
                   <a:srgbClr val="1E293B"/>
                 </a:solidFill>
                 <a:latin typeface="Calibri"/>
               </a:rPr>
-              <a:t>Đáp án A.</a:t>
-            </a:r>
-          </a:p>
-          <a:p>
-            <a:pPr algn="l" marL="365760" indent="-365760">
+              <a:t>Theo Chương trình Giáo dục phổ thông, ở lớp 10 học sinh tìm hiểu</a:t>
+            </a:r>
+          </a:p>
+          <a:p>
+            <a:pPr algn="l">
               <a:spcAft>
                 <a:spcPts val="800"/>
               </a:spcAft>
-              <a:buClr>
-                <a:srgbClr val="1E40AF"/>
-              </a:buClr>
-              <a:buFont typeface="Arial"/>
-              <a:buChar char="•"/>
             </a:pPr>
             <a:r>
-              <a:rPr sz="2000">
+              <a:rPr sz="2000" b="1">
                 <a:solidFill>
                   <a:srgbClr val="1E293B"/>
                 </a:solidFill>
                 <a:latin typeface="Calibri"/>
               </a:rPr>
-              <a:t>Tuyệt đối không ngửi trực tiếp, nếm hoá chất.</a:t>
+              <a:t>A. sinh học tế bào và thế giới vi sinh vật</a:t>
+            </a:r>
+          </a:p>
+          <a:p>
+            <a:pPr algn="l">
+              <a:spcAft>
+                <a:spcPts val="800"/>
+              </a:spcAft>
+            </a:pPr>
+            <a:r>
+              <a:rPr sz="2000" b="1">
+                <a:solidFill>
+                  <a:srgbClr val="1E293B"/>
+                </a:solidFill>
+                <a:latin typeface="Calibri"/>
+              </a:rPr>
+              <a:t>B. sinh học cơ thể</a:t>
+            </a:r>
+          </a:p>
+          <a:p>
+            <a:pPr algn="l">
+              <a:spcAft>
+                <a:spcPts val="800"/>
+              </a:spcAft>
+            </a:pPr>
+            <a:r>
+              <a:rPr sz="2000" b="1">
+                <a:solidFill>
+                  <a:srgbClr val="1E293B"/>
+                </a:solidFill>
+                <a:latin typeface="Calibri"/>
+              </a:rPr>
+              <a:t>C. di truyền học, tiến hoá và sinh thái học</a:t>
+            </a:r>
+          </a:p>
+          <a:p>
+            <a:pPr algn="l">
+              <a:spcAft>
+                <a:spcPts val="800"/>
+              </a:spcAft>
+            </a:pPr>
+            <a:r>
+              <a:rPr sz="2000" b="1">
+                <a:solidFill>
+                  <a:srgbClr val="1E293B"/>
+                </a:solidFill>
+                <a:latin typeface="Calibri"/>
+              </a:rPr>
+              <a:t>D. giải phẫu người</a:t>
             </a:r>
           </a:p>
         </p:txBody>
@@ -7459,14 +7460,14 @@
         </p:nvSpPr>
         <p:spPr>
           <a:xfrm>
-            <a:off x="10701223" y="457200"/>
-            <a:ext cx="941832" cy="457200"/>
+            <a:off x="10463479" y="457200"/>
+            <a:ext cx="1179576" cy="457200"/>
           </a:xfrm>
           <a:prstGeom prst="roundRect">
             <a:avLst/>
           </a:prstGeom>
           <a:solidFill>
-            <a:srgbClr val="1E40AF"/>
+            <a:srgbClr val="991B1B"/>
           </a:solidFill>
           <a:ln>
             <a:noFill/>
@@ -7499,7 +7500,7 @@
                 </a:solidFill>
                 <a:latin typeface="Arial"/>
               </a:rPr>
-              <a:t>ĐỀ BÀI</a:t>
+              <a:t>LỜI GIẢI</a:t>
             </a:r>
           </a:p>
         </p:txBody>
@@ -7513,7 +7514,7 @@
         <p:spPr>
           <a:xfrm>
             <a:off x="731520" y="274320"/>
-            <a:ext cx="10030968" cy="868680"/>
+            <a:ext cx="9793224" cy="868680"/>
           </a:xfrm>
           <a:prstGeom prst="rect">
             <a:avLst/>
@@ -7533,7 +7534,7 @@
                 </a:solidFill>
                 <a:latin typeface="Arial"/>
               </a:rPr>
-              <a:t>ĐỀ MINH HỌA · PHẦN I · CÂU 8</a:t>
+              <a:t>ĐỀ MINH HỌA · PHẦN I · CÂU 7</a:t>
             </a:r>
           </a:p>
         </p:txBody>
@@ -7639,83 +7640,45 @@
           </a:bodyPr>
           <a:lstStyle/>
           <a:p>
-            <a:pPr algn="l">
+            <a:pPr algn="l" marL="365760" indent="-365760">
               <a:spcAft>
                 <a:spcPts val="800"/>
               </a:spcAft>
+              <a:buClr>
+                <a:srgbClr val="1E40AF"/>
+              </a:buClr>
+              <a:buFont typeface="Arial"/>
+              <a:buChar char="•"/>
             </a:pPr>
             <a:r>
-              <a:rPr sz="2000" b="1">
+              <a:rPr sz="2000">
                 <a:solidFill>
                   <a:srgbClr val="1E293B"/>
                 </a:solidFill>
                 <a:latin typeface="Calibri"/>
               </a:rPr>
-              <a:t>Tập hợp các cá thể cùng loài sống trong một khu vực địa lí nhất định, vào một thời điểm nhất định là</a:t>
-            </a:r>
-          </a:p>
-          <a:p>
-            <a:pPr algn="l">
+              <a:t>Đáp án A.</a:t>
+            </a:r>
+          </a:p>
+          <a:p>
+            <a:pPr algn="l" marL="365760" indent="-365760">
               <a:spcAft>
                 <a:spcPts val="800"/>
               </a:spcAft>
+              <a:buClr>
+                <a:srgbClr val="1E40AF"/>
+              </a:buClr>
+              <a:buFont typeface="Arial"/>
+              <a:buChar char="•"/>
             </a:pPr>
             <a:r>
-              <a:rPr sz="2000" b="1">
+              <a:rPr sz="2000">
                 <a:solidFill>
                   <a:srgbClr val="1E293B"/>
                 </a:solidFill>
                 <a:latin typeface="Calibri"/>
               </a:rPr>
-              <a:t>A. hệ sinh thái</a:t>
-            </a:r>
-          </a:p>
-          <a:p>
-            <a:pPr algn="l">
-              <a:spcAft>
-                <a:spcPts val="800"/>
-              </a:spcAft>
-            </a:pPr>
-            <a:r>
-              <a:rPr sz="2000" b="1">
-                <a:solidFill>
-                  <a:srgbClr val="1E293B"/>
-                </a:solidFill>
-                <a:latin typeface="Calibri"/>
-              </a:rPr>
-              <a:t>B. quần xã</a:t>
-            </a:r>
-          </a:p>
-          <a:p>
-            <a:pPr algn="l">
-              <a:spcAft>
-                <a:spcPts val="800"/>
-              </a:spcAft>
-            </a:pPr>
-            <a:r>
-              <a:rPr sz="2000" b="1">
-                <a:solidFill>
-                  <a:srgbClr val="1E293B"/>
-                </a:solidFill>
-                <a:latin typeface="Calibri"/>
-              </a:rPr>
-              <a:t>C. quần thể</a:t>
-            </a:r>
-          </a:p>
-          <a:p>
-            <a:pPr algn="l">
-              <a:spcAft>
-                <a:spcPts val="800"/>
-              </a:spcAft>
-            </a:pPr>
-            <a:r>
-              <a:rPr sz="2000" b="1">
-                <a:solidFill>
-                  <a:srgbClr val="1E293B"/>
-                </a:solidFill>
-                <a:latin typeface="Calibri"/>
-              </a:rPr>
-              <a:t>D. cơ thể</a:t>
+              <a:t>SGK: lớp 10 – sinh học tế bào và thế giới vi sinh vật; lớp 11 – sinh học cơ thể; lớp 12 – di truyền học, tiến hoá và sinh thái học.</a:t>
             </a:r>
           </a:p>
         </p:txBody>
@@ -7798,14 +7761,14 @@
         </p:nvSpPr>
         <p:spPr>
           <a:xfrm>
-            <a:off x="10463479" y="457200"/>
-            <a:ext cx="1179576" cy="457200"/>
+            <a:off x="10701223" y="457200"/>
+            <a:ext cx="941832" cy="457200"/>
           </a:xfrm>
           <a:prstGeom prst="roundRect">
             <a:avLst/>
           </a:prstGeom>
           <a:solidFill>
-            <a:srgbClr val="991B1B"/>
+            <a:srgbClr val="1E40AF"/>
           </a:solidFill>
           <a:ln>
             <a:noFill/>
@@ -7838,7 +7801,7 @@
                 </a:solidFill>
                 <a:latin typeface="Arial"/>
               </a:rPr>
-              <a:t>LỜI GIẢI</a:t>
+              <a:t>ĐỀ BÀI</a:t>
             </a:r>
           </a:p>
         </p:txBody>
@@ -7852,7 +7815,7 @@
         <p:spPr>
           <a:xfrm>
             <a:off x="731520" y="274320"/>
-            <a:ext cx="9793224" cy="868680"/>
+            <a:ext cx="10030968" cy="868680"/>
           </a:xfrm>
           <a:prstGeom prst="rect">
             <a:avLst/>
@@ -7978,45 +7941,83 @@
           </a:bodyPr>
           <a:lstStyle/>
           <a:p>
-            <a:pPr algn="l" marL="365760" indent="-365760">
+            <a:pPr algn="l">
               <a:spcAft>
                 <a:spcPts val="800"/>
               </a:spcAft>
-              <a:buClr>
-                <a:srgbClr val="1E40AF"/>
-              </a:buClr>
-              <a:buFont typeface="Arial"/>
-              <a:buChar char="•"/>
             </a:pPr>
             <a:r>
-              <a:rPr sz="2000">
+              <a:rPr sz="2000" b="1">
                 <a:solidFill>
                   <a:srgbClr val="1E293B"/>
                 </a:solidFill>
                 <a:latin typeface="Calibri"/>
               </a:rPr>
-              <a:t>Đáp án C.</a:t>
-            </a:r>
-          </a:p>
-          <a:p>
-            <a:pPr algn="l" marL="365760" indent="-365760">
+              <a:t>Khi làm việc trong phòng thí nghiệm, việc làm nào sau đây không đảm bảo an toàn?</a:t>
+            </a:r>
+          </a:p>
+          <a:p>
+            <a:pPr algn="l">
               <a:spcAft>
                 <a:spcPts val="800"/>
               </a:spcAft>
-              <a:buClr>
-                <a:srgbClr val="1E40AF"/>
-              </a:buClr>
-              <a:buFont typeface="Arial"/>
-              <a:buChar char="•"/>
             </a:pPr>
             <a:r>
-              <a:rPr sz="2000">
+              <a:rPr sz="2000" b="1">
                 <a:solidFill>
                   <a:srgbClr val="1E293B"/>
                 </a:solidFill>
                 <a:latin typeface="Calibri"/>
               </a:rPr>
-              <a:t>SGK mục I.2.</a:t>
+              <a:t>A. Ngửi trực tiếp, nếm thử hoá chất để nhận biết</a:t>
+            </a:r>
+          </a:p>
+          <a:p>
+            <a:pPr algn="l">
+              <a:spcAft>
+                <a:spcPts val="800"/>
+              </a:spcAft>
+            </a:pPr>
+            <a:r>
+              <a:rPr sz="2000" b="1">
+                <a:solidFill>
+                  <a:srgbClr val="1E293B"/>
+                </a:solidFill>
+                <a:latin typeface="Calibri"/>
+              </a:rPr>
+              <a:t>B. Đeo găng tay, kính bảo hộ</a:t>
+            </a:r>
+          </a:p>
+          <a:p>
+            <a:pPr algn="l">
+              <a:spcAft>
+                <a:spcPts val="800"/>
+              </a:spcAft>
+            </a:pPr>
+            <a:r>
+              <a:rPr sz="2000" b="1">
+                <a:solidFill>
+                  <a:srgbClr val="1E293B"/>
+                </a:solidFill>
+                <a:latin typeface="Calibri"/>
+              </a:rPr>
+              <a:t>C. Đọc kĩ quy trình trước khi làm</a:t>
+            </a:r>
+          </a:p>
+          <a:p>
+            <a:pPr algn="l">
+              <a:spcAft>
+                <a:spcPts val="800"/>
+              </a:spcAft>
+            </a:pPr>
+            <a:r>
+              <a:rPr sz="2000" b="1">
+                <a:solidFill>
+                  <a:srgbClr val="1E293B"/>
+                </a:solidFill>
+                <a:latin typeface="Calibri"/>
+              </a:rPr>
+              <a:t>D. Vệ sinh dụng cụ sau khi làm</a:t>
             </a:r>
           </a:p>
         </p:txBody>
@@ -8099,14 +8100,14 @@
         </p:nvSpPr>
         <p:spPr>
           <a:xfrm>
-            <a:off x="10701223" y="457200"/>
-            <a:ext cx="941832" cy="457200"/>
+            <a:off x="10463479" y="457200"/>
+            <a:ext cx="1179576" cy="457200"/>
           </a:xfrm>
           <a:prstGeom prst="roundRect">
             <a:avLst/>
           </a:prstGeom>
           <a:solidFill>
-            <a:srgbClr val="1E40AF"/>
+            <a:srgbClr val="991B1B"/>
           </a:solidFill>
           <a:ln>
             <a:noFill/>
@@ -8139,7 +8140,7 @@
                 </a:solidFill>
                 <a:latin typeface="Arial"/>
               </a:rPr>
-              <a:t>ĐỀ BÀI</a:t>
+              <a:t>LỜI GIẢI</a:t>
             </a:r>
           </a:p>
         </p:txBody>
@@ -8153,7 +8154,7 @@
         <p:spPr>
           <a:xfrm>
             <a:off x="731520" y="274320"/>
-            <a:ext cx="10030968" cy="868680"/>
+            <a:ext cx="9793224" cy="868680"/>
           </a:xfrm>
           <a:prstGeom prst="rect">
             <a:avLst/>
@@ -8173,7 +8174,7 @@
                 </a:solidFill>
                 <a:latin typeface="Arial"/>
               </a:rPr>
-              <a:t>ĐỀ MINH HỌA · PHẦN I · CÂU 9</a:t>
+              <a:t>ĐỀ MINH HỌA · PHẦN I · CÂU 8</a:t>
             </a:r>
           </a:p>
         </p:txBody>
@@ -8279,83 +8280,45 @@
           </a:bodyPr>
           <a:lstStyle/>
           <a:p>
-            <a:pPr algn="l">
+            <a:pPr algn="l" marL="365760" indent="-365760">
               <a:spcAft>
                 <a:spcPts val="800"/>
               </a:spcAft>
+              <a:buClr>
+                <a:srgbClr val="1E40AF"/>
+              </a:buClr>
+              <a:buFont typeface="Arial"/>
+              <a:buChar char="•"/>
             </a:pPr>
             <a:r>
-              <a:rPr sz="2000" b="1">
+              <a:rPr sz="2000">
                 <a:solidFill>
                   <a:srgbClr val="1E293B"/>
                 </a:solidFill>
                 <a:latin typeface="Calibri"/>
               </a:rPr>
-              <a:t>Phân tử nước có tính phân cực là do</a:t>
-            </a:r>
-          </a:p>
-          <a:p>
-            <a:pPr algn="l">
+              <a:t>Đáp án A.</a:t>
+            </a:r>
+          </a:p>
+          <a:p>
+            <a:pPr algn="l" marL="365760" indent="-365760">
               <a:spcAft>
                 <a:spcPts val="800"/>
               </a:spcAft>
+              <a:buClr>
+                <a:srgbClr val="1E40AF"/>
+              </a:buClr>
+              <a:buFont typeface="Arial"/>
+              <a:buChar char="•"/>
             </a:pPr>
             <a:r>
-              <a:rPr sz="2000" b="1">
+              <a:rPr sz="2000">
                 <a:solidFill>
                   <a:srgbClr val="1E293B"/>
                 </a:solidFill>
                 <a:latin typeface="Calibri"/>
               </a:rPr>
-              <a:t>A. nước có nhiều nguyên tử oxygen</a:t>
-            </a:r>
-          </a:p>
-          <a:p>
-            <a:pPr algn="l">
-              <a:spcAft>
-                <a:spcPts val="800"/>
-              </a:spcAft>
-            </a:pPr>
-            <a:r>
-              <a:rPr sz="2000" b="1">
-                <a:solidFill>
-                  <a:srgbClr val="1E293B"/>
-                </a:solidFill>
-                <a:latin typeface="Calibri"/>
-              </a:rPr>
-              <a:t>B. oxygen hút electron mạnh hơn hydrogen nên phía O tích điện âm, phía H tích điện dương</a:t>
-            </a:r>
-          </a:p>
-          <a:p>
-            <a:pPr algn="l">
-              <a:spcAft>
-                <a:spcPts val="800"/>
-              </a:spcAft>
-            </a:pPr>
-            <a:r>
-              <a:rPr sz="2000" b="1">
-                <a:solidFill>
-                  <a:srgbClr val="1E293B"/>
-                </a:solidFill>
-                <a:latin typeface="Calibri"/>
-              </a:rPr>
-              <a:t>C. nước ở thể lỏng</a:t>
-            </a:r>
-          </a:p>
-          <a:p>
-            <a:pPr algn="l">
-              <a:spcAft>
-                <a:spcPts val="800"/>
-              </a:spcAft>
-            </a:pPr>
-            <a:r>
-              <a:rPr sz="2000" b="1">
-                <a:solidFill>
-                  <a:srgbClr val="1E293B"/>
-                </a:solidFill>
-                <a:latin typeface="Calibri"/>
-              </a:rPr>
-              <a:t>D. nước có khối lượng nhỏ</a:t>
+              <a:t>Tuyệt đối không ngửi trực tiếp, nếm hoá chất.</a:t>
             </a:r>
           </a:p>
         </p:txBody>
@@ -8438,14 +8401,14 @@
         </p:nvSpPr>
         <p:spPr>
           <a:xfrm>
-            <a:off x="10463479" y="457200"/>
-            <a:ext cx="1179576" cy="457200"/>
+            <a:off x="10701223" y="457200"/>
+            <a:ext cx="941832" cy="457200"/>
           </a:xfrm>
           <a:prstGeom prst="roundRect">
             <a:avLst/>
           </a:prstGeom>
           <a:solidFill>
-            <a:srgbClr val="991B1B"/>
+            <a:srgbClr val="1E40AF"/>
           </a:solidFill>
           <a:ln>
             <a:noFill/>
@@ -8478,7 +8441,7 @@
                 </a:solidFill>
                 <a:latin typeface="Arial"/>
               </a:rPr>
-              <a:t>LỜI GIẢI</a:t>
+              <a:t>ĐỀ BÀI</a:t>
             </a:r>
           </a:p>
         </p:txBody>
@@ -8492,7 +8455,7 @@
         <p:spPr>
           <a:xfrm>
             <a:off x="731520" y="274320"/>
-            <a:ext cx="9793224" cy="868680"/>
+            <a:ext cx="10030968" cy="868680"/>
           </a:xfrm>
           <a:prstGeom prst="rect">
             <a:avLst/>
@@ -8618,45 +8581,83 @@
           </a:bodyPr>
           <a:lstStyle/>
           <a:p>
-            <a:pPr algn="l" marL="365760" indent="-365760">
+            <a:pPr algn="l">
               <a:spcAft>
                 <a:spcPts val="800"/>
               </a:spcAft>
-              <a:buClr>
-                <a:srgbClr val="1E40AF"/>
-              </a:buClr>
-              <a:buFont typeface="Arial"/>
-              <a:buChar char="•"/>
             </a:pPr>
             <a:r>
-              <a:rPr sz="2000">
+              <a:rPr sz="2000" b="1">
                 <a:solidFill>
                   <a:srgbClr val="1E293B"/>
                 </a:solidFill>
                 <a:latin typeface="Calibri"/>
               </a:rPr>
-              <a:t>Đáp án B.</a:t>
-            </a:r>
-          </a:p>
-          <a:p>
-            <a:pPr algn="l" marL="365760" indent="-365760">
+              <a:t>Tập hợp các cá thể cùng loài sống trong một khu vực địa lí nhất định, vào một thời điểm nhất định là</a:t>
+            </a:r>
+          </a:p>
+          <a:p>
+            <a:pPr algn="l">
               <a:spcAft>
                 <a:spcPts val="800"/>
               </a:spcAft>
-              <a:buClr>
-                <a:srgbClr val="1E40AF"/>
-              </a:buClr>
-              <a:buFont typeface="Arial"/>
-              <a:buChar char="•"/>
             </a:pPr>
             <a:r>
-              <a:rPr sz="2000">
+              <a:rPr sz="2000" b="1">
                 <a:solidFill>
                   <a:srgbClr val="1E293B"/>
                 </a:solidFill>
                 <a:latin typeface="Calibri"/>
               </a:rPr>
-              <a:t>SGK mục III.1.</a:t>
+              <a:t>A. hệ sinh thái</a:t>
+            </a:r>
+          </a:p>
+          <a:p>
+            <a:pPr algn="l">
+              <a:spcAft>
+                <a:spcPts val="800"/>
+              </a:spcAft>
+            </a:pPr>
+            <a:r>
+              <a:rPr sz="2000" b="1">
+                <a:solidFill>
+                  <a:srgbClr val="1E293B"/>
+                </a:solidFill>
+                <a:latin typeface="Calibri"/>
+              </a:rPr>
+              <a:t>B. quần xã</a:t>
+            </a:r>
+          </a:p>
+          <a:p>
+            <a:pPr algn="l">
+              <a:spcAft>
+                <a:spcPts val="800"/>
+              </a:spcAft>
+            </a:pPr>
+            <a:r>
+              <a:rPr sz="2000" b="1">
+                <a:solidFill>
+                  <a:srgbClr val="1E293B"/>
+                </a:solidFill>
+                <a:latin typeface="Calibri"/>
+              </a:rPr>
+              <a:t>C. quần thể</a:t>
+            </a:r>
+          </a:p>
+          <a:p>
+            <a:pPr algn="l">
+              <a:spcAft>
+                <a:spcPts val="800"/>
+              </a:spcAft>
+            </a:pPr>
+            <a:r>
+              <a:rPr sz="2000" b="1">
+                <a:solidFill>
+                  <a:srgbClr val="1E293B"/>
+                </a:solidFill>
+                <a:latin typeface="Calibri"/>
+              </a:rPr>
+              <a:t>D. cơ thể</a:t>
             </a:r>
           </a:p>
         </p:txBody>
@@ -8739,14 +8740,14 @@
         </p:nvSpPr>
         <p:spPr>
           <a:xfrm>
-            <a:off x="10701223" y="457200"/>
-            <a:ext cx="941832" cy="457200"/>
+            <a:off x="10463479" y="457200"/>
+            <a:ext cx="1179576" cy="457200"/>
           </a:xfrm>
           <a:prstGeom prst="roundRect">
             <a:avLst/>
           </a:prstGeom>
           <a:solidFill>
-            <a:srgbClr val="1E40AF"/>
+            <a:srgbClr val="991B1B"/>
           </a:solidFill>
           <a:ln>
             <a:noFill/>
@@ -8779,7 +8780,7 @@
                 </a:solidFill>
                 <a:latin typeface="Arial"/>
               </a:rPr>
-              <a:t>ĐỀ BÀI</a:t>
+              <a:t>LỜI GIẢI</a:t>
             </a:r>
           </a:p>
         </p:txBody>
@@ -8793,7 +8794,7 @@
         <p:spPr>
           <a:xfrm>
             <a:off x="731520" y="274320"/>
-            <a:ext cx="10030968" cy="868680"/>
+            <a:ext cx="9793224" cy="868680"/>
           </a:xfrm>
           <a:prstGeom prst="rect">
             <a:avLst/>
@@ -8813,7 +8814,7 @@
                 </a:solidFill>
                 <a:latin typeface="Arial"/>
               </a:rPr>
-              <a:t>ĐỀ MINH HỌA · PHẦN I · CÂU 10</a:t>
+              <a:t>ĐỀ MINH HỌA · PHẦN I · CÂU 9</a:t>
             </a:r>
           </a:p>
         </p:txBody>
@@ -8919,83 +8920,45 @@
           </a:bodyPr>
           <a:lstStyle/>
           <a:p>
-            <a:pPr algn="l">
+            <a:pPr algn="l" marL="365760" indent="-365760">
               <a:spcAft>
                 <a:spcPts val="800"/>
               </a:spcAft>
+              <a:buClr>
+                <a:srgbClr val="1E40AF"/>
+              </a:buClr>
+              <a:buFont typeface="Arial"/>
+              <a:buChar char="•"/>
             </a:pPr>
             <a:r>
-              <a:rPr sz="2000" b="1">
+              <a:rPr sz="2000">
                 <a:solidFill>
                   <a:srgbClr val="1E293B"/>
                 </a:solidFill>
                 <a:latin typeface="Calibri"/>
               </a:rPr>
-              <a:t>Đường đôi sucrose được cấu tạo từ</a:t>
-            </a:r>
-          </a:p>
-          <a:p>
-            <a:pPr algn="l">
+              <a:t>Đáp án C.</a:t>
+            </a:r>
+          </a:p>
+          <a:p>
+            <a:pPr algn="l" marL="365760" indent="-365760">
               <a:spcAft>
                 <a:spcPts val="800"/>
               </a:spcAft>
+              <a:buClr>
+                <a:srgbClr val="1E40AF"/>
+              </a:buClr>
+              <a:buFont typeface="Arial"/>
+              <a:buChar char="•"/>
             </a:pPr>
             <a:r>
-              <a:rPr sz="2000" b="1">
+              <a:rPr sz="2000">
                 <a:solidFill>
                   <a:srgbClr val="1E293B"/>
                 </a:solidFill>
                 <a:latin typeface="Calibri"/>
               </a:rPr>
-              <a:t>A. hai phân tử fructose</a:t>
-            </a:r>
-          </a:p>
-          <a:p>
-            <a:pPr algn="l">
-              <a:spcAft>
-                <a:spcPts val="800"/>
-              </a:spcAft>
-            </a:pPr>
-            <a:r>
-              <a:rPr sz="2000" b="1">
-                <a:solidFill>
-                  <a:srgbClr val="1E293B"/>
-                </a:solidFill>
-                <a:latin typeface="Calibri"/>
-              </a:rPr>
-              <a:t>B. hai phân tử glucose</a:t>
-            </a:r>
-          </a:p>
-          <a:p>
-            <a:pPr algn="l">
-              <a:spcAft>
-                <a:spcPts val="800"/>
-              </a:spcAft>
-            </a:pPr>
-            <a:r>
-              <a:rPr sz="2000" b="1">
-                <a:solidFill>
-                  <a:srgbClr val="1E293B"/>
-                </a:solidFill>
-                <a:latin typeface="Calibri"/>
-              </a:rPr>
-              <a:t>C. một phân tử glucose và một phân tử galactose</a:t>
-            </a:r>
-          </a:p>
-          <a:p>
-            <a:pPr algn="l">
-              <a:spcAft>
-                <a:spcPts val="800"/>
-              </a:spcAft>
-            </a:pPr>
-            <a:r>
-              <a:rPr sz="2000" b="1">
-                <a:solidFill>
-                  <a:srgbClr val="1E293B"/>
-                </a:solidFill>
-                <a:latin typeface="Calibri"/>
-              </a:rPr>
-              <a:t>D. một phân tử glucose và một phân tử fructose</a:t>
+              <a:t>SGK mục I.2.</a:t>
             </a:r>
           </a:p>
         </p:txBody>
@@ -9078,14 +9041,14 @@
         </p:nvSpPr>
         <p:spPr>
           <a:xfrm>
-            <a:off x="10463479" y="457200"/>
-            <a:ext cx="1179576" cy="457200"/>
+            <a:off x="10701223" y="457200"/>
+            <a:ext cx="941832" cy="457200"/>
           </a:xfrm>
           <a:prstGeom prst="roundRect">
             <a:avLst/>
           </a:prstGeom>
           <a:solidFill>
-            <a:srgbClr val="991B1B"/>
+            <a:srgbClr val="1E40AF"/>
           </a:solidFill>
           <a:ln>
             <a:noFill/>
@@ -9118,7 +9081,7 @@
                 </a:solidFill>
                 <a:latin typeface="Arial"/>
               </a:rPr>
-              <a:t>LỜI GIẢI</a:t>
+              <a:t>ĐỀ BÀI</a:t>
             </a:r>
           </a:p>
         </p:txBody>
@@ -9132,7 +9095,7 @@
         <p:spPr>
           <a:xfrm>
             <a:off x="731520" y="274320"/>
-            <a:ext cx="9793224" cy="868680"/>
+            <a:ext cx="10030968" cy="868680"/>
           </a:xfrm>
           <a:prstGeom prst="rect">
             <a:avLst/>
@@ -9258,45 +9221,83 @@
           </a:bodyPr>
           <a:lstStyle/>
           <a:p>
-            <a:pPr algn="l" marL="365760" indent="-365760">
+            <a:pPr algn="l">
               <a:spcAft>
                 <a:spcPts val="800"/>
               </a:spcAft>
-              <a:buClr>
-                <a:srgbClr val="1E40AF"/>
-              </a:buClr>
-              <a:buFont typeface="Arial"/>
-              <a:buChar char="•"/>
             </a:pPr>
             <a:r>
-              <a:rPr sz="2000">
+              <a:rPr sz="2000" b="1">
                 <a:solidFill>
                   <a:srgbClr val="1E293B"/>
                 </a:solidFill>
                 <a:latin typeface="Calibri"/>
               </a:rPr>
-              <a:t>Đáp án D.</a:t>
-            </a:r>
-          </a:p>
-          <a:p>
-            <a:pPr algn="l" marL="365760" indent="-365760">
+              <a:t>Phân tử nước có tính phân cực là do</a:t>
+            </a:r>
+          </a:p>
+          <a:p>
+            <a:pPr algn="l">
               <a:spcAft>
                 <a:spcPts val="800"/>
               </a:spcAft>
-              <a:buClr>
-                <a:srgbClr val="1E40AF"/>
-              </a:buClr>
-              <a:buFont typeface="Arial"/>
-              <a:buChar char="•"/>
             </a:pPr>
             <a:r>
-              <a:rPr sz="2000">
+              <a:rPr sz="2000" b="1">
                 <a:solidFill>
                   <a:srgbClr val="1E293B"/>
                 </a:solidFill>
                 <a:latin typeface="Calibri"/>
               </a:rPr>
-              <a:t>SGK tr.29: sucrose = glucose + fructose; maltose = glucose + glucose; lactose = glucose + galactose.</a:t>
+              <a:t>A. nước có nhiều nguyên tử oxygen</a:t>
+            </a:r>
+          </a:p>
+          <a:p>
+            <a:pPr algn="l">
+              <a:spcAft>
+                <a:spcPts val="800"/>
+              </a:spcAft>
+            </a:pPr>
+            <a:r>
+              <a:rPr sz="2000" b="1">
+                <a:solidFill>
+                  <a:srgbClr val="1E293B"/>
+                </a:solidFill>
+                <a:latin typeface="Calibri"/>
+              </a:rPr>
+              <a:t>B. oxygen hút electron mạnh hơn hydrogen nên phía O tích điện âm, phía H tích điện dương</a:t>
+            </a:r>
+          </a:p>
+          <a:p>
+            <a:pPr algn="l">
+              <a:spcAft>
+                <a:spcPts val="800"/>
+              </a:spcAft>
+            </a:pPr>
+            <a:r>
+              <a:rPr sz="2000" b="1">
+                <a:solidFill>
+                  <a:srgbClr val="1E293B"/>
+                </a:solidFill>
+                <a:latin typeface="Calibri"/>
+              </a:rPr>
+              <a:t>C. nước ở thể lỏng</a:t>
+            </a:r>
+          </a:p>
+          <a:p>
+            <a:pPr algn="l">
+              <a:spcAft>
+                <a:spcPts val="800"/>
+              </a:spcAft>
+            </a:pPr>
+            <a:r>
+              <a:rPr sz="2000" b="1">
+                <a:solidFill>
+                  <a:srgbClr val="1E293B"/>
+                </a:solidFill>
+                <a:latin typeface="Calibri"/>
+              </a:rPr>
+              <a:t>D. nước có khối lượng nhỏ</a:t>
             </a:r>
           </a:p>
         </p:txBody>
@@ -9379,14 +9380,14 @@
         </p:nvSpPr>
         <p:spPr>
           <a:xfrm>
-            <a:off x="10701223" y="457200"/>
-            <a:ext cx="941832" cy="457200"/>
+            <a:off x="10463479" y="457200"/>
+            <a:ext cx="1179576" cy="457200"/>
           </a:xfrm>
           <a:prstGeom prst="roundRect">
             <a:avLst/>
           </a:prstGeom>
           <a:solidFill>
-            <a:srgbClr val="1E40AF"/>
+            <a:srgbClr val="991B1B"/>
           </a:solidFill>
           <a:ln>
             <a:noFill/>
@@ -9419,7 +9420,7 @@
                 </a:solidFill>
                 <a:latin typeface="Arial"/>
               </a:rPr>
-              <a:t>ĐỀ BÀI</a:t>
+              <a:t>LỜI GIẢI</a:t>
             </a:r>
           </a:p>
         </p:txBody>
@@ -9433,7 +9434,7 @@
         <p:spPr>
           <a:xfrm>
             <a:off x="731520" y="274320"/>
-            <a:ext cx="10030968" cy="868680"/>
+            <a:ext cx="9793224" cy="868680"/>
           </a:xfrm>
           <a:prstGeom prst="rect">
             <a:avLst/>
@@ -9453,7 +9454,7 @@
                 </a:solidFill>
                 <a:latin typeface="Arial"/>
               </a:rPr>
-              <a:t>ĐỀ MINH HỌA · PHẦN I · CÂU 11</a:t>
+              <a:t>ĐỀ MINH HỌA · PHẦN I · CÂU 10</a:t>
             </a:r>
           </a:p>
         </p:txBody>
@@ -9559,83 +9560,45 @@
           </a:bodyPr>
           <a:lstStyle/>
           <a:p>
-            <a:pPr algn="l">
+            <a:pPr algn="l" marL="365760" indent="-365760">
               <a:spcAft>
                 <a:spcPts val="800"/>
               </a:spcAft>
+              <a:buClr>
+                <a:srgbClr val="1E40AF"/>
+              </a:buClr>
+              <a:buFont typeface="Arial"/>
+              <a:buChar char="•"/>
             </a:pPr>
             <a:r>
-              <a:rPr sz="2000" b="1">
+              <a:rPr sz="2000">
                 <a:solidFill>
                   <a:srgbClr val="1E293B"/>
                 </a:solidFill>
                 <a:latin typeface="Calibri"/>
               </a:rPr>
-              <a:t>Một hợp tác xã định trồng trên diện tích lớn chỉ một giống cây tạo ra từ nuôi cấy mô tế bào. Theo SGK, rủi ro cần cân nhắc là</a:t>
-            </a:r>
-          </a:p>
-          <a:p>
-            <a:pPr algn="l">
+              <a:t>Đáp án B.</a:t>
+            </a:r>
+          </a:p>
+          <a:p>
+            <a:pPr algn="l" marL="365760" indent="-365760">
               <a:spcAft>
                 <a:spcPts val="800"/>
               </a:spcAft>
+              <a:buClr>
+                <a:srgbClr val="1E40AF"/>
+              </a:buClr>
+              <a:buFont typeface="Arial"/>
+              <a:buChar char="•"/>
             </a:pPr>
             <a:r>
-              <a:rPr sz="2000" b="1">
+              <a:rPr sz="2000">
                 <a:solidFill>
                   <a:srgbClr val="1E293B"/>
                 </a:solidFill>
                 <a:latin typeface="Calibri"/>
               </a:rPr>
-              <a:t>A. dễ mất mùa đồng loạt nếu điều kiện môi trường bất lợi với giống cây đó</a:t>
-            </a:r>
-          </a:p>
-          <a:p>
-            <a:pPr algn="l">
-              <a:spcAft>
-                <a:spcPts val="800"/>
-              </a:spcAft>
-            </a:pPr>
-            <a:r>
-              <a:rPr sz="2000" b="1">
-                <a:solidFill>
-                  <a:srgbClr val="1E293B"/>
-                </a:solidFill>
-                <a:latin typeface="Calibri"/>
-              </a:rPr>
-              <a:t>B. cây sẽ không bao giờ ra hoa, kết quả</a:t>
-            </a:r>
-          </a:p>
-          <a:p>
-            <a:pPr algn="l">
-              <a:spcAft>
-                <a:spcPts val="800"/>
-              </a:spcAft>
-            </a:pPr>
-            <a:r>
-              <a:rPr sz="2000" b="1">
-                <a:solidFill>
-                  <a:srgbClr val="1E293B"/>
-                </a:solidFill>
-                <a:latin typeface="Calibri"/>
-              </a:rPr>
-              <a:t>C. chi phí giống cao hơn gieo hạt truyền thống gấp nhiều lần</a:t>
-            </a:r>
-          </a:p>
-          <a:p>
-            <a:pPr algn="l">
-              <a:spcAft>
-                <a:spcPts val="800"/>
-              </a:spcAft>
-            </a:pPr>
-            <a:r>
-              <a:rPr sz="2000" b="1">
-                <a:solidFill>
-                  <a:srgbClr val="1E293B"/>
-                </a:solidFill>
-                <a:latin typeface="Calibri"/>
-              </a:rPr>
-              <a:t>D. cây sẽ lai tạp với cỏ dại quanh ruộng</a:t>
+              <a:t>SGK mục III.1.</a:t>
             </a:r>
           </a:p>
         </p:txBody>
@@ -9718,14 +9681,14 @@
         </p:nvSpPr>
         <p:spPr>
           <a:xfrm>
-            <a:off x="10463479" y="457200"/>
-            <a:ext cx="1179576" cy="457200"/>
+            <a:off x="10701223" y="457200"/>
+            <a:ext cx="941832" cy="457200"/>
           </a:xfrm>
           <a:prstGeom prst="roundRect">
             <a:avLst/>
           </a:prstGeom>
           <a:solidFill>
-            <a:srgbClr val="991B1B"/>
+            <a:srgbClr val="1E40AF"/>
           </a:solidFill>
           <a:ln>
             <a:noFill/>
@@ -9758,7 +9721,7 @@
                 </a:solidFill>
                 <a:latin typeface="Arial"/>
               </a:rPr>
-              <a:t>LỜI GIẢI</a:t>
+              <a:t>ĐỀ BÀI</a:t>
             </a:r>
           </a:p>
         </p:txBody>
@@ -9772,7 +9735,7 @@
         <p:spPr>
           <a:xfrm>
             <a:off x="731520" y="274320"/>
-            <a:ext cx="9793224" cy="868680"/>
+            <a:ext cx="10030968" cy="868680"/>
           </a:xfrm>
           <a:prstGeom prst="rect">
             <a:avLst/>
@@ -9898,45 +9861,83 @@
           </a:bodyPr>
           <a:lstStyle/>
           <a:p>
-            <a:pPr algn="l" marL="365760" indent="-365760">
+            <a:pPr algn="l">
               <a:spcAft>
                 <a:spcPts val="800"/>
               </a:spcAft>
-              <a:buClr>
-                <a:srgbClr val="1E40AF"/>
-              </a:buClr>
-              <a:buFont typeface="Arial"/>
-              <a:buChar char="•"/>
             </a:pPr>
             <a:r>
-              <a:rPr sz="2000">
+              <a:rPr sz="2000" b="1">
                 <a:solidFill>
                   <a:srgbClr val="1E293B"/>
                 </a:solidFill>
                 <a:latin typeface="Calibri"/>
               </a:rPr>
-              <a:t>Đáp án A.</a:t>
-            </a:r>
-          </a:p>
-          <a:p>
-            <a:pPr algn="l" marL="365760" indent="-365760">
+              <a:t>Đường đôi sucrose được cấu tạo từ</a:t>
+            </a:r>
+          </a:p>
+          <a:p>
+            <a:pPr algn="l">
               <a:spcAft>
                 <a:spcPts val="800"/>
               </a:spcAft>
-              <a:buClr>
-                <a:srgbClr val="1E40AF"/>
-              </a:buClr>
-              <a:buFont typeface="Arial"/>
-              <a:buChar char="•"/>
             </a:pPr>
             <a:r>
-              <a:rPr sz="2000">
+              <a:rPr sz="2000" b="1">
                 <a:solidFill>
                   <a:srgbClr val="1E293B"/>
                 </a:solidFill>
                 <a:latin typeface="Calibri"/>
               </a:rPr>
-              <a:t>SGK mục III.3b: trồng cây giống tạo từ nuôi cấy mô trên diện tích lớn tiềm ẩn rủi ro mất mùa nếu điều kiện môi trường bất lợi.</a:t>
+              <a:t>A. hai phân tử fructose</a:t>
+            </a:r>
+          </a:p>
+          <a:p>
+            <a:pPr algn="l">
+              <a:spcAft>
+                <a:spcPts val="800"/>
+              </a:spcAft>
+            </a:pPr>
+            <a:r>
+              <a:rPr sz="2000" b="1">
+                <a:solidFill>
+                  <a:srgbClr val="1E293B"/>
+                </a:solidFill>
+                <a:latin typeface="Calibri"/>
+              </a:rPr>
+              <a:t>B. hai phân tử glucose</a:t>
+            </a:r>
+          </a:p>
+          <a:p>
+            <a:pPr algn="l">
+              <a:spcAft>
+                <a:spcPts val="800"/>
+              </a:spcAft>
+            </a:pPr>
+            <a:r>
+              <a:rPr sz="2000" b="1">
+                <a:solidFill>
+                  <a:srgbClr val="1E293B"/>
+                </a:solidFill>
+                <a:latin typeface="Calibri"/>
+              </a:rPr>
+              <a:t>C. một phân tử glucose và một phân tử galactose</a:t>
+            </a:r>
+          </a:p>
+          <a:p>
+            <a:pPr algn="l">
+              <a:spcAft>
+                <a:spcPts val="800"/>
+              </a:spcAft>
+            </a:pPr>
+            <a:r>
+              <a:rPr sz="2000" b="1">
+                <a:solidFill>
+                  <a:srgbClr val="1E293B"/>
+                </a:solidFill>
+                <a:latin typeface="Calibri"/>
+              </a:rPr>
+              <a:t>D. một phân tử glucose và một phân tử fructose</a:t>
             </a:r>
           </a:p>
         </p:txBody>
@@ -10279,14 +10280,14 @@
         </p:nvSpPr>
         <p:spPr>
           <a:xfrm>
-            <a:off x="10701223" y="457200"/>
-            <a:ext cx="941832" cy="457200"/>
+            <a:off x="10463479" y="457200"/>
+            <a:ext cx="1179576" cy="457200"/>
           </a:xfrm>
           <a:prstGeom prst="roundRect">
             <a:avLst/>
           </a:prstGeom>
           <a:solidFill>
-            <a:srgbClr val="1E40AF"/>
+            <a:srgbClr val="991B1B"/>
           </a:solidFill>
           <a:ln>
             <a:noFill/>
@@ -10319,7 +10320,7 @@
                 </a:solidFill>
                 <a:latin typeface="Arial"/>
               </a:rPr>
-              <a:t>ĐỀ BÀI</a:t>
+              <a:t>LỜI GIẢI</a:t>
             </a:r>
           </a:p>
         </p:txBody>
@@ -10333,7 +10334,7 @@
         <p:spPr>
           <a:xfrm>
             <a:off x="731520" y="274320"/>
-            <a:ext cx="10030968" cy="868680"/>
+            <a:ext cx="9793224" cy="868680"/>
           </a:xfrm>
           <a:prstGeom prst="rect">
             <a:avLst/>
@@ -10353,7 +10354,7 @@
                 </a:solidFill>
                 <a:latin typeface="Arial"/>
               </a:rPr>
-              <a:t>ĐỀ MINH HỌA · PHẦN I · CÂU 12</a:t>
+              <a:t>ĐỀ MINH HỌA · PHẦN I · CÂU 11</a:t>
             </a:r>
           </a:p>
         </p:txBody>
@@ -10459,83 +10460,45 @@
           </a:bodyPr>
           <a:lstStyle/>
           <a:p>
-            <a:pPr algn="l">
+            <a:pPr algn="l" marL="365760" indent="-365760">
               <a:spcAft>
                 <a:spcPts val="800"/>
               </a:spcAft>
+              <a:buClr>
+                <a:srgbClr val="1E40AF"/>
+              </a:buClr>
+              <a:buFont typeface="Arial"/>
+              <a:buChar char="•"/>
             </a:pPr>
             <a:r>
-              <a:rPr sz="2000" b="1">
+              <a:rPr sz="2000">
                 <a:solidFill>
                   <a:srgbClr val="1E293B"/>
                 </a:solidFill>
                 <a:latin typeface="Calibri"/>
               </a:rPr>
-              <a:t>Để phân loại thực vật theo đặc điểm rễ, thân, lá, hoa, quả, ta dùng phương pháp</a:t>
-            </a:r>
-          </a:p>
-          <a:p>
-            <a:pPr algn="l">
+              <a:t>Đáp án D.</a:t>
+            </a:r>
+          </a:p>
+          <a:p>
+            <a:pPr algn="l" marL="365760" indent="-365760">
               <a:spcAft>
                 <a:spcPts val="800"/>
               </a:spcAft>
+              <a:buClr>
+                <a:srgbClr val="1E40AF"/>
+              </a:buClr>
+              <a:buFont typeface="Arial"/>
+              <a:buChar char="•"/>
             </a:pPr>
             <a:r>
-              <a:rPr sz="2000" b="1">
+              <a:rPr sz="2000">
                 <a:solidFill>
                   <a:srgbClr val="1E293B"/>
                 </a:solidFill>
                 <a:latin typeface="Calibri"/>
               </a:rPr>
-              <a:t>A. tin sinh học</a:t>
-            </a:r>
-          </a:p>
-          <a:p>
-            <a:pPr algn="l">
-              <a:spcAft>
-                <a:spcPts val="800"/>
-              </a:spcAft>
-            </a:pPr>
-            <a:r>
-              <a:rPr sz="2000" b="1">
-                <a:solidFill>
-                  <a:srgbClr val="1E293B"/>
-                </a:solidFill>
-                <a:latin typeface="Calibri"/>
-              </a:rPr>
-              <a:t>B. thực nghiệm khoa học</a:t>
-            </a:r>
-          </a:p>
-          <a:p>
-            <a:pPr algn="l">
-              <a:spcAft>
-                <a:spcPts val="800"/>
-              </a:spcAft>
-            </a:pPr>
-            <a:r>
-              <a:rPr sz="2000" b="1">
-                <a:solidFill>
-                  <a:srgbClr val="1E293B"/>
-                </a:solidFill>
-                <a:latin typeface="Calibri"/>
-              </a:rPr>
-              <a:t>C. quan sát</a:t>
-            </a:r>
-          </a:p>
-          <a:p>
-            <a:pPr algn="l">
-              <a:spcAft>
-                <a:spcPts val="800"/>
-              </a:spcAft>
-            </a:pPr>
-            <a:r>
-              <a:rPr sz="2000" b="1">
-                <a:solidFill>
-                  <a:srgbClr val="1E293B"/>
-                </a:solidFill>
-                <a:latin typeface="Calibri"/>
-              </a:rPr>
-              <a:t>D. nuôi cấy mô</a:t>
+              <a:t>SGK tr.29: sucrose = glucose + fructose; maltose = glucose + glucose; lactose = glucose + galactose.</a:t>
             </a:r>
           </a:p>
         </p:txBody>
@@ -10618,14 +10581,14 @@
         </p:nvSpPr>
         <p:spPr>
           <a:xfrm>
-            <a:off x="10463479" y="457200"/>
-            <a:ext cx="1179576" cy="457200"/>
+            <a:off x="10701223" y="457200"/>
+            <a:ext cx="941832" cy="457200"/>
           </a:xfrm>
           <a:prstGeom prst="roundRect">
             <a:avLst/>
           </a:prstGeom>
           <a:solidFill>
-            <a:srgbClr val="991B1B"/>
+            <a:srgbClr val="1E40AF"/>
           </a:solidFill>
           <a:ln>
             <a:noFill/>
@@ -10658,7 +10621,7 @@
                 </a:solidFill>
                 <a:latin typeface="Arial"/>
               </a:rPr>
-              <a:t>LỜI GIẢI</a:t>
+              <a:t>ĐỀ BÀI</a:t>
             </a:r>
           </a:p>
         </p:txBody>
@@ -10672,7 +10635,7 @@
         <p:spPr>
           <a:xfrm>
             <a:off x="731520" y="274320"/>
-            <a:ext cx="9793224" cy="868680"/>
+            <a:ext cx="10030968" cy="868680"/>
           </a:xfrm>
           <a:prstGeom prst="rect">
             <a:avLst/>
@@ -10798,45 +10761,83 @@
           </a:bodyPr>
           <a:lstStyle/>
           <a:p>
-            <a:pPr algn="l" marL="365760" indent="-365760">
+            <a:pPr algn="l">
               <a:spcAft>
                 <a:spcPts val="800"/>
               </a:spcAft>
-              <a:buClr>
-                <a:srgbClr val="1E40AF"/>
-              </a:buClr>
-              <a:buFont typeface="Arial"/>
-              <a:buChar char="•"/>
             </a:pPr>
             <a:r>
-              <a:rPr sz="2000">
+              <a:rPr sz="2000" b="1">
                 <a:solidFill>
                   <a:srgbClr val="1E293B"/>
                 </a:solidFill>
                 <a:latin typeface="Calibri"/>
               </a:rPr>
-              <a:t>Đáp án C.</a:t>
-            </a:r>
-          </a:p>
-          <a:p>
-            <a:pPr algn="l" marL="365760" indent="-365760">
+              <a:t>Mục đích của ống nghiệm đối chứng (thay mẫu bằng nước cất) là</a:t>
+            </a:r>
+          </a:p>
+          <a:p>
+            <a:pPr algn="l">
               <a:spcAft>
                 <a:spcPts val="800"/>
               </a:spcAft>
-              <a:buClr>
-                <a:srgbClr val="1E40AF"/>
-              </a:buClr>
-              <a:buFont typeface="Arial"/>
-              <a:buChar char="•"/>
             </a:pPr>
             <a:r>
-              <a:rPr sz="2000">
+              <a:rPr sz="2000" b="1">
                 <a:solidFill>
                   <a:srgbClr val="1E293B"/>
                 </a:solidFill>
                 <a:latin typeface="Calibri"/>
               </a:rPr>
-              <a:t>Chỉ cần quan sát, mô tả, so sánh hình thái.</a:t>
+              <a:t>A. làm tăng tốc độ phản ứng</a:t>
+            </a:r>
+          </a:p>
+          <a:p>
+            <a:pPr algn="l">
+              <a:spcAft>
+                <a:spcPts val="800"/>
+              </a:spcAft>
+            </a:pPr>
+            <a:r>
+              <a:rPr sz="2000" b="1">
+                <a:solidFill>
+                  <a:srgbClr val="1E293B"/>
+                </a:solidFill>
+                <a:latin typeface="Calibri"/>
+              </a:rPr>
+              <a:t>B. so sánh để khẳng định sự đổi màu là do chất cần nhận biết</a:t>
+            </a:r>
+          </a:p>
+          <a:p>
+            <a:pPr algn="l">
+              <a:spcAft>
+                <a:spcPts val="800"/>
+              </a:spcAft>
+            </a:pPr>
+            <a:r>
+              <a:rPr sz="2000" b="1">
+                <a:solidFill>
+                  <a:srgbClr val="1E293B"/>
+                </a:solidFill>
+                <a:latin typeface="Calibri"/>
+              </a:rPr>
+              <a:t>C. tiết kiệm hoá chất</a:t>
+            </a:r>
+          </a:p>
+          <a:p>
+            <a:pPr algn="l">
+              <a:spcAft>
+                <a:spcPts val="800"/>
+              </a:spcAft>
+            </a:pPr>
+            <a:r>
+              <a:rPr sz="2000" b="1">
+                <a:solidFill>
+                  <a:srgbClr val="1E293B"/>
+                </a:solidFill>
+                <a:latin typeface="Calibri"/>
+              </a:rPr>
+              <a:t>D. làm nguội dung dịch</a:t>
             </a:r>
           </a:p>
         </p:txBody>
@@ -10919,14 +10920,14 @@
         </p:nvSpPr>
         <p:spPr>
           <a:xfrm>
-            <a:off x="10701223" y="457200"/>
-            <a:ext cx="941832" cy="457200"/>
+            <a:off x="10463479" y="457200"/>
+            <a:ext cx="1179576" cy="457200"/>
           </a:xfrm>
           <a:prstGeom prst="roundRect">
             <a:avLst/>
           </a:prstGeom>
           <a:solidFill>
-            <a:srgbClr val="1E40AF"/>
+            <a:srgbClr val="991B1B"/>
           </a:solidFill>
           <a:ln>
             <a:noFill/>
@@ -10959,7 +10960,7 @@
                 </a:solidFill>
                 <a:latin typeface="Arial"/>
               </a:rPr>
-              <a:t>ĐỀ BÀI</a:t>
+              <a:t>LỜI GIẢI</a:t>
             </a:r>
           </a:p>
         </p:txBody>
@@ -10973,7 +10974,7 @@
         <p:spPr>
           <a:xfrm>
             <a:off x="731520" y="274320"/>
-            <a:ext cx="10030968" cy="868680"/>
+            <a:ext cx="9793224" cy="868680"/>
           </a:xfrm>
           <a:prstGeom prst="rect">
             <a:avLst/>
@@ -10993,7 +10994,7 @@
                 </a:solidFill>
                 <a:latin typeface="Arial"/>
               </a:rPr>
-              <a:t>ĐỀ MINH HỌA · PHẦN I · CÂU 13</a:t>
+              <a:t>ĐỀ MINH HỌA · PHẦN I · CÂU 12</a:t>
             </a:r>
           </a:p>
         </p:txBody>
@@ -11099,83 +11100,45 @@
           </a:bodyPr>
           <a:lstStyle/>
           <a:p>
-            <a:pPr algn="l">
+            <a:pPr algn="l" marL="365760" indent="-365760">
               <a:spcAft>
                 <a:spcPts val="800"/>
               </a:spcAft>
+              <a:buClr>
+                <a:srgbClr val="1E40AF"/>
+              </a:buClr>
+              <a:buFont typeface="Arial"/>
+              <a:buChar char="•"/>
             </a:pPr>
             <a:r>
-              <a:rPr sz="2000" b="1">
+              <a:rPr sz="2000">
                 <a:solidFill>
                   <a:srgbClr val="1E293B"/>
                 </a:solidFill>
                 <a:latin typeface="Calibri"/>
               </a:rPr>
-              <a:t>Khả năng duy trì môi trường bên trong ổn định dù môi trường ngoài thay đổi được gọi là</a:t>
-            </a:r>
-          </a:p>
-          <a:p>
-            <a:pPr algn="l">
+              <a:t>Đáp án B.</a:t>
+            </a:r>
+          </a:p>
+          <a:p>
+            <a:pPr algn="l" marL="365760" indent="-365760">
               <a:spcAft>
                 <a:spcPts val="800"/>
               </a:spcAft>
+              <a:buClr>
+                <a:srgbClr val="1E40AF"/>
+              </a:buClr>
+              <a:buFont typeface="Arial"/>
+              <a:buChar char="•"/>
             </a:pPr>
             <a:r>
-              <a:rPr sz="2000" b="1">
+              <a:rPr sz="2000">
                 <a:solidFill>
                   <a:srgbClr val="1E293B"/>
                 </a:solidFill>
                 <a:latin typeface="Calibri"/>
               </a:rPr>
-              <a:t>A. đặc tính nổi trội</a:t>
-            </a:r>
-          </a:p>
-          <a:p>
-            <a:pPr algn="l">
-              <a:spcAft>
-                <a:spcPts val="800"/>
-              </a:spcAft>
-            </a:pPr>
-            <a:r>
-              <a:rPr sz="2000" b="1">
-                <a:solidFill>
-                  <a:srgbClr val="1E293B"/>
-                </a:solidFill>
-                <a:latin typeface="Calibri"/>
-              </a:rPr>
-              <a:t>B. cân bằng nội môi</a:t>
-            </a:r>
-          </a:p>
-          <a:p>
-            <a:pPr algn="l">
-              <a:spcAft>
-                <a:spcPts val="800"/>
-              </a:spcAft>
-            </a:pPr>
-            <a:r>
-              <a:rPr sz="2000" b="1">
-                <a:solidFill>
-                  <a:srgbClr val="1E293B"/>
-                </a:solidFill>
-                <a:latin typeface="Calibri"/>
-              </a:rPr>
-              <a:t>C. tiến hoá</a:t>
-            </a:r>
-          </a:p>
-          <a:p>
-            <a:pPr algn="l">
-              <a:spcAft>
-                <a:spcPts val="800"/>
-              </a:spcAft>
-            </a:pPr>
-            <a:r>
-              <a:rPr sz="2000" b="1">
-                <a:solidFill>
-                  <a:srgbClr val="1E293B"/>
-                </a:solidFill>
-                <a:latin typeface="Calibri"/>
-              </a:rPr>
-              <a:t>D. chuyển hoá năng lượng</a:t>
+              <a:t>Ống đối chứng chỉ khác ống thí nghiệm ở mẫu thử; nếu chỉ ống thí nghiệm đổi màu thì kết luận được mẫu có chất cần nhận biết.</a:t>
             </a:r>
           </a:p>
         </p:txBody>
@@ -11258,14 +11221,14 @@
         </p:nvSpPr>
         <p:spPr>
           <a:xfrm>
-            <a:off x="10463479" y="457200"/>
-            <a:ext cx="1179576" cy="457200"/>
+            <a:off x="10701223" y="457200"/>
+            <a:ext cx="941832" cy="457200"/>
           </a:xfrm>
           <a:prstGeom prst="roundRect">
             <a:avLst/>
           </a:prstGeom>
           <a:solidFill>
-            <a:srgbClr val="991B1B"/>
+            <a:srgbClr val="1E40AF"/>
           </a:solidFill>
           <a:ln>
             <a:noFill/>
@@ -11298,7 +11261,7 @@
                 </a:solidFill>
                 <a:latin typeface="Arial"/>
               </a:rPr>
-              <a:t>LỜI GIẢI</a:t>
+              <a:t>ĐỀ BÀI</a:t>
             </a:r>
           </a:p>
         </p:txBody>
@@ -11312,7 +11275,7 @@
         <p:spPr>
           <a:xfrm>
             <a:off x="731520" y="274320"/>
-            <a:ext cx="9793224" cy="868680"/>
+            <a:ext cx="10030968" cy="868680"/>
           </a:xfrm>
           <a:prstGeom prst="rect">
             <a:avLst/>
@@ -11438,45 +11401,83 @@
           </a:bodyPr>
           <a:lstStyle/>
           <a:p>
-            <a:pPr algn="l" marL="365760" indent="-365760">
+            <a:pPr algn="l">
               <a:spcAft>
                 <a:spcPts val="800"/>
               </a:spcAft>
-              <a:buClr>
-                <a:srgbClr val="1E40AF"/>
-              </a:buClr>
-              <a:buFont typeface="Arial"/>
-              <a:buChar char="•"/>
             </a:pPr>
             <a:r>
-              <a:rPr sz="2000">
+              <a:rPr sz="2000" b="1">
                 <a:solidFill>
                   <a:srgbClr val="1E293B"/>
                 </a:solidFill>
                 <a:latin typeface="Calibri"/>
               </a:rPr>
-              <a:t>Đáp án B.</a:t>
-            </a:r>
-          </a:p>
-          <a:p>
-            <a:pPr algn="l" marL="365760" indent="-365760">
+              <a:t>Một hợp tác xã định trồng trên diện tích lớn chỉ một giống cây tạo ra từ nuôi cấy mô tế bào. Theo SGK, rủi ro cần cân nhắc là</a:t>
+            </a:r>
+          </a:p>
+          <a:p>
+            <a:pPr algn="l">
               <a:spcAft>
                 <a:spcPts val="800"/>
               </a:spcAft>
-              <a:buClr>
-                <a:srgbClr val="1E40AF"/>
-              </a:buClr>
-              <a:buFont typeface="Arial"/>
-              <a:buChar char="•"/>
             </a:pPr>
             <a:r>
-              <a:rPr sz="2000">
+              <a:rPr sz="2000" b="1">
                 <a:solidFill>
                   <a:srgbClr val="1E293B"/>
                 </a:solidFill>
                 <a:latin typeface="Calibri"/>
               </a:rPr>
-              <a:t>SGK mục II.2.</a:t>
+              <a:t>A. dễ mất mùa đồng loạt nếu điều kiện môi trường bất lợi với giống cây đó</a:t>
+            </a:r>
+          </a:p>
+          <a:p>
+            <a:pPr algn="l">
+              <a:spcAft>
+                <a:spcPts val="800"/>
+              </a:spcAft>
+            </a:pPr>
+            <a:r>
+              <a:rPr sz="2000" b="1">
+                <a:solidFill>
+                  <a:srgbClr val="1E293B"/>
+                </a:solidFill>
+                <a:latin typeface="Calibri"/>
+              </a:rPr>
+              <a:t>B. cây sẽ không bao giờ ra hoa, kết quả</a:t>
+            </a:r>
+          </a:p>
+          <a:p>
+            <a:pPr algn="l">
+              <a:spcAft>
+                <a:spcPts val="800"/>
+              </a:spcAft>
+            </a:pPr>
+            <a:r>
+              <a:rPr sz="2000" b="1">
+                <a:solidFill>
+                  <a:srgbClr val="1E293B"/>
+                </a:solidFill>
+                <a:latin typeface="Calibri"/>
+              </a:rPr>
+              <a:t>C. chi phí giống cao hơn gieo hạt truyền thống gấp nhiều lần</a:t>
+            </a:r>
+          </a:p>
+          <a:p>
+            <a:pPr algn="l">
+              <a:spcAft>
+                <a:spcPts val="800"/>
+              </a:spcAft>
+            </a:pPr>
+            <a:r>
+              <a:rPr sz="2000" b="1">
+                <a:solidFill>
+                  <a:srgbClr val="1E293B"/>
+                </a:solidFill>
+                <a:latin typeface="Calibri"/>
+              </a:rPr>
+              <a:t>D. cây sẽ lai tạp với cỏ dại quanh ruộng</a:t>
             </a:r>
           </a:p>
         </p:txBody>
@@ -11559,14 +11560,14 @@
         </p:nvSpPr>
         <p:spPr>
           <a:xfrm>
-            <a:off x="10701223" y="457200"/>
-            <a:ext cx="941832" cy="457200"/>
+            <a:off x="10463479" y="457200"/>
+            <a:ext cx="1179576" cy="457200"/>
           </a:xfrm>
           <a:prstGeom prst="roundRect">
             <a:avLst/>
           </a:prstGeom>
           <a:solidFill>
-            <a:srgbClr val="1E40AF"/>
+            <a:srgbClr val="991B1B"/>
           </a:solidFill>
           <a:ln>
             <a:noFill/>
@@ -11599,7 +11600,7 @@
                 </a:solidFill>
                 <a:latin typeface="Arial"/>
               </a:rPr>
-              <a:t>ĐỀ BÀI</a:t>
+              <a:t>LỜI GIẢI</a:t>
             </a:r>
           </a:p>
         </p:txBody>
@@ -11613,7 +11614,7 @@
         <p:spPr>
           <a:xfrm>
             <a:off x="731520" y="274320"/>
-            <a:ext cx="10030968" cy="868680"/>
+            <a:ext cx="9793224" cy="868680"/>
           </a:xfrm>
           <a:prstGeom prst="rect">
             <a:avLst/>
@@ -11633,7 +11634,7 @@
                 </a:solidFill>
                 <a:latin typeface="Arial"/>
               </a:rPr>
-              <a:t>ĐỀ MINH HỌA · PHẦN I · CÂU 14</a:t>
+              <a:t>ĐỀ MINH HỌA · PHẦN I · CÂU 13</a:t>
             </a:r>
           </a:p>
         </p:txBody>
@@ -11739,83 +11740,45 @@
           </a:bodyPr>
           <a:lstStyle/>
           <a:p>
-            <a:pPr algn="l">
+            <a:pPr algn="l" marL="365760" indent="-365760">
               <a:spcAft>
                 <a:spcPts val="800"/>
               </a:spcAft>
+              <a:buClr>
+                <a:srgbClr val="1E40AF"/>
+              </a:buClr>
+              <a:buFont typeface="Arial"/>
+              <a:buChar char="•"/>
             </a:pPr>
             <a:r>
-              <a:rPr sz="2000" b="1">
+              <a:rPr sz="2000">
                 <a:solidFill>
                   <a:srgbClr val="1E293B"/>
                 </a:solidFill>
                 <a:latin typeface="Calibri"/>
               </a:rPr>
-              <a:t>Mọi sinh vật có thành phần nguyên tố hoá học về cơ bản giống nhau chứng tỏ</a:t>
-            </a:r>
-          </a:p>
-          <a:p>
-            <a:pPr algn="l">
+              <a:t>Đáp án A.</a:t>
+            </a:r>
+          </a:p>
+          <a:p>
+            <a:pPr algn="l" marL="365760" indent="-365760">
               <a:spcAft>
                 <a:spcPts val="800"/>
               </a:spcAft>
+              <a:buClr>
+                <a:srgbClr val="1E40AF"/>
+              </a:buClr>
+              <a:buFont typeface="Arial"/>
+              <a:buChar char="•"/>
             </a:pPr>
             <a:r>
-              <a:rPr sz="2000" b="1">
+              <a:rPr sz="2000">
                 <a:solidFill>
                   <a:srgbClr val="1E293B"/>
                 </a:solidFill>
                 <a:latin typeface="Calibri"/>
               </a:rPr>
-              <a:t>A. các sinh vật có chung nguồn gốc</a:t>
-            </a:r>
-          </a:p>
-          <a:p>
-            <a:pPr algn="l">
-              <a:spcAft>
-                <a:spcPts val="800"/>
-              </a:spcAft>
-            </a:pPr>
-            <a:r>
-              <a:rPr sz="2000" b="1">
-                <a:solidFill>
-                  <a:srgbClr val="1E293B"/>
-                </a:solidFill>
-                <a:latin typeface="Calibri"/>
-              </a:rPr>
-              <a:t>B. các sinh vật sống cùng một môi trường</a:t>
-            </a:r>
-          </a:p>
-          <a:p>
-            <a:pPr algn="l">
-              <a:spcAft>
-                <a:spcPts val="800"/>
-              </a:spcAft>
-            </a:pPr>
-            <a:r>
-              <a:rPr sz="2000" b="1">
-                <a:solidFill>
-                  <a:srgbClr val="1E293B"/>
-                </a:solidFill>
-                <a:latin typeface="Calibri"/>
-              </a:rPr>
-              <a:t>C. các sinh vật có cùng kích thước</a:t>
-            </a:r>
-          </a:p>
-          <a:p>
-            <a:pPr algn="l">
-              <a:spcAft>
-                <a:spcPts val="800"/>
-              </a:spcAft>
-            </a:pPr>
-            <a:r>
-              <a:rPr sz="2000" b="1">
-                <a:solidFill>
-                  <a:srgbClr val="1E293B"/>
-                </a:solidFill>
-                <a:latin typeface="Calibri"/>
-              </a:rPr>
-              <a:t>D. các sinh vật không tiến hoá</a:t>
+              <a:t>SGK mục III.3b: trồng cây giống tạo từ nuôi cấy mô trên diện tích lớn tiềm ẩn rủi ro mất mùa nếu điều kiện môi trường bất lợi.</a:t>
             </a:r>
           </a:p>
         </p:txBody>
@@ -11898,14 +11861,14 @@
         </p:nvSpPr>
         <p:spPr>
           <a:xfrm>
-            <a:off x="10463479" y="457200"/>
-            <a:ext cx="1179576" cy="457200"/>
+            <a:off x="10701223" y="457200"/>
+            <a:ext cx="941832" cy="457200"/>
           </a:xfrm>
           <a:prstGeom prst="roundRect">
             <a:avLst/>
           </a:prstGeom>
           <a:solidFill>
-            <a:srgbClr val="991B1B"/>
+            <a:srgbClr val="1E40AF"/>
           </a:solidFill>
           <a:ln>
             <a:noFill/>
@@ -11938,7 +11901,7 @@
                 </a:solidFill>
                 <a:latin typeface="Arial"/>
               </a:rPr>
-              <a:t>LỜI GIẢI</a:t>
+              <a:t>ĐỀ BÀI</a:t>
             </a:r>
           </a:p>
         </p:txBody>
@@ -11952,7 +11915,7 @@
         <p:spPr>
           <a:xfrm>
             <a:off x="731520" y="274320"/>
-            <a:ext cx="9793224" cy="868680"/>
+            <a:ext cx="10030968" cy="868680"/>
           </a:xfrm>
           <a:prstGeom prst="rect">
             <a:avLst/>
@@ -12078,45 +12041,83 @@
           </a:bodyPr>
           <a:lstStyle/>
           <a:p>
-            <a:pPr algn="l" marL="365760" indent="-365760">
+            <a:pPr algn="l">
               <a:spcAft>
                 <a:spcPts val="800"/>
               </a:spcAft>
-              <a:buClr>
-                <a:srgbClr val="1E40AF"/>
-              </a:buClr>
-              <a:buFont typeface="Arial"/>
-              <a:buChar char="•"/>
             </a:pPr>
             <a:r>
-              <a:rPr sz="2000">
+              <a:rPr sz="2000" b="1">
                 <a:solidFill>
                   <a:srgbClr val="1E293B"/>
                 </a:solidFill>
                 <a:latin typeface="Calibri"/>
               </a:rPr>
-              <a:t>Đáp án A.</a:t>
-            </a:r>
-          </a:p>
-          <a:p>
-            <a:pPr algn="l" marL="365760" indent="-365760">
+              <a:t>Để phân loại thực vật theo đặc điểm rễ, thân, lá, hoa, quả, ta dùng phương pháp</a:t>
+            </a:r>
+          </a:p>
+          <a:p>
+            <a:pPr algn="l">
               <a:spcAft>
                 <a:spcPts val="800"/>
               </a:spcAft>
-              <a:buClr>
-                <a:srgbClr val="1E40AF"/>
-              </a:buClr>
-              <a:buFont typeface="Arial"/>
-              <a:buChar char="•"/>
             </a:pPr>
             <a:r>
-              <a:rPr sz="2000">
+              <a:rPr sz="2000" b="1">
                 <a:solidFill>
                   <a:srgbClr val="1E293B"/>
                 </a:solidFill>
                 <a:latin typeface="Calibri"/>
               </a:rPr>
-              <a:t>SGV tr.36.</a:t>
+              <a:t>A. tin sinh học</a:t>
+            </a:r>
+          </a:p>
+          <a:p>
+            <a:pPr algn="l">
+              <a:spcAft>
+                <a:spcPts val="800"/>
+              </a:spcAft>
+            </a:pPr>
+            <a:r>
+              <a:rPr sz="2000" b="1">
+                <a:solidFill>
+                  <a:srgbClr val="1E293B"/>
+                </a:solidFill>
+                <a:latin typeface="Calibri"/>
+              </a:rPr>
+              <a:t>B. thực nghiệm khoa học</a:t>
+            </a:r>
+          </a:p>
+          <a:p>
+            <a:pPr algn="l">
+              <a:spcAft>
+                <a:spcPts val="800"/>
+              </a:spcAft>
+            </a:pPr>
+            <a:r>
+              <a:rPr sz="2000" b="1">
+                <a:solidFill>
+                  <a:srgbClr val="1E293B"/>
+                </a:solidFill>
+                <a:latin typeface="Calibri"/>
+              </a:rPr>
+              <a:t>C. quan sát</a:t>
+            </a:r>
+          </a:p>
+          <a:p>
+            <a:pPr algn="l">
+              <a:spcAft>
+                <a:spcPts val="800"/>
+              </a:spcAft>
+            </a:pPr>
+            <a:r>
+              <a:rPr sz="2000" b="1">
+                <a:solidFill>
+                  <a:srgbClr val="1E293B"/>
+                </a:solidFill>
+                <a:latin typeface="Calibri"/>
+              </a:rPr>
+              <a:t>D. nuôi cấy mô</a:t>
             </a:r>
           </a:p>
         </p:txBody>
@@ -12199,14 +12200,14 @@
         </p:nvSpPr>
         <p:spPr>
           <a:xfrm>
-            <a:off x="10701223" y="457200"/>
-            <a:ext cx="941832" cy="457200"/>
+            <a:off x="10463479" y="457200"/>
+            <a:ext cx="1179576" cy="457200"/>
           </a:xfrm>
           <a:prstGeom prst="roundRect">
             <a:avLst/>
           </a:prstGeom>
           <a:solidFill>
-            <a:srgbClr val="1E40AF"/>
+            <a:srgbClr val="991B1B"/>
           </a:solidFill>
           <a:ln>
             <a:noFill/>
@@ -12239,7 +12240,7 @@
                 </a:solidFill>
                 <a:latin typeface="Arial"/>
               </a:rPr>
-              <a:t>ĐỀ BÀI</a:t>
+              <a:t>LỜI GIẢI</a:t>
             </a:r>
           </a:p>
         </p:txBody>
@@ -12253,7 +12254,7 @@
         <p:spPr>
           <a:xfrm>
             <a:off x="731520" y="274320"/>
-            <a:ext cx="10030968" cy="868680"/>
+            <a:ext cx="9793224" cy="868680"/>
           </a:xfrm>
           <a:prstGeom prst="rect">
             <a:avLst/>
@@ -12273,7 +12274,7 @@
                 </a:solidFill>
                 <a:latin typeface="Arial"/>
               </a:rPr>
-              <a:t>ĐỀ MINH HỌA · PHẦN I · CÂU 15</a:t>
+              <a:t>ĐỀ MINH HỌA · PHẦN I · CÂU 14</a:t>
             </a:r>
           </a:p>
         </p:txBody>
@@ -12379,83 +12380,45 @@
           </a:bodyPr>
           <a:lstStyle/>
           <a:p>
-            <a:pPr algn="l">
+            <a:pPr algn="l" marL="365760" indent="-365760">
               <a:spcAft>
                 <a:spcPts val="800"/>
               </a:spcAft>
+              <a:buClr>
+                <a:srgbClr val="1E40AF"/>
+              </a:buClr>
+              <a:buFont typeface="Arial"/>
+              <a:buChar char="•"/>
             </a:pPr>
             <a:r>
-              <a:rPr sz="2000" b="1">
+              <a:rPr sz="2000">
                 <a:solidFill>
                   <a:srgbClr val="1E293B"/>
                 </a:solidFill>
                 <a:latin typeface="Calibri"/>
               </a:rPr>
-              <a:t>Một đoạn DNA có 1 000 nucleotide, trong đó số nucleotide loại A là 200. Số nucleotide loại G của đoạn DNA này là</a:t>
-            </a:r>
-          </a:p>
-          <a:p>
-            <a:pPr algn="l">
+              <a:t>Đáp án C.</a:t>
+            </a:r>
+          </a:p>
+          <a:p>
+            <a:pPr algn="l" marL="365760" indent="-365760">
               <a:spcAft>
                 <a:spcPts val="800"/>
               </a:spcAft>
+              <a:buClr>
+                <a:srgbClr val="1E40AF"/>
+              </a:buClr>
+              <a:buFont typeface="Arial"/>
+              <a:buChar char="•"/>
             </a:pPr>
             <a:r>
-              <a:rPr sz="2000" b="1">
+              <a:rPr sz="2000">
                 <a:solidFill>
                   <a:srgbClr val="1E293B"/>
                 </a:solidFill>
                 <a:latin typeface="Calibri"/>
               </a:rPr>
-              <a:t>A. 300</a:t>
-            </a:r>
-          </a:p>
-          <a:p>
-            <a:pPr algn="l">
-              <a:spcAft>
-                <a:spcPts val="800"/>
-              </a:spcAft>
-            </a:pPr>
-            <a:r>
-              <a:rPr sz="2000" b="1">
-                <a:solidFill>
-                  <a:srgbClr val="1E293B"/>
-                </a:solidFill>
-                <a:latin typeface="Calibri"/>
-              </a:rPr>
-              <a:t>B. 200</a:t>
-            </a:r>
-          </a:p>
-          <a:p>
-            <a:pPr algn="l">
-              <a:spcAft>
-                <a:spcPts val="800"/>
-              </a:spcAft>
-            </a:pPr>
-            <a:r>
-              <a:rPr sz="2000" b="1">
-                <a:solidFill>
-                  <a:srgbClr val="1E293B"/>
-                </a:solidFill>
-                <a:latin typeface="Calibri"/>
-              </a:rPr>
-              <a:t>C. 600</a:t>
-            </a:r>
-          </a:p>
-          <a:p>
-            <a:pPr algn="l">
-              <a:spcAft>
-                <a:spcPts val="800"/>
-              </a:spcAft>
-            </a:pPr>
-            <a:r>
-              <a:rPr sz="2000" b="1">
-                <a:solidFill>
-                  <a:srgbClr val="1E293B"/>
-                </a:solidFill>
-                <a:latin typeface="Calibri"/>
-              </a:rPr>
-              <a:t>D. 800</a:t>
+              <a:t>Chỉ cần quan sát, mô tả, so sánh hình thái.</a:t>
             </a:r>
           </a:p>
         </p:txBody>
@@ -12538,14 +12501,14 @@
         </p:nvSpPr>
         <p:spPr>
           <a:xfrm>
-            <a:off x="10463479" y="457200"/>
-            <a:ext cx="1179576" cy="457200"/>
+            <a:off x="10701223" y="457200"/>
+            <a:ext cx="941832" cy="457200"/>
           </a:xfrm>
           <a:prstGeom prst="roundRect">
             <a:avLst/>
           </a:prstGeom>
           <a:solidFill>
-            <a:srgbClr val="991B1B"/>
+            <a:srgbClr val="1E40AF"/>
           </a:solidFill>
           <a:ln>
             <a:noFill/>
@@ -12578,7 +12541,7 @@
                 </a:solidFill>
                 <a:latin typeface="Arial"/>
               </a:rPr>
-              <a:t>LỜI GIẢI</a:t>
+              <a:t>ĐỀ BÀI</a:t>
             </a:r>
           </a:p>
         </p:txBody>
@@ -12592,7 +12555,7 @@
         <p:spPr>
           <a:xfrm>
             <a:off x="731520" y="274320"/>
-            <a:ext cx="9793224" cy="868680"/>
+            <a:ext cx="10030968" cy="868680"/>
           </a:xfrm>
           <a:prstGeom prst="rect">
             <a:avLst/>
@@ -12718,45 +12681,83 @@
           </a:bodyPr>
           <a:lstStyle/>
           <a:p>
-            <a:pPr algn="l" marL="365760" indent="-365760">
+            <a:pPr algn="l">
               <a:spcAft>
                 <a:spcPts val="800"/>
               </a:spcAft>
-              <a:buClr>
-                <a:srgbClr val="1E40AF"/>
-              </a:buClr>
-              <a:buFont typeface="Arial"/>
-              <a:buChar char="•"/>
             </a:pPr>
             <a:r>
-              <a:rPr sz="2000">
+              <a:rPr sz="2000" b="1">
                 <a:solidFill>
                   <a:srgbClr val="1E293B"/>
                 </a:solidFill>
                 <a:latin typeface="Calibri"/>
               </a:rPr>
-              <a:t>Đáp án A.</a:t>
-            </a:r>
-          </a:p>
-          <a:p>
-            <a:pPr algn="l" marL="365760" indent="-365760">
+              <a:t>Khả năng duy trì môi trường bên trong ổn định dù môi trường ngoài thay đổi được gọi là</a:t>
+            </a:r>
+          </a:p>
+          <a:p>
+            <a:pPr algn="l">
               <a:spcAft>
                 <a:spcPts val="800"/>
               </a:spcAft>
-              <a:buClr>
-                <a:srgbClr val="1E40AF"/>
-              </a:buClr>
-              <a:buFont typeface="Arial"/>
-              <a:buChar char="•"/>
             </a:pPr>
             <a:r>
-              <a:rPr sz="2000">
+              <a:rPr sz="2000" b="1">
                 <a:solidFill>
                   <a:srgbClr val="1E293B"/>
                 </a:solidFill>
                 <a:latin typeface="Calibri"/>
               </a:rPr>
-              <a:t>Theo nguyên tắc bổ sung A = T = 200 nên G = C = (1 000 − 2·200) : 2 = 300.</a:t>
+              <a:t>A. đặc tính nổi trội</a:t>
+            </a:r>
+          </a:p>
+          <a:p>
+            <a:pPr algn="l">
+              <a:spcAft>
+                <a:spcPts val="800"/>
+              </a:spcAft>
+            </a:pPr>
+            <a:r>
+              <a:rPr sz="2000" b="1">
+                <a:solidFill>
+                  <a:srgbClr val="1E293B"/>
+                </a:solidFill>
+                <a:latin typeface="Calibri"/>
+              </a:rPr>
+              <a:t>B. cân bằng nội môi</a:t>
+            </a:r>
+          </a:p>
+          <a:p>
+            <a:pPr algn="l">
+              <a:spcAft>
+                <a:spcPts val="800"/>
+              </a:spcAft>
+            </a:pPr>
+            <a:r>
+              <a:rPr sz="2000" b="1">
+                <a:solidFill>
+                  <a:srgbClr val="1E293B"/>
+                </a:solidFill>
+                <a:latin typeface="Calibri"/>
+              </a:rPr>
+              <a:t>C. tiến hoá</a:t>
+            </a:r>
+          </a:p>
+          <a:p>
+            <a:pPr algn="l">
+              <a:spcAft>
+                <a:spcPts val="800"/>
+              </a:spcAft>
+            </a:pPr>
+            <a:r>
+              <a:rPr sz="2000" b="1">
+                <a:solidFill>
+                  <a:srgbClr val="1E293B"/>
+                </a:solidFill>
+                <a:latin typeface="Calibri"/>
+              </a:rPr>
+              <a:t>D. chuyển hoá năng lượng</a:t>
             </a:r>
           </a:p>
         </p:txBody>
@@ -12839,14 +12840,14 @@
         </p:nvSpPr>
         <p:spPr>
           <a:xfrm>
-            <a:off x="10701223" y="457200"/>
-            <a:ext cx="941832" cy="457200"/>
+            <a:off x="10463479" y="457200"/>
+            <a:ext cx="1179576" cy="457200"/>
           </a:xfrm>
           <a:prstGeom prst="roundRect">
             <a:avLst/>
           </a:prstGeom>
           <a:solidFill>
-            <a:srgbClr val="1E40AF"/>
+            <a:srgbClr val="991B1B"/>
           </a:solidFill>
           <a:ln>
             <a:noFill/>
@@ -12879,7 +12880,7 @@
                 </a:solidFill>
                 <a:latin typeface="Arial"/>
               </a:rPr>
-              <a:t>ĐỀ BÀI</a:t>
+              <a:t>LỜI GIẢI</a:t>
             </a:r>
           </a:p>
         </p:txBody>
@@ -12893,7 +12894,7 @@
         <p:spPr>
           <a:xfrm>
             <a:off x="731520" y="274320"/>
-            <a:ext cx="10030968" cy="868680"/>
+            <a:ext cx="9793224" cy="868680"/>
           </a:xfrm>
           <a:prstGeom prst="rect">
             <a:avLst/>
@@ -12913,7 +12914,7 @@
                 </a:solidFill>
                 <a:latin typeface="Arial"/>
               </a:rPr>
-              <a:t>ĐỀ MINH HỌA · PHẦN I · CÂU 16</a:t>
+              <a:t>ĐỀ MINH HỌA · PHẦN I · CÂU 15</a:t>
             </a:r>
           </a:p>
         </p:txBody>
@@ -13019,83 +13020,45 @@
           </a:bodyPr>
           <a:lstStyle/>
           <a:p>
-            <a:pPr algn="l">
+            <a:pPr algn="l" marL="365760" indent="-365760">
               <a:spcAft>
                 <a:spcPts val="800"/>
               </a:spcAft>
+              <a:buClr>
+                <a:srgbClr val="1E40AF"/>
+              </a:buClr>
+              <a:buFont typeface="Arial"/>
+              <a:buChar char="•"/>
             </a:pPr>
             <a:r>
-              <a:rPr sz="2000" b="1">
+              <a:rPr sz="2000">
                 <a:solidFill>
                   <a:srgbClr val="1E293B"/>
                 </a:solidFill>
                 <a:latin typeface="Calibri"/>
               </a:rPr>
-              <a:t>Hình 1.1 (SGK) cho thấy chuối được nhân giống với số lượng lớn. Biện pháp được sử dụng là</a:t>
-            </a:r>
-          </a:p>
-          <a:p>
-            <a:pPr algn="l">
+              <a:t>Đáp án B.</a:t>
+            </a:r>
+          </a:p>
+          <a:p>
+            <a:pPr algn="l" marL="365760" indent="-365760">
               <a:spcAft>
                 <a:spcPts val="800"/>
               </a:spcAft>
+              <a:buClr>
+                <a:srgbClr val="1E40AF"/>
+              </a:buClr>
+              <a:buFont typeface="Arial"/>
+              <a:buChar char="•"/>
             </a:pPr>
             <a:r>
-              <a:rPr sz="2000" b="1">
+              <a:rPr sz="2000">
                 <a:solidFill>
                   <a:srgbClr val="1E293B"/>
                 </a:solidFill>
                 <a:latin typeface="Calibri"/>
               </a:rPr>
-              <a:t>A. gây đột biến bằng phóng xạ</a:t>
-            </a:r>
-          </a:p>
-          <a:p>
-            <a:pPr algn="l">
-              <a:spcAft>
-                <a:spcPts val="800"/>
-              </a:spcAft>
-            </a:pPr>
-            <a:r>
-              <a:rPr sz="2000" b="1">
-                <a:solidFill>
-                  <a:srgbClr val="1E293B"/>
-                </a:solidFill>
-                <a:latin typeface="Calibri"/>
-              </a:rPr>
-              <a:t>B. lai hữu tính</a:t>
-            </a:r>
-          </a:p>
-          <a:p>
-            <a:pPr algn="l">
-              <a:spcAft>
-                <a:spcPts val="800"/>
-              </a:spcAft>
-            </a:pPr>
-            <a:r>
-              <a:rPr sz="2000" b="1">
-                <a:solidFill>
-                  <a:srgbClr val="1E293B"/>
-                </a:solidFill>
-                <a:latin typeface="Calibri"/>
-              </a:rPr>
-              <a:t>C. nuôi cấy mô</a:t>
-            </a:r>
-          </a:p>
-          <a:p>
-            <a:pPr algn="l">
-              <a:spcAft>
-                <a:spcPts val="800"/>
-              </a:spcAft>
-            </a:pPr>
-            <a:r>
-              <a:rPr sz="2000" b="1">
-                <a:solidFill>
-                  <a:srgbClr val="1E293B"/>
-                </a:solidFill>
-                <a:latin typeface="Calibri"/>
-              </a:rPr>
-              <a:t>D. chiết cành</a:t>
+              <a:t>SGK mục II.2.</a:t>
             </a:r>
           </a:p>
         </p:txBody>
@@ -13178,14 +13141,14 @@
         </p:nvSpPr>
         <p:spPr>
           <a:xfrm>
-            <a:off x="10463479" y="457200"/>
-            <a:ext cx="1179576" cy="457200"/>
+            <a:off x="10701223" y="457200"/>
+            <a:ext cx="941832" cy="457200"/>
           </a:xfrm>
           <a:prstGeom prst="roundRect">
             <a:avLst/>
           </a:prstGeom>
           <a:solidFill>
-            <a:srgbClr val="991B1B"/>
+            <a:srgbClr val="1E40AF"/>
           </a:solidFill>
           <a:ln>
             <a:noFill/>
@@ -13218,7 +13181,7 @@
                 </a:solidFill>
                 <a:latin typeface="Arial"/>
               </a:rPr>
-              <a:t>LỜI GIẢI</a:t>
+              <a:t>ĐỀ BÀI</a:t>
             </a:r>
           </a:p>
         </p:txBody>
@@ -13232,7 +13195,7 @@
         <p:spPr>
           <a:xfrm>
             <a:off x="731520" y="274320"/>
-            <a:ext cx="9793224" cy="868680"/>
+            <a:ext cx="10030968" cy="868680"/>
           </a:xfrm>
           <a:prstGeom prst="rect">
             <a:avLst/>
@@ -13358,45 +13321,83 @@
           </a:bodyPr>
           <a:lstStyle/>
           <a:p>
-            <a:pPr algn="l" marL="365760" indent="-365760">
+            <a:pPr algn="l">
               <a:spcAft>
                 <a:spcPts val="800"/>
               </a:spcAft>
-              <a:buClr>
-                <a:srgbClr val="1E40AF"/>
-              </a:buClr>
-              <a:buFont typeface="Arial"/>
-              <a:buChar char="•"/>
             </a:pPr>
             <a:r>
-              <a:rPr sz="2000">
+              <a:rPr sz="2000" b="1">
                 <a:solidFill>
                   <a:srgbClr val="1E293B"/>
                 </a:solidFill>
                 <a:latin typeface="Calibri"/>
               </a:rPr>
-              <a:t>Đáp án C.</a:t>
-            </a:r>
-          </a:p>
-          <a:p>
-            <a:pPr algn="l" marL="365760" indent="-365760">
+              <a:t>Mọi sinh vật có thành phần nguyên tố hoá học về cơ bản giống nhau chứng tỏ</a:t>
+            </a:r>
+          </a:p>
+          <a:p>
+            <a:pPr algn="l">
               <a:spcAft>
                 <a:spcPts val="800"/>
               </a:spcAft>
-              <a:buClr>
-                <a:srgbClr val="1E40AF"/>
-              </a:buClr>
-              <a:buFont typeface="Arial"/>
-              <a:buChar char="•"/>
             </a:pPr>
             <a:r>
-              <a:rPr sz="2000">
+              <a:rPr sz="2000" b="1">
                 <a:solidFill>
                   <a:srgbClr val="1E293B"/>
                 </a:solidFill>
                 <a:latin typeface="Calibri"/>
               </a:rPr>
-              <a:t>Chú thích Hình 1.1: chuối được nhân giống số lượng lớn bằng biện pháp nuôi cấy mô.</a:t>
+              <a:t>A. các sinh vật có chung nguồn gốc</a:t>
+            </a:r>
+          </a:p>
+          <a:p>
+            <a:pPr algn="l">
+              <a:spcAft>
+                <a:spcPts val="800"/>
+              </a:spcAft>
+            </a:pPr>
+            <a:r>
+              <a:rPr sz="2000" b="1">
+                <a:solidFill>
+                  <a:srgbClr val="1E293B"/>
+                </a:solidFill>
+                <a:latin typeface="Calibri"/>
+              </a:rPr>
+              <a:t>B. các sinh vật sống cùng một môi trường</a:t>
+            </a:r>
+          </a:p>
+          <a:p>
+            <a:pPr algn="l">
+              <a:spcAft>
+                <a:spcPts val="800"/>
+              </a:spcAft>
+            </a:pPr>
+            <a:r>
+              <a:rPr sz="2000" b="1">
+                <a:solidFill>
+                  <a:srgbClr val="1E293B"/>
+                </a:solidFill>
+                <a:latin typeface="Calibri"/>
+              </a:rPr>
+              <a:t>C. các sinh vật có cùng kích thước</a:t>
+            </a:r>
+          </a:p>
+          <a:p>
+            <a:pPr algn="l">
+              <a:spcAft>
+                <a:spcPts val="800"/>
+              </a:spcAft>
+            </a:pPr>
+            <a:r>
+              <a:rPr sz="2000" b="1">
+                <a:solidFill>
+                  <a:srgbClr val="1E293B"/>
+                </a:solidFill>
+                <a:latin typeface="Calibri"/>
+              </a:rPr>
+              <a:t>D. các sinh vật không tiến hoá</a:t>
             </a:r>
           </a:p>
         </p:txBody>
@@ -13739,14 +13740,14 @@
         </p:nvSpPr>
         <p:spPr>
           <a:xfrm>
-            <a:off x="10701223" y="457200"/>
-            <a:ext cx="941832" cy="457200"/>
+            <a:off x="10463479" y="457200"/>
+            <a:ext cx="1179576" cy="457200"/>
           </a:xfrm>
           <a:prstGeom prst="roundRect">
             <a:avLst/>
           </a:prstGeom>
           <a:solidFill>
-            <a:srgbClr val="1E40AF"/>
+            <a:srgbClr val="991B1B"/>
           </a:solidFill>
           <a:ln>
             <a:noFill/>
@@ -13779,7 +13780,7 @@
                 </a:solidFill>
                 <a:latin typeface="Arial"/>
               </a:rPr>
-              <a:t>ĐỀ BÀI</a:t>
+              <a:t>LỜI GIẢI</a:t>
             </a:r>
           </a:p>
         </p:txBody>
@@ -13793,7 +13794,7 @@
         <p:spPr>
           <a:xfrm>
             <a:off x="731520" y="274320"/>
-            <a:ext cx="10030968" cy="868680"/>
+            <a:ext cx="9793224" cy="868680"/>
           </a:xfrm>
           <a:prstGeom prst="rect">
             <a:avLst/>
@@ -13813,7 +13814,7 @@
                 </a:solidFill>
                 <a:latin typeface="Arial"/>
               </a:rPr>
-              <a:t>ĐỀ MINH HỌA · PHẦN I · CÂU 17</a:t>
+              <a:t>ĐỀ MINH HỌA · PHẦN I · CÂU 16</a:t>
             </a:r>
           </a:p>
         </p:txBody>
@@ -13919,83 +13920,45 @@
           </a:bodyPr>
           <a:lstStyle/>
           <a:p>
-            <a:pPr algn="l">
+            <a:pPr algn="l" marL="365760" indent="-365760">
               <a:spcAft>
                 <a:spcPts val="800"/>
               </a:spcAft>
+              <a:buClr>
+                <a:srgbClr val="1E40AF"/>
+              </a:buClr>
+              <a:buFont typeface="Arial"/>
+              <a:buChar char="•"/>
             </a:pPr>
             <a:r>
-              <a:rPr sz="2000" b="1">
+              <a:rPr sz="2000">
                 <a:solidFill>
                   <a:srgbClr val="1E293B"/>
                 </a:solidFill>
                 <a:latin typeface="Calibri"/>
               </a:rPr>
-              <a:t>Phương pháp sử dụng tri giác và các phương tiện hỗ trợ để thu thập thông tin về đối tượng là phương pháp</a:t>
-            </a:r>
-          </a:p>
-          <a:p>
-            <a:pPr algn="l">
+              <a:t>Đáp án A.</a:t>
+            </a:r>
+          </a:p>
+          <a:p>
+            <a:pPr algn="l" marL="365760" indent="-365760">
               <a:spcAft>
                 <a:spcPts val="800"/>
               </a:spcAft>
+              <a:buClr>
+                <a:srgbClr val="1E40AF"/>
+              </a:buClr>
+              <a:buFont typeface="Arial"/>
+              <a:buChar char="•"/>
             </a:pPr>
             <a:r>
-              <a:rPr sz="2000" b="1">
+              <a:rPr sz="2000">
                 <a:solidFill>
                   <a:srgbClr val="1E293B"/>
                 </a:solidFill>
                 <a:latin typeface="Calibri"/>
               </a:rPr>
-              <a:t>A. thực nghiệm khoa học</a:t>
-            </a:r>
-          </a:p>
-          <a:p>
-            <a:pPr algn="l">
-              <a:spcAft>
-                <a:spcPts val="800"/>
-              </a:spcAft>
-            </a:pPr>
-            <a:r>
-              <a:rPr sz="2000" b="1">
-                <a:solidFill>
-                  <a:srgbClr val="1E293B"/>
-                </a:solidFill>
-                <a:latin typeface="Calibri"/>
-              </a:rPr>
-              <a:t>B. quan sát</a:t>
-            </a:r>
-          </a:p>
-          <a:p>
-            <a:pPr algn="l">
-              <a:spcAft>
-                <a:spcPts val="800"/>
-              </a:spcAft>
-            </a:pPr>
-            <a:r>
-              <a:rPr sz="2000" b="1">
-                <a:solidFill>
-                  <a:srgbClr val="1E293B"/>
-                </a:solidFill>
-                <a:latin typeface="Calibri"/>
-              </a:rPr>
-              <a:t>C. làm việc trong phòng thí nghiệm</a:t>
-            </a:r>
-          </a:p>
-          <a:p>
-            <a:pPr algn="l">
-              <a:spcAft>
-                <a:spcPts val="800"/>
-              </a:spcAft>
-            </a:pPr>
-            <a:r>
-              <a:rPr sz="2000" b="1">
-                <a:solidFill>
-                  <a:srgbClr val="1E293B"/>
-                </a:solidFill>
-                <a:latin typeface="Calibri"/>
-              </a:rPr>
-              <a:t>D. tin sinh học</a:t>
+              <a:t>SGV tr.36.</a:t>
             </a:r>
           </a:p>
         </p:txBody>
@@ -14078,14 +14041,14 @@
         </p:nvSpPr>
         <p:spPr>
           <a:xfrm>
-            <a:off x="10463479" y="457200"/>
-            <a:ext cx="1179576" cy="457200"/>
+            <a:off x="10701223" y="457200"/>
+            <a:ext cx="941832" cy="457200"/>
           </a:xfrm>
           <a:prstGeom prst="roundRect">
             <a:avLst/>
           </a:prstGeom>
           <a:solidFill>
-            <a:srgbClr val="991B1B"/>
+            <a:srgbClr val="1E40AF"/>
           </a:solidFill>
           <a:ln>
             <a:noFill/>
@@ -14118,7 +14081,7 @@
                 </a:solidFill>
                 <a:latin typeface="Arial"/>
               </a:rPr>
-              <a:t>LỜI GIẢI</a:t>
+              <a:t>ĐỀ BÀI</a:t>
             </a:r>
           </a:p>
         </p:txBody>
@@ -14132,7 +14095,7 @@
         <p:spPr>
           <a:xfrm>
             <a:off x="731520" y="274320"/>
-            <a:ext cx="9793224" cy="868680"/>
+            <a:ext cx="10030968" cy="868680"/>
           </a:xfrm>
           <a:prstGeom prst="rect">
             <a:avLst/>
@@ -14258,45 +14221,83 @@
           </a:bodyPr>
           <a:lstStyle/>
           <a:p>
-            <a:pPr algn="l" marL="365760" indent="-365760">
+            <a:pPr algn="l">
               <a:spcAft>
                 <a:spcPts val="800"/>
               </a:spcAft>
-              <a:buClr>
-                <a:srgbClr val="1E40AF"/>
-              </a:buClr>
-              <a:buFont typeface="Arial"/>
-              <a:buChar char="•"/>
             </a:pPr>
             <a:r>
-              <a:rPr sz="2000">
+              <a:rPr sz="2000" b="1">
                 <a:solidFill>
                   <a:srgbClr val="1E293B"/>
                 </a:solidFill>
                 <a:latin typeface="Calibri"/>
               </a:rPr>
-              <a:t>Đáp án B.</a:t>
-            </a:r>
-          </a:p>
-          <a:p>
-            <a:pPr algn="l" marL="365760" indent="-365760">
+              <a:t>Một đoạn DNA có 1 000 nucleotide, trong đó số nucleotide loại A là 200. Số nucleotide loại G của đoạn DNA này là</a:t>
+            </a:r>
+          </a:p>
+          <a:p>
+            <a:pPr algn="l">
               <a:spcAft>
                 <a:spcPts val="800"/>
               </a:spcAft>
-              <a:buClr>
-                <a:srgbClr val="1E40AF"/>
-              </a:buClr>
-              <a:buFont typeface="Arial"/>
-              <a:buChar char="•"/>
             </a:pPr>
             <a:r>
-              <a:rPr sz="2000">
+              <a:rPr sz="2000" b="1">
                 <a:solidFill>
                   <a:srgbClr val="1E293B"/>
                 </a:solidFill>
                 <a:latin typeface="Calibri"/>
               </a:rPr>
-              <a:t>SGK mục I.1.</a:t>
+              <a:t>A. 300</a:t>
+            </a:r>
+          </a:p>
+          <a:p>
+            <a:pPr algn="l">
+              <a:spcAft>
+                <a:spcPts val="800"/>
+              </a:spcAft>
+            </a:pPr>
+            <a:r>
+              <a:rPr sz="2000" b="1">
+                <a:solidFill>
+                  <a:srgbClr val="1E293B"/>
+                </a:solidFill>
+                <a:latin typeface="Calibri"/>
+              </a:rPr>
+              <a:t>B. 200</a:t>
+            </a:r>
+          </a:p>
+          <a:p>
+            <a:pPr algn="l">
+              <a:spcAft>
+                <a:spcPts val="800"/>
+              </a:spcAft>
+            </a:pPr>
+            <a:r>
+              <a:rPr sz="2000" b="1">
+                <a:solidFill>
+                  <a:srgbClr val="1E293B"/>
+                </a:solidFill>
+                <a:latin typeface="Calibri"/>
+              </a:rPr>
+              <a:t>C. 600</a:t>
+            </a:r>
+          </a:p>
+          <a:p>
+            <a:pPr algn="l">
+              <a:spcAft>
+                <a:spcPts val="800"/>
+              </a:spcAft>
+            </a:pPr>
+            <a:r>
+              <a:rPr sz="2000" b="1">
+                <a:solidFill>
+                  <a:srgbClr val="1E293B"/>
+                </a:solidFill>
+                <a:latin typeface="Calibri"/>
+              </a:rPr>
+              <a:t>D. 800</a:t>
             </a:r>
           </a:p>
         </p:txBody>
@@ -14379,14 +14380,14 @@
         </p:nvSpPr>
         <p:spPr>
           <a:xfrm>
-            <a:off x="10701223" y="457200"/>
-            <a:ext cx="941832" cy="457200"/>
+            <a:off x="10463479" y="457200"/>
+            <a:ext cx="1179576" cy="457200"/>
           </a:xfrm>
           <a:prstGeom prst="roundRect">
             <a:avLst/>
           </a:prstGeom>
           <a:solidFill>
-            <a:srgbClr val="1E40AF"/>
+            <a:srgbClr val="991B1B"/>
           </a:solidFill>
           <a:ln>
             <a:noFill/>
@@ -14419,7 +14420,7 @@
                 </a:solidFill>
                 <a:latin typeface="Arial"/>
               </a:rPr>
-              <a:t>ĐỀ BÀI</a:t>
+              <a:t>LỜI GIẢI</a:t>
             </a:r>
           </a:p>
         </p:txBody>
@@ -14433,7 +14434,7 @@
         <p:spPr>
           <a:xfrm>
             <a:off x="731520" y="274320"/>
-            <a:ext cx="10030968" cy="868680"/>
+            <a:ext cx="9793224" cy="868680"/>
           </a:xfrm>
           <a:prstGeom prst="rect">
             <a:avLst/>
@@ -14453,7 +14454,7 @@
                 </a:solidFill>
                 <a:latin typeface="Arial"/>
               </a:rPr>
-              <a:t>ĐỀ MINH HỌA · PHẦN I · CÂU 18</a:t>
+              <a:t>ĐỀ MINH HỌA · PHẦN I · CÂU 17</a:t>
             </a:r>
           </a:p>
         </p:txBody>
@@ -14559,83 +14560,45 @@
           </a:bodyPr>
           <a:lstStyle/>
           <a:p>
-            <a:pPr algn="l">
+            <a:pPr algn="l" marL="365760" indent="-365760">
               <a:spcAft>
                 <a:spcPts val="800"/>
               </a:spcAft>
+              <a:buClr>
+                <a:srgbClr val="1E40AF"/>
+              </a:buClr>
+              <a:buFont typeface="Arial"/>
+              <a:buChar char="•"/>
             </a:pPr>
             <a:r>
-              <a:rPr sz="2000" b="1">
+              <a:rPr sz="2000">
                 <a:solidFill>
                   <a:srgbClr val="1E293B"/>
                 </a:solidFill>
                 <a:latin typeface="Calibri"/>
               </a:rPr>
-              <a:t>Câu “Nếu Mặt Trời không còn tồn tại thì Trái Đất sẽ bị huỷ diệt” được giải thích đúng nhất là:</a:t>
-            </a:r>
-          </a:p>
-          <a:p>
-            <a:pPr algn="l">
+              <a:t>Đáp án A.</a:t>
+            </a:r>
+          </a:p>
+          <a:p>
+            <a:pPr algn="l" marL="365760" indent="-365760">
               <a:spcAft>
                 <a:spcPts val="800"/>
               </a:spcAft>
+              <a:buClr>
+                <a:srgbClr val="1E40AF"/>
+              </a:buClr>
+              <a:buFont typeface="Arial"/>
+              <a:buChar char="•"/>
             </a:pPr>
             <a:r>
-              <a:rPr sz="2000" b="1">
+              <a:rPr sz="2000">
                 <a:solidFill>
                   <a:srgbClr val="1E293B"/>
                 </a:solidFill>
                 <a:latin typeface="Calibri"/>
               </a:rPr>
-              <a:t>A. Nguồn năng lượng cung cấp cho thế giới sống chủ yếu đến từ Mặt Trời</a:t>
-            </a:r>
-          </a:p>
-          <a:p>
-            <a:pPr algn="l">
-              <a:spcAft>
-                <a:spcPts val="800"/>
-              </a:spcAft>
-            </a:pPr>
-            <a:r>
-              <a:rPr sz="2000" b="1">
-                <a:solidFill>
-                  <a:srgbClr val="1E293B"/>
-                </a:solidFill>
-                <a:latin typeface="Calibri"/>
-              </a:rPr>
-              <a:t>B. Mặt Trời cung cấp nước cho Trái Đất</a:t>
-            </a:r>
-          </a:p>
-          <a:p>
-            <a:pPr algn="l">
-              <a:spcAft>
-                <a:spcPts val="800"/>
-              </a:spcAft>
-            </a:pPr>
-            <a:r>
-              <a:rPr sz="2000" b="1">
-                <a:solidFill>
-                  <a:srgbClr val="1E293B"/>
-                </a:solidFill>
-                <a:latin typeface="Calibri"/>
-              </a:rPr>
-              <a:t>C. Mặt Trời tạo ra các nguyên tố hoá học hằng ngày</a:t>
-            </a:r>
-          </a:p>
-          <a:p>
-            <a:pPr algn="l">
-              <a:spcAft>
-                <a:spcPts val="800"/>
-              </a:spcAft>
-            </a:pPr>
-            <a:r>
-              <a:rPr sz="2000" b="1">
-                <a:solidFill>
-                  <a:srgbClr val="1E293B"/>
-                </a:solidFill>
-                <a:latin typeface="Calibri"/>
-              </a:rPr>
-              <a:t>D. Mặt Trời giữ Trái Đất không bị va chạm thiên thạch</a:t>
+              <a:t>Theo nguyên tắc bổ sung A = T = 200 nên G = C = (1 000 − 2·200) : 2 = 300.</a:t>
             </a:r>
           </a:p>
         </p:txBody>
@@ -14718,14 +14681,14 @@
         </p:nvSpPr>
         <p:spPr>
           <a:xfrm>
-            <a:off x="10463479" y="457200"/>
-            <a:ext cx="1179576" cy="457200"/>
+            <a:off x="10701223" y="457200"/>
+            <a:ext cx="941832" cy="457200"/>
           </a:xfrm>
           <a:prstGeom prst="roundRect">
             <a:avLst/>
           </a:prstGeom>
           <a:solidFill>
-            <a:srgbClr val="991B1B"/>
+            <a:srgbClr val="1E40AF"/>
           </a:solidFill>
           <a:ln>
             <a:noFill/>
@@ -14758,7 +14721,7 @@
                 </a:solidFill>
                 <a:latin typeface="Arial"/>
               </a:rPr>
-              <a:t>LỜI GIẢI</a:t>
+              <a:t>ĐỀ BÀI</a:t>
             </a:r>
           </a:p>
         </p:txBody>
@@ -14772,7 +14735,7 @@
         <p:spPr>
           <a:xfrm>
             <a:off x="731520" y="274320"/>
-            <a:ext cx="9793224" cy="868680"/>
+            <a:ext cx="10030968" cy="868680"/>
           </a:xfrm>
           <a:prstGeom prst="rect">
             <a:avLst/>
@@ -14898,45 +14861,83 @@
           </a:bodyPr>
           <a:lstStyle/>
           <a:p>
-            <a:pPr algn="l" marL="365760" indent="-365760">
+            <a:pPr algn="l">
               <a:spcAft>
                 <a:spcPts val="800"/>
               </a:spcAft>
-              <a:buClr>
-                <a:srgbClr val="1E40AF"/>
-              </a:buClr>
-              <a:buFont typeface="Arial"/>
-              <a:buChar char="•"/>
             </a:pPr>
             <a:r>
-              <a:rPr sz="2000">
+              <a:rPr sz="2000" b="1">
                 <a:solidFill>
                   <a:srgbClr val="1E293B"/>
                 </a:solidFill>
                 <a:latin typeface="Calibri"/>
               </a:rPr>
-              <a:t>Đáp án A.</a:t>
-            </a:r>
-          </a:p>
-          <a:p>
-            <a:pPr algn="l" marL="365760" indent="-365760">
+              <a:t>Việc làm nào sau đây đảm bảo an toàn khi đun ống nghiệm trên đèn cồn?</a:t>
+            </a:r>
+          </a:p>
+          <a:p>
+            <a:pPr algn="l">
               <a:spcAft>
                 <a:spcPts val="800"/>
               </a:spcAft>
-              <a:buClr>
-                <a:srgbClr val="1E40AF"/>
-              </a:buClr>
-              <a:buFont typeface="Arial"/>
-              <a:buChar char="•"/>
             </a:pPr>
             <a:r>
-              <a:rPr sz="2000">
+              <a:rPr sz="2000" b="1">
                 <a:solidFill>
                   <a:srgbClr val="1E293B"/>
                 </a:solidFill>
                 <a:latin typeface="Calibri"/>
               </a:rPr>
-              <a:t>Luyện tập và vận dụng câu 3.</a:t>
+              <a:t>A. Thổi để tắt đèn cồn</a:t>
+            </a:r>
+          </a:p>
+          <a:p>
+            <a:pPr algn="l">
+              <a:spcAft>
+                <a:spcPts val="800"/>
+              </a:spcAft>
+            </a:pPr>
+            <a:r>
+              <a:rPr sz="2000" b="1">
+                <a:solidFill>
+                  <a:srgbClr val="1E293B"/>
+                </a:solidFill>
+                <a:latin typeface="Calibri"/>
+              </a:rPr>
+              <a:t>B. Cầm trực tiếp ống nghiệm bằng tay</a:t>
+            </a:r>
+          </a:p>
+          <a:p>
+            <a:pPr algn="l">
+              <a:spcAft>
+                <a:spcPts val="800"/>
+              </a:spcAft>
+            </a:pPr>
+            <a:r>
+              <a:rPr sz="2000" b="1">
+                <a:solidFill>
+                  <a:srgbClr val="1E293B"/>
+                </a:solidFill>
+                <a:latin typeface="Calibri"/>
+              </a:rPr>
+              <a:t>C. Hướng miệng ống về phía bạn bên cạnh</a:t>
+            </a:r>
+          </a:p>
+          <a:p>
+            <a:pPr algn="l">
+              <a:spcAft>
+                <a:spcPts val="800"/>
+              </a:spcAft>
+            </a:pPr>
+            <a:r>
+              <a:rPr sz="2000" b="1">
+                <a:solidFill>
+                  <a:srgbClr val="1E293B"/>
+                </a:solidFill>
+                <a:latin typeface="Calibri"/>
+              </a:rPr>
+              <a:t>D. Dùng kẹp ống nghiệm, hướng miệng ống ra xa người</a:t>
             </a:r>
           </a:p>
         </p:txBody>
@@ -15019,14 +15020,14 @@
         </p:nvSpPr>
         <p:spPr>
           <a:xfrm>
-            <a:off x="10701223" y="457200"/>
-            <a:ext cx="941832" cy="457200"/>
+            <a:off x="10463479" y="457200"/>
+            <a:ext cx="1179576" cy="457200"/>
           </a:xfrm>
           <a:prstGeom prst="roundRect">
             <a:avLst/>
           </a:prstGeom>
           <a:solidFill>
-            <a:srgbClr val="1E40AF"/>
+            <a:srgbClr val="991B1B"/>
           </a:solidFill>
           <a:ln>
             <a:noFill/>
@@ -15059,7 +15060,7 @@
                 </a:solidFill>
                 <a:latin typeface="Arial"/>
               </a:rPr>
-              <a:t>ĐỀ BÀI</a:t>
+              <a:t>LỜI GIẢI</a:t>
             </a:r>
           </a:p>
         </p:txBody>
@@ -15073,7 +15074,7 @@
         <p:spPr>
           <a:xfrm>
             <a:off x="731520" y="274320"/>
-            <a:ext cx="10030968" cy="868680"/>
+            <a:ext cx="9793224" cy="868680"/>
           </a:xfrm>
           <a:prstGeom prst="rect">
             <a:avLst/>
@@ -15093,7 +15094,7 @@
                 </a:solidFill>
                 <a:latin typeface="Arial"/>
               </a:rPr>
-              <a:t>ĐỀ MINH HỌA · PHẦN II · CÂU 1</a:t>
+              <a:t>ĐỀ MINH HỌA · PHẦN I · CÂU 18</a:t>
             </a:r>
           </a:p>
         </p:txBody>
@@ -15199,83 +15200,45 @@
           </a:bodyPr>
           <a:lstStyle/>
           <a:p>
-            <a:pPr algn="l">
+            <a:pPr algn="l" marL="365760" indent="-365760">
               <a:spcAft>
                 <a:spcPts val="800"/>
               </a:spcAft>
+              <a:buClr>
+                <a:srgbClr val="1E40AF"/>
+              </a:buClr>
+              <a:buFont typeface="Arial"/>
+              <a:buChar char="•"/>
             </a:pPr>
             <a:r>
-              <a:rPr sz="2000" b="1">
+              <a:rPr sz="2000">
                 <a:solidFill>
                   <a:srgbClr val="1E293B"/>
                 </a:solidFill>
                 <a:latin typeface="Calibri"/>
               </a:rPr>
-              <a:t>Đọc thông tin (SGK tr.6): Giải trình tự hệ gene của SARS – CoV – 2 giúp các nhà khoa học tìm ra trình tự nucleotide của gene quy định gai protein. Từ đó tổng hợp mRNA nhân tạo, bao bọc trong màng phospholipid rồi tiêm vào người để tế bào người tạo ra protein gai của virus.</a:t>
-            </a:r>
-          </a:p>
-          <a:p>
-            <a:pPr algn="l">
+              <a:t>Đáp án D.</a:t>
+            </a:r>
+          </a:p>
+          <a:p>
+            <a:pPr algn="l" marL="365760" indent="-365760">
               <a:spcAft>
                 <a:spcPts val="800"/>
               </a:spcAft>
+              <a:buClr>
+                <a:srgbClr val="1E40AF"/>
+              </a:buClr>
+              <a:buFont typeface="Arial"/>
+              <a:buChar char="•"/>
             </a:pPr>
             <a:r>
-              <a:rPr sz="2000" b="1">
+              <a:rPr sz="2000">
                 <a:solidFill>
                   <a:srgbClr val="1E293B"/>
                 </a:solidFill>
                 <a:latin typeface="Calibri"/>
               </a:rPr>
-              <a:t>a) Giải trình tự hệ gene virus là bước giúp xác định gene quy định gai protein.</a:t>
-            </a:r>
-          </a:p>
-          <a:p>
-            <a:pPr algn="l">
-              <a:spcAft>
-                <a:spcPts val="800"/>
-              </a:spcAft>
-            </a:pPr>
-            <a:r>
-              <a:rPr sz="2000" b="1">
-                <a:solidFill>
-                  <a:srgbClr val="1E293B"/>
-                </a:solidFill>
-                <a:latin typeface="Calibri"/>
-              </a:rPr>
-              <a:t>b) Vaccine mRNA đưa virus SARS – CoV – 2 còn sống vào cơ thể người.</a:t>
-            </a:r>
-          </a:p>
-          <a:p>
-            <a:pPr algn="l">
-              <a:spcAft>
-                <a:spcPts val="800"/>
-              </a:spcAft>
-            </a:pPr>
-            <a:r>
-              <a:rPr sz="2000" b="1">
-                <a:solidFill>
-                  <a:srgbClr val="1E293B"/>
-                </a:solidFill>
-                <a:latin typeface="Calibri"/>
-              </a:rPr>
-              <a:t>c) Sau khi tiêm, hệ thống miễn dịch được kích hoạt tạo ra kháng thể chống lại virus.</a:t>
-            </a:r>
-          </a:p>
-          <a:p>
-            <a:pPr algn="l">
-              <a:spcAft>
-                <a:spcPts val="800"/>
-              </a:spcAft>
-            </a:pPr>
-            <a:r>
-              <a:rPr sz="2000" b="1">
-                <a:solidFill>
-                  <a:srgbClr val="1E293B"/>
-                </a:solidFill>
-                <a:latin typeface="Calibri"/>
-              </a:rPr>
-              <a:t>d) Đây là ví dụ cho thấy vai trò của sinh học trong y – dược và triển vọng của sinh học trong tương lai.</a:t>
+              <a:t>Dùng kẹp, hướng miệng ống nghiệm ra xa mọi người, tắt đèn cồn bằng nắp.</a:t>
             </a:r>
           </a:p>
         </p:txBody>
@@ -15358,14 +15321,14 @@
         </p:nvSpPr>
         <p:spPr>
           <a:xfrm>
-            <a:off x="10463479" y="457200"/>
-            <a:ext cx="1179576" cy="457200"/>
+            <a:off x="10701223" y="457200"/>
+            <a:ext cx="941832" cy="457200"/>
           </a:xfrm>
           <a:prstGeom prst="roundRect">
             <a:avLst/>
           </a:prstGeom>
           <a:solidFill>
-            <a:srgbClr val="991B1B"/>
+            <a:srgbClr val="1E40AF"/>
           </a:solidFill>
           <a:ln>
             <a:noFill/>
@@ -15398,7 +15361,7 @@
                 </a:solidFill>
                 <a:latin typeface="Arial"/>
               </a:rPr>
-              <a:t>LỜI GIẢI</a:t>
+              <a:t>ĐỀ BÀI</a:t>
             </a:r>
           </a:p>
         </p:txBody>
@@ -15412,7 +15375,7 @@
         <p:spPr>
           <a:xfrm>
             <a:off x="731520" y="274320"/>
-            <a:ext cx="9793224" cy="868680"/>
+            <a:ext cx="10030968" cy="868680"/>
           </a:xfrm>
           <a:prstGeom prst="rect">
             <a:avLst/>
@@ -15538,87 +15501,83 @@
           </a:bodyPr>
           <a:lstStyle/>
           <a:p>
-            <a:pPr algn="l" marL="365760" indent="-365760">
+            <a:pPr algn="l">
               <a:spcAft>
                 <a:spcPts val="800"/>
               </a:spcAft>
-              <a:buClr>
-                <a:srgbClr val="1E40AF"/>
-              </a:buClr>
-              <a:buFont typeface="Arial"/>
-              <a:buChar char="•"/>
             </a:pPr>
             <a:r>
-              <a:rPr sz="2000">
+              <a:rPr sz="2000" b="1">
                 <a:solidFill>
                   <a:srgbClr val="1E293B"/>
                 </a:solidFill>
                 <a:latin typeface="Calibri"/>
               </a:rPr>
-              <a:t>a) Đúng: Đúng như thông tin trong SGK.</a:t>
-            </a:r>
-          </a:p>
-          <a:p>
-            <a:pPr algn="l" marL="365760" indent="-365760">
+              <a:t>Đọc thông tin (SGK tr.6): Giải trình tự hệ gene của SARS – CoV – 2 giúp các nhà khoa học tìm ra trình tự nucleotide của gene quy định gai protein. Từ đó tổng hợp mRNA nhân tạo, bao bọc trong màng phospholipid rồi tiêm vào người để tế bào người tạo ra protein gai của virus.</a:t>
+            </a:r>
+          </a:p>
+          <a:p>
+            <a:pPr algn="l">
               <a:spcAft>
                 <a:spcPts val="800"/>
               </a:spcAft>
-              <a:buClr>
-                <a:srgbClr val="1E40AF"/>
-              </a:buClr>
-              <a:buFont typeface="Arial"/>
-              <a:buChar char="•"/>
             </a:pPr>
             <a:r>
-              <a:rPr sz="2000">
+              <a:rPr sz="2000" b="1">
                 <a:solidFill>
                   <a:srgbClr val="1E293B"/>
                 </a:solidFill>
                 <a:latin typeface="Calibri"/>
               </a:rPr>
-              <a:t>b) Sai: Vaccine chỉ chứa mRNA nhân tạo quy định protein gai, không chứa virus sống.</a:t>
-            </a:r>
-          </a:p>
-          <a:p>
-            <a:pPr algn="l" marL="365760" indent="-365760">
+              <a:t>a) Giải trình tự hệ gene virus là bước giúp xác định gene quy định gai protein.</a:t>
+            </a:r>
+          </a:p>
+          <a:p>
+            <a:pPr algn="l">
               <a:spcAft>
                 <a:spcPts val="800"/>
               </a:spcAft>
-              <a:buClr>
-                <a:srgbClr val="1E40AF"/>
-              </a:buClr>
-              <a:buFont typeface="Arial"/>
-              <a:buChar char="•"/>
             </a:pPr>
             <a:r>
-              <a:rPr sz="2000">
+              <a:rPr sz="2000" b="1">
                 <a:solidFill>
                   <a:srgbClr val="1E293B"/>
                 </a:solidFill>
                 <a:latin typeface="Calibri"/>
               </a:rPr>
-              <a:t>c) Đúng: Tế bào người tạo protein gai; hệ miễn dịch nhận diện và tạo kháng thể.</a:t>
-            </a:r>
-          </a:p>
-          <a:p>
-            <a:pPr algn="l" marL="365760" indent="-365760">
+              <a:t>b) Vaccine mRNA đưa virus SARS – CoV – 2 còn sống vào cơ thể người.</a:t>
+            </a:r>
+          </a:p>
+          <a:p>
+            <a:pPr algn="l">
               <a:spcAft>
                 <a:spcPts val="800"/>
               </a:spcAft>
-              <a:buClr>
-                <a:srgbClr val="1E40AF"/>
-              </a:buClr>
-              <a:buFont typeface="Arial"/>
-              <a:buChar char="•"/>
             </a:pPr>
             <a:r>
-              <a:rPr sz="2000">
+              <a:rPr sz="2000" b="1">
                 <a:solidFill>
                   <a:srgbClr val="1E293B"/>
                 </a:solidFill>
                 <a:latin typeface="Calibri"/>
               </a:rPr>
-              <a:t>d) Đúng: SGK dùng ví dụ vaccine mRNA ở mục “Sinh học trong tương lai” – loại vaccine mới sản xuất thành công trong thời gian ngắn.</a:t>
+              <a:t>c) Sau khi tiêm, hệ thống miễn dịch được kích hoạt tạo ra kháng thể chống lại virus.</a:t>
+            </a:r>
+          </a:p>
+          <a:p>
+            <a:pPr algn="l">
+              <a:spcAft>
+                <a:spcPts val="800"/>
+              </a:spcAft>
+            </a:pPr>
+            <a:r>
+              <a:rPr sz="2000" b="1">
+                <a:solidFill>
+                  <a:srgbClr val="1E293B"/>
+                </a:solidFill>
+                <a:latin typeface="Calibri"/>
+              </a:rPr>
+              <a:t>d) Đây là ví dụ cho thấy vai trò của sinh học trong y – dược và triển vọng của sinh học trong tương lai.</a:t>
             </a:r>
           </a:p>
         </p:txBody>
@@ -15701,14 +15660,14 @@
         </p:nvSpPr>
         <p:spPr>
           <a:xfrm>
-            <a:off x="10701223" y="457200"/>
-            <a:ext cx="941832" cy="457200"/>
+            <a:off x="10463479" y="457200"/>
+            <a:ext cx="1179576" cy="457200"/>
           </a:xfrm>
           <a:prstGeom prst="roundRect">
             <a:avLst/>
           </a:prstGeom>
           <a:solidFill>
-            <a:srgbClr val="1E40AF"/>
+            <a:srgbClr val="991B1B"/>
           </a:solidFill>
           <a:ln>
             <a:noFill/>
@@ -15741,7 +15700,7 @@
                 </a:solidFill>
                 <a:latin typeface="Arial"/>
               </a:rPr>
-              <a:t>ĐỀ BÀI</a:t>
+              <a:t>LỜI GIẢI</a:t>
             </a:r>
           </a:p>
         </p:txBody>
@@ -15755,7 +15714,7 @@
         <p:spPr>
           <a:xfrm>
             <a:off x="731520" y="274320"/>
-            <a:ext cx="10030968" cy="868680"/>
+            <a:ext cx="9793224" cy="868680"/>
           </a:xfrm>
           <a:prstGeom prst="rect">
             <a:avLst/>
@@ -15775,7 +15734,7 @@
                 </a:solidFill>
                 <a:latin typeface="Arial"/>
               </a:rPr>
-              <a:t>ĐỀ MINH HỌA · PHẦN II · CÂU 2</a:t>
+              <a:t>ĐỀ MINH HỌA · PHẦN II · CÂU 1</a:t>
             </a:r>
           </a:p>
         </p:txBody>
@@ -15881,83 +15840,87 @@
           </a:bodyPr>
           <a:lstStyle/>
           <a:p>
-            <a:pPr algn="l">
+            <a:pPr algn="l" marL="365760" indent="-365760">
               <a:spcAft>
                 <a:spcPts val="800"/>
               </a:spcAft>
+              <a:buClr>
+                <a:srgbClr val="1E40AF"/>
+              </a:buClr>
+              <a:buFont typeface="Arial"/>
+              <a:buChar char="•"/>
             </a:pPr>
             <a:r>
-              <a:rPr sz="2000" b="1">
+              <a:rPr sz="2000">
                 <a:solidFill>
                   <a:srgbClr val="1E293B"/>
                 </a:solidFill>
                 <a:latin typeface="Calibri"/>
               </a:rPr>
-              <a:t>Một nhà khoa học dùng móc nhỏ loại bỏ nhân tế bào của trùng giày; tế bào mất nhân bị chết. Ở thí nghiệm đối chứng, nhân được lấy ra rồi đặt lại vị trí cũ.</a:t>
-            </a:r>
-          </a:p>
-          <a:p>
-            <a:pPr algn="l">
+              <a:t>a) Đúng: Đúng như thông tin trong SGK.</a:t>
+            </a:r>
+          </a:p>
+          <a:p>
+            <a:pPr algn="l" marL="365760" indent="-365760">
               <a:spcAft>
                 <a:spcPts val="800"/>
               </a:spcAft>
+              <a:buClr>
+                <a:srgbClr val="1E40AF"/>
+              </a:buClr>
+              <a:buFont typeface="Arial"/>
+              <a:buChar char="•"/>
             </a:pPr>
             <a:r>
-              <a:rPr sz="2000" b="1">
+              <a:rPr sz="2000">
                 <a:solidFill>
                   <a:srgbClr val="1E293B"/>
                 </a:solidFill>
                 <a:latin typeface="Calibri"/>
               </a:rPr>
-              <a:t>a) Mục đích là kiểm chứng giả thuyết nhân có vai trò quyết định sự sống của tế bào.</a:t>
-            </a:r>
-          </a:p>
-          <a:p>
-            <a:pPr algn="l">
+              <a:t>b) Sai: Vaccine chỉ chứa mRNA nhân tạo quy định protein gai, không chứa virus sống.</a:t>
+            </a:r>
+          </a:p>
+          <a:p>
+            <a:pPr algn="l" marL="365760" indent="-365760">
               <a:spcAft>
                 <a:spcPts val="800"/>
               </a:spcAft>
+              <a:buClr>
+                <a:srgbClr val="1E40AF"/>
+              </a:buClr>
+              <a:buFont typeface="Arial"/>
+              <a:buChar char="•"/>
             </a:pPr>
             <a:r>
-              <a:rPr sz="2000" b="1">
+              <a:rPr sz="2000">
                 <a:solidFill>
                   <a:srgbClr val="1E293B"/>
                 </a:solidFill>
                 <a:latin typeface="Calibri"/>
               </a:rPr>
-              <a:t>b) Nếu tế bào ở lô đối chứng cũng chết thì chưa kết luận được tế bào chết do mất nhân.</a:t>
-            </a:r>
-          </a:p>
-          <a:p>
-            <a:pPr algn="l">
+              <a:t>c) Đúng: Tế bào người tạo protein gai; hệ miễn dịch nhận diện và tạo kháng thể.</a:t>
+            </a:r>
+          </a:p>
+          <a:p>
+            <a:pPr algn="l" marL="365760" indent="-365760">
               <a:spcAft>
                 <a:spcPts val="800"/>
               </a:spcAft>
+              <a:buClr>
+                <a:srgbClr val="1E40AF"/>
+              </a:buClr>
+              <a:buFont typeface="Arial"/>
+              <a:buChar char="•"/>
             </a:pPr>
             <a:r>
-              <a:rPr sz="2000" b="1">
+              <a:rPr sz="2000">
                 <a:solidFill>
                   <a:srgbClr val="1E293B"/>
                 </a:solidFill>
                 <a:latin typeface="Calibri"/>
               </a:rPr>
-              <a:t>c) Lô đối chứng là không cần thiết vì đã thấy tế bào mất nhân bị chết.</a:t>
-            </a:r>
-          </a:p>
-          <a:p>
-            <a:pPr algn="l">
-              <a:spcAft>
-                <a:spcPts val="800"/>
-              </a:spcAft>
-            </a:pPr>
-            <a:r>
-              <a:rPr sz="2000" b="1">
-                <a:solidFill>
-                  <a:srgbClr val="1E293B"/>
-                </a:solidFill>
-                <a:latin typeface="Calibri"/>
-              </a:rPr>
-              <a:t>d) Nếu tế bào ở lô đối chứng sống, lô thực nghiệm chết thì thí nghiệm ủng hộ giả thuyết nhân có vai trò sống còn.</a:t>
+              <a:t>d) Đúng: SGK dùng ví dụ vaccine mRNA ở mục “Sinh học trong tương lai” – loại vaccine mới sản xuất thành công trong thời gian ngắn.</a:t>
             </a:r>
           </a:p>
         </p:txBody>
@@ -16040,14 +16003,14 @@
         </p:nvSpPr>
         <p:spPr>
           <a:xfrm>
-            <a:off x="10463479" y="457200"/>
-            <a:ext cx="1179576" cy="457200"/>
+            <a:off x="10701223" y="457200"/>
+            <a:ext cx="941832" cy="457200"/>
           </a:xfrm>
           <a:prstGeom prst="roundRect">
             <a:avLst/>
           </a:prstGeom>
           <a:solidFill>
-            <a:srgbClr val="991B1B"/>
+            <a:srgbClr val="1E40AF"/>
           </a:solidFill>
           <a:ln>
             <a:noFill/>
@@ -16080,7 +16043,7 @@
                 </a:solidFill>
                 <a:latin typeface="Arial"/>
               </a:rPr>
-              <a:t>LỜI GIẢI</a:t>
+              <a:t>ĐỀ BÀI</a:t>
             </a:r>
           </a:p>
         </p:txBody>
@@ -16094,7 +16057,7 @@
         <p:spPr>
           <a:xfrm>
             <a:off x="731520" y="274320"/>
-            <a:ext cx="9793224" cy="868680"/>
+            <a:ext cx="10030968" cy="868680"/>
           </a:xfrm>
           <a:prstGeom prst="rect">
             <a:avLst/>
@@ -16220,87 +16183,83 @@
           </a:bodyPr>
           <a:lstStyle/>
           <a:p>
-            <a:pPr algn="l" marL="365760" indent="-365760">
+            <a:pPr algn="l">
               <a:spcAft>
                 <a:spcPts val="800"/>
               </a:spcAft>
-              <a:buClr>
-                <a:srgbClr val="1E40AF"/>
-              </a:buClr>
-              <a:buFont typeface="Arial"/>
-              <a:buChar char="•"/>
             </a:pPr>
             <a:r>
-              <a:rPr sz="2000">
+              <a:rPr sz="2000" b="1">
                 <a:solidFill>
                   <a:srgbClr val="1E293B"/>
                 </a:solidFill>
                 <a:latin typeface="Calibri"/>
               </a:rPr>
-              <a:t>a) Đúng: Đúng như SGK.</a:t>
-            </a:r>
-          </a:p>
-          <a:p>
-            <a:pPr algn="l" marL="365760" indent="-365760">
+              <a:t>Một nhà khoa học dùng móc nhỏ loại bỏ nhân tế bào của trùng giày; tế bào mất nhân bị chết. Ở thí nghiệm đối chứng, nhân được lấy ra rồi đặt lại vị trí cũ.</a:t>
+            </a:r>
+          </a:p>
+          <a:p>
+            <a:pPr algn="l">
               <a:spcAft>
                 <a:spcPts val="800"/>
               </a:spcAft>
-              <a:buClr>
-                <a:srgbClr val="1E40AF"/>
-              </a:buClr>
-              <a:buFont typeface="Arial"/>
-              <a:buChar char="•"/>
             </a:pPr>
             <a:r>
-              <a:rPr sz="2000">
+              <a:rPr sz="2000" b="1">
                 <a:solidFill>
                   <a:srgbClr val="1E293B"/>
                 </a:solidFill>
                 <a:latin typeface="Calibri"/>
               </a:rPr>
-              <a:t>b) Đúng: Có thể do tác động cơ học khi lấy nhân (SGV).</a:t>
-            </a:r>
-          </a:p>
-          <a:p>
-            <a:pPr algn="l" marL="365760" indent="-365760">
+              <a:t>a) Mục đích là kiểm chứng giả thuyết nhân có vai trò quyết định sự sống của tế bào.</a:t>
+            </a:r>
+          </a:p>
+          <a:p>
+            <a:pPr algn="l">
               <a:spcAft>
                 <a:spcPts val="800"/>
               </a:spcAft>
-              <a:buClr>
-                <a:srgbClr val="1E40AF"/>
-              </a:buClr>
-              <a:buFont typeface="Arial"/>
-              <a:buChar char="•"/>
             </a:pPr>
             <a:r>
-              <a:rPr sz="2000">
+              <a:rPr sz="2000" b="1">
                 <a:solidFill>
                   <a:srgbClr val="1E293B"/>
                 </a:solidFill>
                 <a:latin typeface="Calibri"/>
               </a:rPr>
-              <a:t>c) Sai: Đối chứng loại trừ ảnh hưởng của thao tác lấy nhân.</a:t>
-            </a:r>
-          </a:p>
-          <a:p>
-            <a:pPr algn="l" marL="365760" indent="-365760">
+              <a:t>b) Nếu tế bào ở lô đối chứng cũng chết thì chưa kết luận được tế bào chết do mất nhân.</a:t>
+            </a:r>
+          </a:p>
+          <a:p>
+            <a:pPr algn="l">
               <a:spcAft>
                 <a:spcPts val="800"/>
               </a:spcAft>
-              <a:buClr>
-                <a:srgbClr val="1E40AF"/>
-              </a:buClr>
-              <a:buFont typeface="Arial"/>
-              <a:buChar char="•"/>
             </a:pPr>
             <a:r>
-              <a:rPr sz="2000">
+              <a:rPr sz="2000" b="1">
                 <a:solidFill>
                   <a:srgbClr val="1E293B"/>
                 </a:solidFill>
                 <a:latin typeface="Calibri"/>
               </a:rPr>
-              <a:t>d) Đúng: SGV tr.25.</a:t>
+              <a:t>c) Lô đối chứng là không cần thiết vì đã thấy tế bào mất nhân bị chết.</a:t>
+            </a:r>
+          </a:p>
+          <a:p>
+            <a:pPr algn="l">
+              <a:spcAft>
+                <a:spcPts val="800"/>
+              </a:spcAft>
+            </a:pPr>
+            <a:r>
+              <a:rPr sz="2000" b="1">
+                <a:solidFill>
+                  <a:srgbClr val="1E293B"/>
+                </a:solidFill>
+                <a:latin typeface="Calibri"/>
+              </a:rPr>
+              <a:t>d) Nếu tế bào ở lô đối chứng sống, lô thực nghiệm chết thì thí nghiệm ủng hộ giả thuyết nhân có vai trò sống còn.</a:t>
             </a:r>
           </a:p>
         </p:txBody>
@@ -16383,14 +16342,14 @@
         </p:nvSpPr>
         <p:spPr>
           <a:xfrm>
-            <a:off x="10701223" y="457200"/>
-            <a:ext cx="941832" cy="457200"/>
+            <a:off x="10463479" y="457200"/>
+            <a:ext cx="1179576" cy="457200"/>
           </a:xfrm>
           <a:prstGeom prst="roundRect">
             <a:avLst/>
           </a:prstGeom>
           <a:solidFill>
-            <a:srgbClr val="1E40AF"/>
+            <a:srgbClr val="991B1B"/>
           </a:solidFill>
           <a:ln>
             <a:noFill/>
@@ -16423,7 +16382,7 @@
                 </a:solidFill>
                 <a:latin typeface="Arial"/>
               </a:rPr>
-              <a:t>ĐỀ BÀI</a:t>
+              <a:t>LỜI GIẢI</a:t>
             </a:r>
           </a:p>
         </p:txBody>
@@ -16437,7 +16396,7 @@
         <p:spPr>
           <a:xfrm>
             <a:off x="731520" y="274320"/>
-            <a:ext cx="10030968" cy="868680"/>
+            <a:ext cx="9793224" cy="868680"/>
           </a:xfrm>
           <a:prstGeom prst="rect">
             <a:avLst/>
@@ -16457,7 +16416,7 @@
                 </a:solidFill>
                 <a:latin typeface="Arial"/>
               </a:rPr>
-              <a:t>ĐỀ MINH HỌA · PHẦN II · CÂU 3</a:t>
+              <a:t>ĐỀ MINH HỌA · PHẦN II · CÂU 2</a:t>
             </a:r>
           </a:p>
         </p:txBody>
@@ -16563,83 +16522,87 @@
           </a:bodyPr>
           <a:lstStyle/>
           <a:p>
-            <a:pPr algn="l">
+            <a:pPr algn="l" marL="365760" indent="-365760">
               <a:spcAft>
                 <a:spcPts val="800"/>
               </a:spcAft>
+              <a:buClr>
+                <a:srgbClr val="1E40AF"/>
+              </a:buClr>
+              <a:buFont typeface="Arial"/>
+              <a:buChar char="•"/>
             </a:pPr>
             <a:r>
-              <a:rPr sz="2000" b="1">
+              <a:rPr sz="2000">
                 <a:solidFill>
                   <a:srgbClr val="1E293B"/>
                 </a:solidFill>
                 <a:latin typeface="Calibri"/>
               </a:rPr>
-              <a:t>Cơ thể người có các cơ chế duy trì thân nhiệt, pH, đường huyết, nồng độ các ion ở mức tương đối ổn định; đồng thời luôn lấy thức ăn, nước, O₂ và thải chất thải ra môi trường.</a:t>
-            </a:r>
-          </a:p>
-          <a:p>
-            <a:pPr algn="l">
+              <a:t>a) Đúng: Đúng như SGK.</a:t>
+            </a:r>
+          </a:p>
+          <a:p>
+            <a:pPr algn="l" marL="365760" indent="-365760">
               <a:spcAft>
                 <a:spcPts val="800"/>
               </a:spcAft>
+              <a:buClr>
+                <a:srgbClr val="1E40AF"/>
+              </a:buClr>
+              <a:buFont typeface="Arial"/>
+              <a:buChar char="•"/>
             </a:pPr>
             <a:r>
-              <a:rPr sz="2000" b="1">
+              <a:rPr sz="2000">
                 <a:solidFill>
                   <a:srgbClr val="1E293B"/>
                 </a:solidFill>
                 <a:latin typeface="Calibri"/>
               </a:rPr>
-              <a:t>a) Cơ thể người là một hệ mở.</a:t>
-            </a:r>
-          </a:p>
-          <a:p>
-            <a:pPr algn="l">
+              <a:t>b) Đúng: Có thể do tác động cơ học khi lấy nhân (SGV).</a:t>
+            </a:r>
+          </a:p>
+          <a:p>
+            <a:pPr algn="l" marL="365760" indent="-365760">
               <a:spcAft>
                 <a:spcPts val="800"/>
               </a:spcAft>
+              <a:buClr>
+                <a:srgbClr val="1E40AF"/>
+              </a:buClr>
+              <a:buFont typeface="Arial"/>
+              <a:buChar char="•"/>
             </a:pPr>
             <a:r>
-              <a:rPr sz="2000" b="1">
+              <a:rPr sz="2000">
                 <a:solidFill>
                   <a:srgbClr val="1E293B"/>
                 </a:solidFill>
                 <a:latin typeface="Calibri"/>
               </a:rPr>
-              <a:t>b) Duy trì thân nhiệt ổn định là biểu hiện của khả năng tự điều chỉnh.</a:t>
-            </a:r>
-          </a:p>
-          <a:p>
-            <a:pPr algn="l">
+              <a:t>c) Sai: Đối chứng loại trừ ảnh hưởng của thao tác lấy nhân.</a:t>
+            </a:r>
+          </a:p>
+          <a:p>
+            <a:pPr algn="l" marL="365760" indent="-365760">
               <a:spcAft>
                 <a:spcPts val="800"/>
               </a:spcAft>
+              <a:buClr>
+                <a:srgbClr val="1E40AF"/>
+              </a:buClr>
+              <a:buFont typeface="Arial"/>
+              <a:buChar char="•"/>
             </a:pPr>
             <a:r>
-              <a:rPr sz="2000" b="1">
+              <a:rPr sz="2000">
                 <a:solidFill>
                   <a:srgbClr val="1E293B"/>
                 </a:solidFill>
                 <a:latin typeface="Calibri"/>
               </a:rPr>
-              <a:t>c) Khi môi trường thay đổi, các thông số bên trong cơ thể thay đổi theo hoàn toàn.</a:t>
-            </a:r>
-          </a:p>
-          <a:p>
-            <a:pPr algn="l">
-              <a:spcAft>
-                <a:spcPts val="800"/>
-              </a:spcAft>
-            </a:pPr>
-            <a:r>
-              <a:rPr sz="2000" b="1">
-                <a:solidFill>
-                  <a:srgbClr val="1E293B"/>
-                </a:solidFill>
-                <a:latin typeface="Calibri"/>
-              </a:rPr>
-              <a:t>d) Nếu khả năng tự điều chỉnh bị trục trặc, cơ thể có thể bị bệnh, thậm chí tử vong.</a:t>
+              <a:t>d) Đúng: SGV tr.25.</a:t>
             </a:r>
           </a:p>
         </p:txBody>
@@ -16722,14 +16685,14 @@
         </p:nvSpPr>
         <p:spPr>
           <a:xfrm>
-            <a:off x="10463479" y="457200"/>
-            <a:ext cx="1179576" cy="457200"/>
+            <a:off x="10701223" y="457200"/>
+            <a:ext cx="941832" cy="457200"/>
           </a:xfrm>
           <a:prstGeom prst="roundRect">
             <a:avLst/>
           </a:prstGeom>
           <a:solidFill>
-            <a:srgbClr val="991B1B"/>
+            <a:srgbClr val="1E40AF"/>
           </a:solidFill>
           <a:ln>
             <a:noFill/>
@@ -16762,7 +16725,7 @@
                 </a:solidFill>
                 <a:latin typeface="Arial"/>
               </a:rPr>
-              <a:t>LỜI GIẢI</a:t>
+              <a:t>ĐỀ BÀI</a:t>
             </a:r>
           </a:p>
         </p:txBody>
@@ -16776,7 +16739,7 @@
         <p:spPr>
           <a:xfrm>
             <a:off x="731520" y="274320"/>
-            <a:ext cx="9793224" cy="868680"/>
+            <a:ext cx="10030968" cy="868680"/>
           </a:xfrm>
           <a:prstGeom prst="rect">
             <a:avLst/>
@@ -16902,87 +16865,83 @@
           </a:bodyPr>
           <a:lstStyle/>
           <a:p>
-            <a:pPr algn="l" marL="365760" indent="-365760">
+            <a:pPr algn="l">
               <a:spcAft>
                 <a:spcPts val="800"/>
               </a:spcAft>
-              <a:buClr>
-                <a:srgbClr val="1E40AF"/>
-              </a:buClr>
-              <a:buFont typeface="Arial"/>
-              <a:buChar char="•"/>
             </a:pPr>
             <a:r>
-              <a:rPr sz="2000">
+              <a:rPr sz="2000" b="1">
                 <a:solidFill>
                   <a:srgbClr val="1E293B"/>
                 </a:solidFill>
                 <a:latin typeface="Calibri"/>
               </a:rPr>
-              <a:t>a) Đúng: Không ngừng trao đổi vật chất, năng lượng với môi trường.</a:t>
-            </a:r>
-          </a:p>
-          <a:p>
-            <a:pPr algn="l" marL="365760" indent="-365760">
+              <a:t>Cơ thể người có các cơ chế duy trì thân nhiệt, pH, đường huyết, nồng độ các ion ở mức tương đối ổn định; đồng thời luôn lấy thức ăn, nước, O₂ và thải chất thải ra môi trường.</a:t>
+            </a:r>
+          </a:p>
+          <a:p>
+            <a:pPr algn="l">
               <a:spcAft>
                 <a:spcPts val="800"/>
               </a:spcAft>
-              <a:buClr>
-                <a:srgbClr val="1E40AF"/>
-              </a:buClr>
-              <a:buFont typeface="Arial"/>
-              <a:buChar char="•"/>
             </a:pPr>
             <a:r>
-              <a:rPr sz="2000">
+              <a:rPr sz="2000" b="1">
                 <a:solidFill>
                   <a:srgbClr val="1E293B"/>
                 </a:solidFill>
                 <a:latin typeface="Calibri"/>
               </a:rPr>
-              <a:t>b) Đúng: Cân bằng nội môi.</a:t>
-            </a:r>
-          </a:p>
-          <a:p>
-            <a:pPr algn="l" marL="365760" indent="-365760">
+              <a:t>a) Cơ thể người là một hệ mở.</a:t>
+            </a:r>
+          </a:p>
+          <a:p>
+            <a:pPr algn="l">
               <a:spcAft>
                 <a:spcPts val="800"/>
               </a:spcAft>
-              <a:buClr>
-                <a:srgbClr val="1E40AF"/>
-              </a:buClr>
-              <a:buFont typeface="Arial"/>
-              <a:buChar char="•"/>
             </a:pPr>
             <a:r>
-              <a:rPr sz="2000">
+              <a:rPr sz="2000" b="1">
                 <a:solidFill>
                   <a:srgbClr val="1E293B"/>
                 </a:solidFill>
                 <a:latin typeface="Calibri"/>
               </a:rPr>
-              <a:t>c) Sai: Cơ thể tự điều chỉnh để duy trì ổn định.</a:t>
-            </a:r>
-          </a:p>
-          <a:p>
-            <a:pPr algn="l" marL="365760" indent="-365760">
+              <a:t>b) Duy trì thân nhiệt ổn định là biểu hiện của khả năng tự điều chỉnh.</a:t>
+            </a:r>
+          </a:p>
+          <a:p>
+            <a:pPr algn="l">
               <a:spcAft>
                 <a:spcPts val="800"/>
               </a:spcAft>
-              <a:buClr>
-                <a:srgbClr val="1E40AF"/>
-              </a:buClr>
-              <a:buFont typeface="Arial"/>
-              <a:buChar char="•"/>
             </a:pPr>
             <a:r>
-              <a:rPr sz="2000">
+              <a:rPr sz="2000" b="1">
                 <a:solidFill>
                   <a:srgbClr val="1E293B"/>
                 </a:solidFill>
                 <a:latin typeface="Calibri"/>
               </a:rPr>
-              <a:t>d) Đúng: SGK mục II.2.</a:t>
+              <a:t>c) Khi môi trường thay đổi, các thông số bên trong cơ thể thay đổi theo hoàn toàn.</a:t>
+            </a:r>
+          </a:p>
+          <a:p>
+            <a:pPr algn="l">
+              <a:spcAft>
+                <a:spcPts val="800"/>
+              </a:spcAft>
+            </a:pPr>
+            <a:r>
+              <a:rPr sz="2000" b="1">
+                <a:solidFill>
+                  <a:srgbClr val="1E293B"/>
+                </a:solidFill>
+                <a:latin typeface="Calibri"/>
+              </a:rPr>
+              <a:t>d) Nếu khả năng tự điều chỉnh bị trục trặc, cơ thể có thể bị bệnh, thậm chí tử vong.</a:t>
             </a:r>
           </a:p>
         </p:txBody>
@@ -17325,14 +17284,14 @@
         </p:nvSpPr>
         <p:spPr>
           <a:xfrm>
-            <a:off x="10701223" y="457200"/>
-            <a:ext cx="941832" cy="457200"/>
+            <a:off x="10463479" y="457200"/>
+            <a:ext cx="1179576" cy="457200"/>
           </a:xfrm>
           <a:prstGeom prst="roundRect">
             <a:avLst/>
           </a:prstGeom>
           <a:solidFill>
-            <a:srgbClr val="1E40AF"/>
+            <a:srgbClr val="991B1B"/>
           </a:solidFill>
           <a:ln>
             <a:noFill/>
@@ -17365,7 +17324,7 @@
                 </a:solidFill>
                 <a:latin typeface="Arial"/>
               </a:rPr>
-              <a:t>ĐỀ BÀI</a:t>
+              <a:t>LỜI GIẢI</a:t>
             </a:r>
           </a:p>
         </p:txBody>
@@ -17379,7 +17338,7 @@
         <p:spPr>
           <a:xfrm>
             <a:off x="731520" y="274320"/>
-            <a:ext cx="10030968" cy="868680"/>
+            <a:ext cx="9793224" cy="868680"/>
           </a:xfrm>
           <a:prstGeom prst="rect">
             <a:avLst/>
@@ -17399,7 +17358,7 @@
                 </a:solidFill>
                 <a:latin typeface="Arial"/>
               </a:rPr>
-              <a:t>ĐỀ MINH HỌA · PHẦN II · CÂU 4</a:t>
+              <a:t>ĐỀ MINH HỌA · PHẦN II · CÂU 3</a:t>
             </a:r>
           </a:p>
         </p:txBody>
@@ -17505,83 +17464,87 @@
           </a:bodyPr>
           <a:lstStyle/>
           <a:p>
-            <a:pPr algn="l">
+            <a:pPr algn="l" marL="365760" indent="-365760">
               <a:spcAft>
                 <a:spcPts val="800"/>
               </a:spcAft>
+              <a:buClr>
+                <a:srgbClr val="1E40AF"/>
+              </a:buClr>
+              <a:buFont typeface="Arial"/>
+              <a:buChar char="•"/>
             </a:pPr>
             <a:r>
-              <a:rPr sz="2000" b="1">
+              <a:rPr sz="2000">
                 <a:solidFill>
                   <a:srgbClr val="1E293B"/>
                 </a:solidFill>
                 <a:latin typeface="Calibri"/>
               </a:rPr>
-              <a:t>Mùa đông, để giữ ấm cho cây mạ, bà con nông dân thường tát nước vào ruộng mạ.</a:t>
-            </a:r>
-          </a:p>
-          <a:p>
-            <a:pPr algn="l">
+              <a:t>a) Đúng: Không ngừng trao đổi vật chất, năng lượng với môi trường.</a:t>
+            </a:r>
+          </a:p>
+          <a:p>
+            <a:pPr algn="l" marL="365760" indent="-365760">
               <a:spcAft>
                 <a:spcPts val="800"/>
               </a:spcAft>
+              <a:buClr>
+                <a:srgbClr val="1E40AF"/>
+              </a:buClr>
+              <a:buFont typeface="Arial"/>
+              <a:buChar char="•"/>
             </a:pPr>
             <a:r>
-              <a:rPr sz="2000" b="1">
+              <a:rPr sz="2000">
                 <a:solidFill>
                   <a:srgbClr val="1E293B"/>
                 </a:solidFill>
                 <a:latin typeface="Calibri"/>
               </a:rPr>
-              <a:t>a) Nước có nhiệt dung đặc trưng cao.</a:t>
-            </a:r>
-          </a:p>
-          <a:p>
-            <a:pPr algn="l">
+              <a:t>b) Đúng: Cân bằng nội môi.</a:t>
+            </a:r>
+          </a:p>
+          <a:p>
+            <a:pPr algn="l" marL="365760" indent="-365760">
               <a:spcAft>
                 <a:spcPts val="800"/>
               </a:spcAft>
+              <a:buClr>
+                <a:srgbClr val="1E40AF"/>
+              </a:buClr>
+              <a:buFont typeface="Arial"/>
+              <a:buChar char="•"/>
             </a:pPr>
             <a:r>
-              <a:rPr sz="2000" b="1">
+              <a:rPr sz="2000">
                 <a:solidFill>
                   <a:srgbClr val="1E293B"/>
                 </a:solidFill>
                 <a:latin typeface="Calibri"/>
               </a:rPr>
-              <a:t>b) Ban ngày nước hấp thụ nhiệt, ban đêm toả nhiệt làm không khí quanh cây mạ ấm hơn.</a:t>
-            </a:r>
-          </a:p>
-          <a:p>
-            <a:pPr algn="l">
+              <a:t>c) Sai: Cơ thể tự điều chỉnh để duy trì ổn định.</a:t>
+            </a:r>
+          </a:p>
+          <a:p>
+            <a:pPr algn="l" marL="365760" indent="-365760">
               <a:spcAft>
                 <a:spcPts val="800"/>
               </a:spcAft>
+              <a:buClr>
+                <a:srgbClr val="1E40AF"/>
+              </a:buClr>
+              <a:buFont typeface="Arial"/>
+              <a:buChar char="•"/>
             </a:pPr>
             <a:r>
-              <a:rPr sz="2000" b="1">
+              <a:rPr sz="2000">
                 <a:solidFill>
                   <a:srgbClr val="1E293B"/>
                 </a:solidFill>
                 <a:latin typeface="Calibri"/>
               </a:rPr>
-              <a:t>c) Tính chất này có được là do giữa các phân tử nước có nhiều liên kết ion.</a:t>
-            </a:r>
-          </a:p>
-          <a:p>
-            <a:pPr algn="l">
-              <a:spcAft>
-                <a:spcPts val="800"/>
-              </a:spcAft>
-            </a:pPr>
-            <a:r>
-              <a:rPr sz="2000" b="1">
-                <a:solidFill>
-                  <a:srgbClr val="1E293B"/>
-                </a:solidFill>
-                <a:latin typeface="Calibri"/>
-              </a:rPr>
-              <a:t>d) Vùng biển mùa đông thường ấm hơn vùng xa biển cũng được giải thích bằng tính chất này.</a:t>
+              <a:t>d) Đúng: SGK mục II.2.</a:t>
             </a:r>
           </a:p>
         </p:txBody>
@@ -17664,14 +17627,14 @@
         </p:nvSpPr>
         <p:spPr>
           <a:xfrm>
-            <a:off x="10463479" y="457200"/>
-            <a:ext cx="1179576" cy="457200"/>
+            <a:off x="10701223" y="457200"/>
+            <a:ext cx="941832" cy="457200"/>
           </a:xfrm>
           <a:prstGeom prst="roundRect">
             <a:avLst/>
           </a:prstGeom>
           <a:solidFill>
-            <a:srgbClr val="991B1B"/>
+            <a:srgbClr val="1E40AF"/>
           </a:solidFill>
           <a:ln>
             <a:noFill/>
@@ -17704,7 +17667,7 @@
                 </a:solidFill>
                 <a:latin typeface="Arial"/>
               </a:rPr>
-              <a:t>LỜI GIẢI</a:t>
+              <a:t>ĐỀ BÀI</a:t>
             </a:r>
           </a:p>
         </p:txBody>
@@ -17718,7 +17681,7 @@
         <p:spPr>
           <a:xfrm>
             <a:off x="731520" y="274320"/>
-            <a:ext cx="9793224" cy="868680"/>
+            <a:ext cx="10030968" cy="868680"/>
           </a:xfrm>
           <a:prstGeom prst="rect">
             <a:avLst/>
@@ -17844,87 +17807,83 @@
           </a:bodyPr>
           <a:lstStyle/>
           <a:p>
-            <a:pPr algn="l" marL="365760" indent="-365760">
+            <a:pPr algn="l">
               <a:spcAft>
                 <a:spcPts val="800"/>
               </a:spcAft>
-              <a:buClr>
-                <a:srgbClr val="1E40AF"/>
-              </a:buClr>
-              <a:buFont typeface="Arial"/>
-              <a:buChar char="•"/>
             </a:pPr>
             <a:r>
-              <a:rPr sz="2000">
+              <a:rPr sz="2000" b="1">
                 <a:solidFill>
                   <a:srgbClr val="1E293B"/>
                 </a:solidFill>
                 <a:latin typeface="Calibri"/>
               </a:rPr>
-              <a:t>a) Đúng: Phải cung cấp nhiệt lượng lớn mới làm tăng nhiệt độ của nước.</a:t>
-            </a:r>
-          </a:p>
-          <a:p>
-            <a:pPr algn="l" marL="365760" indent="-365760">
+              <a:t>Mùa đông, để giữ ấm cho cây mạ, bà con nông dân thường tát nước vào ruộng mạ.</a:t>
+            </a:r>
+          </a:p>
+          <a:p>
+            <a:pPr algn="l">
               <a:spcAft>
                 <a:spcPts val="800"/>
               </a:spcAft>
-              <a:buClr>
-                <a:srgbClr val="1E40AF"/>
-              </a:buClr>
-              <a:buFont typeface="Arial"/>
-              <a:buChar char="•"/>
             </a:pPr>
             <a:r>
-              <a:rPr sz="2000">
+              <a:rPr sz="2000" b="1">
                 <a:solidFill>
                   <a:srgbClr val="1E293B"/>
                 </a:solidFill>
                 <a:latin typeface="Calibri"/>
               </a:rPr>
-              <a:t>b) Đúng: SGV tr.36.</a:t>
-            </a:r>
-          </a:p>
-          <a:p>
-            <a:pPr algn="l" marL="365760" indent="-365760">
+              <a:t>a) Nước có nhiệt dung đặc trưng cao.</a:t>
+            </a:r>
+          </a:p>
+          <a:p>
+            <a:pPr algn="l">
               <a:spcAft>
                 <a:spcPts val="800"/>
               </a:spcAft>
-              <a:buClr>
-                <a:srgbClr val="1E40AF"/>
-              </a:buClr>
-              <a:buFont typeface="Arial"/>
-              <a:buChar char="•"/>
             </a:pPr>
             <a:r>
-              <a:rPr sz="2000">
+              <a:rPr sz="2000" b="1">
                 <a:solidFill>
                   <a:srgbClr val="1E293B"/>
                 </a:solidFill>
                 <a:latin typeface="Calibri"/>
               </a:rPr>
-              <a:t>c) Sai: Do nhiều liên kết hydrogen.</a:t>
-            </a:r>
-          </a:p>
-          <a:p>
-            <a:pPr algn="l" marL="365760" indent="-365760">
+              <a:t>b) Ban ngày nước hấp thụ nhiệt, ban đêm toả nhiệt làm không khí quanh cây mạ ấm hơn.</a:t>
+            </a:r>
+          </a:p>
+          <a:p>
+            <a:pPr algn="l">
               <a:spcAft>
                 <a:spcPts val="800"/>
               </a:spcAft>
-              <a:buClr>
-                <a:srgbClr val="1E40AF"/>
-              </a:buClr>
-              <a:buFont typeface="Arial"/>
-              <a:buChar char="•"/>
             </a:pPr>
             <a:r>
-              <a:rPr sz="2000">
+              <a:rPr sz="2000" b="1">
                 <a:solidFill>
                   <a:srgbClr val="1E293B"/>
                 </a:solidFill>
                 <a:latin typeface="Calibri"/>
               </a:rPr>
-              <a:t>d) Đúng: Cùng cơ sở nhiệt dung cao của nước.</a:t>
+              <a:t>c) Tính chất này có được là do giữa các phân tử nước có nhiều liên kết ion.</a:t>
+            </a:r>
+          </a:p>
+          <a:p>
+            <a:pPr algn="l">
+              <a:spcAft>
+                <a:spcPts val="800"/>
+              </a:spcAft>
+            </a:pPr>
+            <a:r>
+              <a:rPr sz="2000" b="1">
+                <a:solidFill>
+                  <a:srgbClr val="1E293B"/>
+                </a:solidFill>
+                <a:latin typeface="Calibri"/>
+              </a:rPr>
+              <a:t>d) Vùng biển mùa đông thường ấm hơn vùng xa biển cũng được giải thích bằng tính chất này.</a:t>
             </a:r>
           </a:p>
         </p:txBody>
@@ -18007,14 +17966,14 @@
         </p:nvSpPr>
         <p:spPr>
           <a:xfrm>
-            <a:off x="10701223" y="457200"/>
-            <a:ext cx="941832" cy="457200"/>
+            <a:off x="10463479" y="457200"/>
+            <a:ext cx="1179576" cy="457200"/>
           </a:xfrm>
           <a:prstGeom prst="roundRect">
             <a:avLst/>
           </a:prstGeom>
           <a:solidFill>
-            <a:srgbClr val="1E40AF"/>
+            <a:srgbClr val="991B1B"/>
           </a:solidFill>
           <a:ln>
             <a:noFill/>
@@ -18047,7 +18006,7 @@
                 </a:solidFill>
                 <a:latin typeface="Arial"/>
               </a:rPr>
-              <a:t>ĐỀ BÀI</a:t>
+              <a:t>LỜI GIẢI</a:t>
             </a:r>
           </a:p>
         </p:txBody>
@@ -18061,7 +18020,7 @@
         <p:spPr>
           <a:xfrm>
             <a:off x="731520" y="274320"/>
-            <a:ext cx="10030968" cy="868680"/>
+            <a:ext cx="9793224" cy="868680"/>
           </a:xfrm>
           <a:prstGeom prst="rect">
             <a:avLst/>
@@ -18081,7 +18040,7 @@
                 </a:solidFill>
                 <a:latin typeface="Arial"/>
               </a:rPr>
-              <a:t>ĐỀ MINH HỌA · PHẦN III · CÂU 1</a:t>
+              <a:t>ĐỀ MINH HỌA · PHẦN II · CÂU 4</a:t>
             </a:r>
           </a:p>
         </p:txBody>
@@ -18187,19 +18146,87 @@
           </a:bodyPr>
           <a:lstStyle/>
           <a:p>
-            <a:pPr algn="l">
+            <a:pPr algn="l" marL="365760" indent="-365760">
               <a:spcAft>
                 <a:spcPts val="800"/>
               </a:spcAft>
+              <a:buClr>
+                <a:srgbClr val="1E40AF"/>
+              </a:buClr>
+              <a:buFont typeface="Arial"/>
+              <a:buChar char="•"/>
             </a:pPr>
             <a:r>
-              <a:rPr sz="2000" b="1">
+              <a:rPr sz="2000">
                 <a:solidFill>
                   <a:srgbClr val="1E293B"/>
                 </a:solidFill>
                 <a:latin typeface="Calibri"/>
               </a:rPr>
-              <a:t>Uỷ ban Môi trường và Phát triển Thế giới (WCED) của Liên hợp quốc đưa ra định nghĩa về phát triển bền vững vào năm nào?</a:t>
+              <a:t>a) Đúng: Phải cung cấp nhiệt lượng lớn mới làm tăng nhiệt độ của nước.</a:t>
+            </a:r>
+          </a:p>
+          <a:p>
+            <a:pPr algn="l" marL="365760" indent="-365760">
+              <a:spcAft>
+                <a:spcPts val="800"/>
+              </a:spcAft>
+              <a:buClr>
+                <a:srgbClr val="1E40AF"/>
+              </a:buClr>
+              <a:buFont typeface="Arial"/>
+              <a:buChar char="•"/>
+            </a:pPr>
+            <a:r>
+              <a:rPr sz="2000">
+                <a:solidFill>
+                  <a:srgbClr val="1E293B"/>
+                </a:solidFill>
+                <a:latin typeface="Calibri"/>
+              </a:rPr>
+              <a:t>b) Đúng: SGV tr.36.</a:t>
+            </a:r>
+          </a:p>
+          <a:p>
+            <a:pPr algn="l" marL="365760" indent="-365760">
+              <a:spcAft>
+                <a:spcPts val="800"/>
+              </a:spcAft>
+              <a:buClr>
+                <a:srgbClr val="1E40AF"/>
+              </a:buClr>
+              <a:buFont typeface="Arial"/>
+              <a:buChar char="•"/>
+            </a:pPr>
+            <a:r>
+              <a:rPr sz="2000">
+                <a:solidFill>
+                  <a:srgbClr val="1E293B"/>
+                </a:solidFill>
+                <a:latin typeface="Calibri"/>
+              </a:rPr>
+              <a:t>c) Sai: Do nhiều liên kết hydrogen.</a:t>
+            </a:r>
+          </a:p>
+          <a:p>
+            <a:pPr algn="l" marL="365760" indent="-365760">
+              <a:spcAft>
+                <a:spcPts val="800"/>
+              </a:spcAft>
+              <a:buClr>
+                <a:srgbClr val="1E40AF"/>
+              </a:buClr>
+              <a:buFont typeface="Arial"/>
+              <a:buChar char="•"/>
+            </a:pPr>
+            <a:r>
+              <a:rPr sz="2000">
+                <a:solidFill>
+                  <a:srgbClr val="1E293B"/>
+                </a:solidFill>
+                <a:latin typeface="Calibri"/>
+              </a:rPr>
+              <a:t>d) Đúng: Cùng cơ sở nhiệt dung cao của nước.</a:t>
             </a:r>
           </a:p>
         </p:txBody>
@@ -18282,6 +18309,281 @@
         </p:nvSpPr>
         <p:spPr>
           <a:xfrm>
+            <a:off x="10701223" y="457200"/>
+            <a:ext cx="941832" cy="457200"/>
+          </a:xfrm>
+          <a:prstGeom prst="roundRect">
+            <a:avLst/>
+          </a:prstGeom>
+          <a:solidFill>
+            <a:srgbClr val="1E40AF"/>
+          </a:solidFill>
+          <a:ln>
+            <a:noFill/>
+          </a:ln>
+          <a:effectLst/>
+        </p:spPr>
+        <p:style>
+          <a:lnRef idx="1">
+            <a:schemeClr val="accent1"/>
+          </a:lnRef>
+          <a:fillRef idx="3">
+            <a:schemeClr val="accent1"/>
+          </a:fillRef>
+          <a:effectRef idx="2">
+            <a:schemeClr val="accent1"/>
+          </a:effectRef>
+          <a:fontRef idx="minor">
+            <a:schemeClr val="lt1"/>
+          </a:fontRef>
+        </p:style>
+        <p:txBody>
+          <a:bodyPr rtlCol="0" anchor="ctr" tIns="0" bIns="0"/>
+          <a:lstStyle/>
+          <a:p>
+            <a:pPr algn="ctr"/>
+            <a:r>
+              <a:rPr sz="1400" b="1">
+                <a:solidFill>
+                  <a:srgbClr val="FFFFFF"/>
+                </a:solidFill>
+                <a:latin typeface="Arial"/>
+              </a:rPr>
+              <a:t>ĐỀ BÀI</a:t>
+            </a:r>
+          </a:p>
+        </p:txBody>
+      </p:sp>
+      <p:sp>
+        <p:nvSpPr>
+          <p:cNvPr id="4" name="TextBox 3"/>
+          <p:cNvSpPr txBox="1"/>
+          <p:nvPr/>
+        </p:nvSpPr>
+        <p:spPr>
+          <a:xfrm>
+            <a:off x="731520" y="274320"/>
+            <a:ext cx="10030968" cy="868680"/>
+          </a:xfrm>
+          <a:prstGeom prst="rect">
+            <a:avLst/>
+          </a:prstGeom>
+          <a:noFill/>
+        </p:spPr>
+        <p:txBody>
+          <a:bodyPr wrap="square" anchor="ctr">
+            <a:spAutoFit/>
+          </a:bodyPr>
+          <a:lstStyle/>
+          <a:p>
+            <a:r>
+              <a:rPr sz="3600" b="1">
+                <a:solidFill>
+                  <a:srgbClr val="1E40AF"/>
+                </a:solidFill>
+                <a:latin typeface="Arial"/>
+              </a:rPr>
+              <a:t>ĐỀ MINH HỌA · PHẦN III · CÂU 1</a:t>
+            </a:r>
+          </a:p>
+        </p:txBody>
+      </p:sp>
+      <p:sp>
+        <p:nvSpPr>
+          <p:cNvPr id="5" name="Rectangle 4"/>
+          <p:cNvSpPr/>
+          <p:nvPr/>
+        </p:nvSpPr>
+        <p:spPr>
+          <a:xfrm>
+            <a:off x="457200" y="1207008"/>
+            <a:ext cx="11274552" cy="22000"/>
+          </a:xfrm>
+          <a:prstGeom prst="rect">
+            <a:avLst/>
+          </a:prstGeom>
+          <a:solidFill>
+            <a:srgbClr val="E2E8F0"/>
+          </a:solidFill>
+          <a:ln>
+            <a:noFill/>
+          </a:ln>
+          <a:effectLst/>
+        </p:spPr>
+        <p:style>
+          <a:lnRef idx="1">
+            <a:schemeClr val="accent1"/>
+          </a:lnRef>
+          <a:fillRef idx="3">
+            <a:schemeClr val="accent1"/>
+          </a:fillRef>
+          <a:effectRef idx="2">
+            <a:schemeClr val="accent1"/>
+          </a:effectRef>
+          <a:fontRef idx="minor">
+            <a:schemeClr val="lt1"/>
+          </a:fontRef>
+        </p:style>
+        <p:txBody>
+          <a:bodyPr rtlCol="0" anchor="ctr"/>
+          <a:lstStyle/>
+          <a:p>
+            <a:pPr algn="ctr"/>
+          </a:p>
+        </p:txBody>
+      </p:sp>
+      <p:sp>
+        <p:nvSpPr>
+          <p:cNvPr id="6" name="TextBox 5"/>
+          <p:cNvSpPr txBox="1"/>
+          <p:nvPr/>
+        </p:nvSpPr>
+        <p:spPr>
+          <a:xfrm>
+            <a:off x="457200" y="6355080"/>
+            <a:ext cx="11274552" cy="365760"/>
+          </a:xfrm>
+          <a:prstGeom prst="rect">
+            <a:avLst/>
+          </a:prstGeom>
+          <a:noFill/>
+        </p:spPr>
+        <p:txBody>
+          <a:bodyPr wrap="none">
+            <a:spAutoFit/>
+          </a:bodyPr>
+          <a:lstStyle/>
+          <a:p>
+            <a:pPr algn="r"/>
+            <a:r>
+              <a:rPr sz="1200">
+                <a:solidFill>
+                  <a:srgbClr val="64748B"/>
+                </a:solidFill>
+                <a:latin typeface="Calibri"/>
+              </a:rPr>
+              <a:t>Đề cương Sinh học 10 · Giữa học kì I          53</a:t>
+            </a:r>
+          </a:p>
+        </p:txBody>
+      </p:sp>
+      <p:sp>
+        <p:nvSpPr>
+          <p:cNvPr id="7" name="TextBox 6"/>
+          <p:cNvSpPr txBox="1"/>
+          <p:nvPr/>
+        </p:nvSpPr>
+        <p:spPr>
+          <a:xfrm>
+            <a:off x="731520" y="1463040"/>
+            <a:ext cx="10789920" cy="4754880"/>
+          </a:xfrm>
+          <a:prstGeom prst="rect">
+            <a:avLst/>
+          </a:prstGeom>
+          <a:noFill/>
+        </p:spPr>
+        <p:txBody>
+          <a:bodyPr wrap="square" anchor="t" lIns="45720" rIns="45720">
+            <a:spAutoFit/>
+          </a:bodyPr>
+          <a:lstStyle/>
+          <a:p>
+            <a:pPr algn="l">
+              <a:spcAft>
+                <a:spcPts val="800"/>
+              </a:spcAft>
+            </a:pPr>
+            <a:r>
+              <a:rPr sz="2000" b="1">
+                <a:solidFill>
+                  <a:srgbClr val="1E293B"/>
+                </a:solidFill>
+                <a:latin typeface="Calibri"/>
+              </a:rPr>
+              <a:t>Uỷ ban Môi trường và Phát triển Thế giới (WCED) của Liên hợp quốc đưa ra định nghĩa về phát triển bền vững vào năm nào?</a:t>
+            </a:r>
+          </a:p>
+        </p:txBody>
+      </p:sp>
+    </p:spTree>
+  </p:cSld>
+  <p:clrMapOvr>
+    <a:masterClrMapping/>
+  </p:clrMapOvr>
+</p:sld>
+</file>
+
+<file path=ppt/slides/slide54.xml><?xml version="1.0" encoding="utf-8"?>
+<p:sld xmlns:a="http://schemas.openxmlformats.org/drawingml/2006/main" xmlns:p="http://schemas.openxmlformats.org/presentationml/2006/main" xmlns:r="http://schemas.openxmlformats.org/officeDocument/2006/relationships">
+  <p:cSld>
+    <p:bg>
+      <p:bgPr>
+        <a:solidFill>
+          <a:srgbClr val="FFFFFF"/>
+        </a:solidFill>
+        <a:effectLst/>
+      </p:bgPr>
+    </p:bg>
+    <p:spTree>
+      <p:nvGrpSpPr>
+        <p:cNvPr id="1" name=""/>
+        <p:cNvGrpSpPr/>
+        <p:nvPr/>
+      </p:nvGrpSpPr>
+      <p:grpSpPr/>
+      <p:sp>
+        <p:nvSpPr>
+          <p:cNvPr id="2" name="Rectangle 1"/>
+          <p:cNvSpPr/>
+          <p:nvPr/>
+        </p:nvSpPr>
+        <p:spPr>
+          <a:xfrm>
+            <a:off x="457200" y="384048"/>
+            <a:ext cx="109728" cy="658368"/>
+          </a:xfrm>
+          <a:prstGeom prst="rect">
+            <a:avLst/>
+          </a:prstGeom>
+          <a:solidFill>
+            <a:srgbClr val="1E40AF"/>
+          </a:solidFill>
+          <a:ln>
+            <a:noFill/>
+          </a:ln>
+          <a:effectLst/>
+        </p:spPr>
+        <p:style>
+          <a:lnRef idx="1">
+            <a:schemeClr val="accent1"/>
+          </a:lnRef>
+          <a:fillRef idx="3">
+            <a:schemeClr val="accent1"/>
+          </a:fillRef>
+          <a:effectRef idx="2">
+            <a:schemeClr val="accent1"/>
+          </a:effectRef>
+          <a:fontRef idx="minor">
+            <a:schemeClr val="lt1"/>
+          </a:fontRef>
+        </p:style>
+        <p:txBody>
+          <a:bodyPr rtlCol="0" anchor="ctr"/>
+          <a:lstStyle/>
+          <a:p>
+            <a:pPr algn="ctr"/>
+          </a:p>
+        </p:txBody>
+      </p:sp>
+      <p:sp>
+        <p:nvSpPr>
+          <p:cNvPr id="3" name="Rounded Rectangle 2"/>
+          <p:cNvSpPr/>
+          <p:nvPr/>
+        </p:nvSpPr>
+        <p:spPr>
+          <a:xfrm>
             <a:off x="10463479" y="457200"/>
             <a:ext cx="1179576" cy="457200"/>
           </a:xfrm>
@@ -18435,7 +18737,7 @@
                 </a:solidFill>
                 <a:latin typeface="Calibri"/>
               </a:rPr>
-              <a:t>Đề cương Sinh học 10 · Giữa học kì I          53</a:t>
+              <a:t>Đề cương Sinh học 10 · Giữa học kì I          54</a:t>
             </a:r>
           </a:p>
         </p:txBody>
@@ -19103,14 +19405,14 @@
         </p:nvSpPr>
         <p:spPr>
           <a:xfrm>
-            <a:off x="10701223" y="457200"/>
-            <a:ext cx="941832" cy="457200"/>
+            <a:off x="10344607" y="457200"/>
+            <a:ext cx="1298448" cy="457200"/>
           </a:xfrm>
           <a:prstGeom prst="roundRect">
             <a:avLst/>
           </a:prstGeom>
           <a:solidFill>
-            <a:srgbClr val="1E40AF"/>
+            <a:srgbClr val="166534"/>
           </a:solidFill>
           <a:ln>
             <a:noFill/>
@@ -19143,7 +19445,7 @@
                 </a:solidFill>
                 <a:latin typeface="Arial"/>
               </a:rPr>
-              <a:t>ĐỀ BÀI</a:t>
+              <a:t>LÝ THUYẾT</a:t>
             </a:r>
           </a:p>
         </p:txBody>
@@ -19157,7 +19459,7 @@
         <p:spPr>
           <a:xfrm>
             <a:off x="731520" y="274320"/>
-            <a:ext cx="10030968" cy="868680"/>
+            <a:ext cx="9674352" cy="868680"/>
           </a:xfrm>
           <a:prstGeom prst="rect">
             <a:avLst/>
@@ -19177,7 +19479,7 @@
                 </a:solidFill>
                 <a:latin typeface="Arial"/>
               </a:rPr>
-              <a:t>ĐỀ MINH HỌA · PHẦN I · CÂU 1</a:t>
+              <a:t>BÀI 6: THỰC HÀNH NHẬN BIẾT MỘT SỐ PHÂN TỬ SINH HỌC · SƠ ĐỒ TƯ DUY</a:t>
             </a:r>
           </a:p>
         </p:txBody>
@@ -19261,109 +19563,30 @@
           </a:p>
         </p:txBody>
       </p:sp>
-      <p:sp>
-        <p:nvSpPr>
-          <p:cNvPr id="7" name="TextBox 6"/>
-          <p:cNvSpPr txBox="1"/>
-          <p:nvPr/>
-        </p:nvSpPr>
-        <p:spPr>
-          <a:xfrm>
-            <a:off x="731520" y="1463040"/>
-            <a:ext cx="10789920" cy="4754880"/>
-          </a:xfrm>
-          <a:prstGeom prst="rect">
-            <a:avLst/>
-          </a:prstGeom>
-          <a:noFill/>
-        </p:spPr>
-        <p:txBody>
-          <a:bodyPr wrap="square" anchor="t" lIns="45720" rIns="45720">
-            <a:spAutoFit/>
-          </a:bodyPr>
-          <a:lstStyle/>
-          <a:p>
-            <a:pPr algn="l">
-              <a:spcAft>
-                <a:spcPts val="800"/>
-              </a:spcAft>
-            </a:pPr>
-            <a:r>
-              <a:rPr sz="2000" b="1">
-                <a:solidFill>
-                  <a:srgbClr val="1E293B"/>
-                </a:solidFill>
-                <a:latin typeface="Calibri"/>
-              </a:rPr>
-              <a:t>Loài vi khuẩn được biết đến là chống chịu phóng xạ tốt nhất, có thể giúp làm sạch các địa điểm bị ô nhiễm phóng xạ là</a:t>
-            </a:r>
-          </a:p>
-          <a:p>
-            <a:pPr algn="l">
-              <a:spcAft>
-                <a:spcPts val="800"/>
-              </a:spcAft>
-            </a:pPr>
-            <a:r>
-              <a:rPr sz="2000" b="1">
-                <a:solidFill>
-                  <a:srgbClr val="1E293B"/>
-                </a:solidFill>
-                <a:latin typeface="Calibri"/>
-              </a:rPr>
-              <a:t>A. Deinococcus radiodurans</a:t>
-            </a:r>
-          </a:p>
-          <a:p>
-            <a:pPr algn="l">
-              <a:spcAft>
-                <a:spcPts val="800"/>
-              </a:spcAft>
-            </a:pPr>
-            <a:r>
-              <a:rPr sz="2000" b="1">
-                <a:solidFill>
-                  <a:srgbClr val="1E293B"/>
-                </a:solidFill>
-                <a:latin typeface="Calibri"/>
-              </a:rPr>
-              <a:t>B. Shewanella oneidensis</a:t>
-            </a:r>
-          </a:p>
-          <a:p>
-            <a:pPr algn="l">
-              <a:spcAft>
-                <a:spcPts val="800"/>
-              </a:spcAft>
-            </a:pPr>
-            <a:r>
-              <a:rPr sz="2000" b="1">
-                <a:solidFill>
-                  <a:srgbClr val="1E293B"/>
-                </a:solidFill>
-                <a:latin typeface="Calibri"/>
-              </a:rPr>
-              <a:t>C. Chlorobium tepidum</a:t>
-            </a:r>
-          </a:p>
-          <a:p>
-            <a:pPr algn="l">
-              <a:spcAft>
-                <a:spcPts val="800"/>
-              </a:spcAft>
-            </a:pPr>
-            <a:r>
-              <a:rPr sz="2000" b="1">
-                <a:solidFill>
-                  <a:srgbClr val="1E293B"/>
-                </a:solidFill>
-                <a:latin typeface="Calibri"/>
-              </a:rPr>
-              <a:t>D. Escherichia coli</a:t>
-            </a:r>
-          </a:p>
-        </p:txBody>
-      </p:sp>
+      <p:pic>
+        <p:nvPicPr>
+          <p:cNvPr id="7" name="Picture 6" descr="SoDoTuDuy_SINH10_Bai6_TH_NhanBietPhanTuSinhHoc_T14-15.png"/>
+          <p:cNvPicPr>
+            <a:picLocks noChangeAspect="1"/>
+          </p:cNvPicPr>
+          <p:nvPr/>
+        </p:nvPicPr>
+        <p:blipFill>
+          <a:blip r:embed="rId2"/>
+          <a:stretch>
+            <a:fillRect/>
+          </a:stretch>
+        </p:blipFill>
+        <p:spPr>
+          <a:xfrm>
+            <a:off x="1811117" y="1371600"/>
+            <a:ext cx="8630725" cy="4846320"/>
+          </a:xfrm>
+          <a:prstGeom prst="rect">
+            <a:avLst/>
+          </a:prstGeom>
+        </p:spPr>
+      </p:pic>
     </p:spTree>
   </p:cSld>
   <p:clrMapOvr>
@@ -19442,14 +19665,14 @@
         </p:nvSpPr>
         <p:spPr>
           <a:xfrm>
-            <a:off x="10463479" y="457200"/>
-            <a:ext cx="1179576" cy="457200"/>
+            <a:off x="10701223" y="457200"/>
+            <a:ext cx="941832" cy="457200"/>
           </a:xfrm>
           <a:prstGeom prst="roundRect">
             <a:avLst/>
           </a:prstGeom>
           <a:solidFill>
-            <a:srgbClr val="991B1B"/>
+            <a:srgbClr val="1E40AF"/>
           </a:solidFill>
           <a:ln>
             <a:noFill/>
@@ -19482,7 +19705,7 @@
                 </a:solidFill>
                 <a:latin typeface="Arial"/>
               </a:rPr>
-              <a:t>LỜI GIẢI</a:t>
+              <a:t>ĐỀ BÀI</a:t>
             </a:r>
           </a:p>
         </p:txBody>
@@ -19496,7 +19719,7 @@
         <p:spPr>
           <a:xfrm>
             <a:off x="731520" y="274320"/>
-            <a:ext cx="9793224" cy="868680"/>
+            <a:ext cx="10030968" cy="868680"/>
           </a:xfrm>
           <a:prstGeom prst="rect">
             <a:avLst/>
@@ -19622,45 +19845,83 @@
           </a:bodyPr>
           <a:lstStyle/>
           <a:p>
-            <a:pPr algn="l" marL="365760" indent="-365760">
+            <a:pPr algn="l">
               <a:spcAft>
                 <a:spcPts val="800"/>
               </a:spcAft>
-              <a:buClr>
-                <a:srgbClr val="1E40AF"/>
-              </a:buClr>
-              <a:buFont typeface="Arial"/>
-              <a:buChar char="•"/>
             </a:pPr>
             <a:r>
-              <a:rPr sz="2000">
+              <a:rPr sz="2000" b="1">
                 <a:solidFill>
                   <a:srgbClr val="1E293B"/>
                 </a:solidFill>
                 <a:latin typeface="Calibri"/>
               </a:rPr>
-              <a:t>Đáp án A.</a:t>
-            </a:r>
-          </a:p>
-          <a:p>
-            <a:pPr algn="l" marL="365760" indent="-365760">
+              <a:t>Loài vi khuẩn được biết đến là chống chịu phóng xạ tốt nhất, có thể giúp làm sạch các địa điểm bị ô nhiễm phóng xạ là</a:t>
+            </a:r>
+          </a:p>
+          <a:p>
+            <a:pPr algn="l">
               <a:spcAft>
                 <a:spcPts val="800"/>
               </a:spcAft>
-              <a:buClr>
-                <a:srgbClr val="1E40AF"/>
-              </a:buClr>
-              <a:buFont typeface="Arial"/>
-              <a:buChar char="•"/>
             </a:pPr>
             <a:r>
-              <a:rPr sz="2000">
+              <a:rPr sz="2000" b="1">
                 <a:solidFill>
                   <a:srgbClr val="1E293B"/>
                 </a:solidFill>
                 <a:latin typeface="Calibri"/>
               </a:rPr>
-              <a:t>SGK tr.8: Deinococcus radiodurans chịu phóng xạ tốt nhất; Shewanella oneidensis sinh năng lượng điện; Chlorobium tepidum sinh năng lượng từ ánh sáng.</a:t>
+              <a:t>A. Deinococcus radiodurans</a:t>
+            </a:r>
+          </a:p>
+          <a:p>
+            <a:pPr algn="l">
+              <a:spcAft>
+                <a:spcPts val="800"/>
+              </a:spcAft>
+            </a:pPr>
+            <a:r>
+              <a:rPr sz="2000" b="1">
+                <a:solidFill>
+                  <a:srgbClr val="1E293B"/>
+                </a:solidFill>
+                <a:latin typeface="Calibri"/>
+              </a:rPr>
+              <a:t>B. Shewanella oneidensis</a:t>
+            </a:r>
+          </a:p>
+          <a:p>
+            <a:pPr algn="l">
+              <a:spcAft>
+                <a:spcPts val="800"/>
+              </a:spcAft>
+            </a:pPr>
+            <a:r>
+              <a:rPr sz="2000" b="1">
+                <a:solidFill>
+                  <a:srgbClr val="1E293B"/>
+                </a:solidFill>
+                <a:latin typeface="Calibri"/>
+              </a:rPr>
+              <a:t>C. Chlorobium tepidum</a:t>
+            </a:r>
+          </a:p>
+          <a:p>
+            <a:pPr algn="l">
+              <a:spcAft>
+                <a:spcPts val="800"/>
+              </a:spcAft>
+            </a:pPr>
+            <a:r>
+              <a:rPr sz="2000" b="1">
+                <a:solidFill>
+                  <a:srgbClr val="1E293B"/>
+                </a:solidFill>
+                <a:latin typeface="Calibri"/>
+              </a:rPr>
+              <a:t>D. Escherichia coli</a:t>
             </a:r>
           </a:p>
         </p:txBody>
